--- a/examples/gallery/diffuser_actor/editable.pptx
+++ b/examples/gallery/diffuser_actor/editable.pptx
@@ -7054,9 +7054,457 @@
           </a:p>
         </p:txBody>
       </p:sp>
+      <p:sp>
+        <p:nvSpPr>
+          <p:cNvPr id="59" name="initial_distribution_0" descr="Editable text; source id initial_distribution_0"/>
+          <p:cNvSpPr txBox="1"/>
+          <p:nvPr/>
+        </p:nvSpPr>
+        <p:spPr>
+          <a:xfrm>
+            <a:off x="797965" y="5039078"/>
+            <a:ext cx="105500" cy="240924"/>
+          </a:xfrm>
+          <a:prstGeom prst="rect">
+            <a:avLst/>
+          </a:prstGeom>
+          <a:noFill/>
+          <a:effectLst/>
+        </p:spPr>
+        <p:txBody>
+          <a:bodyPr wrap="none" anchor="t" tIns="3836" rIns="0" bIns="0" lIns="3836" anchorCtr="0" vertOverflow="overflow">
+            <a:noAutofit/>
+          </a:bodyPr>
+          <a:lstStyle/>
+          <a:p>
+            <a:pPr algn="l" fontAlgn="base">
+              <a:lnSpc>
+                <a:spcPts val="1806"/>
+              </a:lnSpc>
+              <a:spcBef>
+                <a:spcPts val="0"/>
+              </a:spcBef>
+              <a:spcAft>
+                <a:spcPts val="0"/>
+              </a:spcAft>
+              <a:defRPr sz="1570" b="1" i="1" lang="zh-CN" dirty="0">
+                <a:solidFill>
+                  <a:srgbClr val="000000"/>
+                </a:solidFill>
+                <a:latin typeface="Times New Roman"/>
+                <a:ea typeface="Times New Roman"/>
+                <a:cs typeface="Times New Roman"/>
+              </a:defRPr>
+            </a:pPr>
+            <a:r>
+              <a:rPr sz="1570" b="1" i="1" lang="zh-CN" dirty="0">
+                <a:solidFill>
+                  <a:srgbClr val="000000"/>
+                </a:solidFill>
+                <a:latin typeface="Times New Roman"/>
+                <a:ea typeface="Times New Roman"/>
+                <a:cs typeface="Times New Roman"/>
+              </a:rPr>
+              <a:t>τ</a:t>
+            </a:r>
+          </a:p>
+        </p:txBody>
+      </p:sp>
+      <p:sp>
+        <p:nvSpPr>
+          <p:cNvPr id="60" name="initial_distribution_1" descr="Editable text; source id initial_distribution_1"/>
+          <p:cNvSpPr txBox="1"/>
+          <p:nvPr/>
+        </p:nvSpPr>
+        <p:spPr>
+          <a:xfrm>
+            <a:off x="897711" y="5025651"/>
+            <a:ext cx="113173" cy="152687"/>
+          </a:xfrm>
+          <a:prstGeom prst="rect">
+            <a:avLst/>
+          </a:prstGeom>
+          <a:noFill/>
+          <a:effectLst/>
+        </p:spPr>
+        <p:txBody>
+          <a:bodyPr wrap="none" anchor="t" tIns="3836" rIns="0" bIns="0" lIns="7672" anchorCtr="0" vertOverflow="overflow">
+            <a:noAutofit/>
+          </a:bodyPr>
+          <a:lstStyle/>
+          <a:p>
+            <a:pPr algn="l" fontAlgn="base">
+              <a:lnSpc>
+                <a:spcPts val="1111"/>
+              </a:lnSpc>
+              <a:spcBef>
+                <a:spcPts val="0"/>
+              </a:spcBef>
+              <a:spcAft>
+                <a:spcPts val="0"/>
+              </a:spcAft>
+              <a:defRPr sz="966" b="0" i="1" lang="zh-CN" dirty="0">
+                <a:solidFill>
+                  <a:srgbClr val="000000"/>
+                </a:solidFill>
+                <a:latin typeface="Times New Roman"/>
+                <a:ea typeface="Times New Roman"/>
+                <a:cs typeface="Times New Roman"/>
+              </a:defRPr>
+            </a:pPr>
+            <a:r>
+              <a:rPr sz="966" b="0" i="1" lang="zh-CN" dirty="0">
+                <a:solidFill>
+                  <a:srgbClr val="000000"/>
+                </a:solidFill>
+                <a:latin typeface="Times New Roman"/>
+                <a:ea typeface="Times New Roman"/>
+                <a:cs typeface="Times New Roman"/>
+              </a:rPr>
+              <a:t>N</a:t>
+            </a:r>
+          </a:p>
+        </p:txBody>
+      </p:sp>
+      <p:sp>
+        <p:nvSpPr>
+          <p:cNvPr id="61" name="initial_distribution_2" descr="Editable text; source id initial_distribution_2"/>
+          <p:cNvSpPr txBox="1"/>
+          <p:nvPr/>
+        </p:nvSpPr>
+        <p:spPr>
+          <a:xfrm>
+            <a:off x="1183521" y="5039078"/>
+            <a:ext cx="176473" cy="240924"/>
+          </a:xfrm>
+          <a:prstGeom prst="rect">
+            <a:avLst/>
+          </a:prstGeom>
+          <a:noFill/>
+          <a:effectLst/>
+        </p:spPr>
+        <p:txBody>
+          <a:bodyPr wrap="none" anchor="t" tIns="3836" rIns="0" bIns="0" lIns="9590" anchorCtr="0" vertOverflow="overflow">
+            <a:noAutofit/>
+          </a:bodyPr>
+          <a:lstStyle/>
+          <a:p>
+            <a:pPr algn="l" fontAlgn="base">
+              <a:lnSpc>
+                <a:spcPts val="1806"/>
+              </a:lnSpc>
+              <a:spcBef>
+                <a:spcPts val="0"/>
+              </a:spcBef>
+              <a:spcAft>
+                <a:spcPts val="0"/>
+              </a:spcAft>
+              <a:defRPr sz="1570" b="0" i="1" lang="zh-CN" dirty="0">
+                <a:solidFill>
+                  <a:srgbClr val="000000"/>
+                </a:solidFill>
+                <a:latin typeface="Times New Roman"/>
+                <a:ea typeface="Times New Roman"/>
+                <a:cs typeface="Times New Roman"/>
+              </a:defRPr>
+            </a:pPr>
+            <a:r>
+              <a:rPr sz="1570" b="0" i="1" lang="zh-CN" dirty="0">
+                <a:solidFill>
+                  <a:srgbClr val="000000"/>
+                </a:solidFill>
+                <a:latin typeface="Times New Roman"/>
+                <a:ea typeface="Times New Roman"/>
+                <a:cs typeface="Times New Roman"/>
+              </a:rPr>
+              <a:t>N</a:t>
+            </a:r>
+          </a:p>
+        </p:txBody>
+      </p:sp>
+      <p:sp>
+        <p:nvSpPr>
+          <p:cNvPr id="62" name="initial_distribution_3" descr="Editable text; source id initial_distribution_3"/>
+          <p:cNvSpPr txBox="1"/>
+          <p:nvPr/>
+        </p:nvSpPr>
+        <p:spPr>
+          <a:xfrm>
+            <a:off x="1323549" y="5039078"/>
+            <a:ext cx="78645" cy="240924"/>
+          </a:xfrm>
+          <a:prstGeom prst="rect">
+            <a:avLst/>
+          </a:prstGeom>
+          <a:noFill/>
+          <a:effectLst/>
+        </p:spPr>
+        <p:txBody>
+          <a:bodyPr wrap="none" anchor="t" tIns="3836" rIns="0" bIns="0" lIns="3836" anchorCtr="0" vertOverflow="overflow">
+            <a:noAutofit/>
+          </a:bodyPr>
+          <a:lstStyle/>
+          <a:p>
+            <a:pPr algn="l" fontAlgn="base">
+              <a:lnSpc>
+                <a:spcPts val="1806"/>
+              </a:lnSpc>
+              <a:spcBef>
+                <a:spcPts val="0"/>
+              </a:spcBef>
+              <a:spcAft>
+                <a:spcPts val="0"/>
+              </a:spcAft>
+              <a:defRPr sz="1570" b="0" i="0" lang="zh-CN" dirty="0">
+                <a:solidFill>
+                  <a:srgbClr val="000000"/>
+                </a:solidFill>
+                <a:latin typeface="Times New Roman"/>
+                <a:ea typeface="Times New Roman"/>
+                <a:cs typeface="Times New Roman"/>
+              </a:defRPr>
+            </a:pPr>
+            <a:r>
+              <a:rPr sz="1570" b="0" i="0" lang="zh-CN" dirty="0">
+                <a:solidFill>
+                  <a:srgbClr val="000000"/>
+                </a:solidFill>
+                <a:latin typeface="Times New Roman"/>
+                <a:ea typeface="Times New Roman"/>
+                <a:cs typeface="Times New Roman"/>
+              </a:rPr>
+              <a:t>(</a:t>
+            </a:r>
+          </a:p>
+        </p:txBody>
+      </p:sp>
+      <p:sp>
+        <p:nvSpPr>
+          <p:cNvPr id="63" name="initial_distribution_4" descr="Editable text; source id initial_distribution_4"/>
+          <p:cNvSpPr txBox="1"/>
+          <p:nvPr/>
+        </p:nvSpPr>
+        <p:spPr>
+          <a:xfrm>
+            <a:off x="1400276" y="5039078"/>
+            <a:ext cx="111254" cy="240924"/>
+          </a:xfrm>
+          <a:prstGeom prst="rect">
+            <a:avLst/>
+          </a:prstGeom>
+          <a:noFill/>
+          <a:effectLst/>
+        </p:spPr>
+        <p:txBody>
+          <a:bodyPr wrap="none" anchor="t" tIns="3836" rIns="0" bIns="0" lIns="3836" anchorCtr="0" vertOverflow="overflow">
+            <a:noAutofit/>
+          </a:bodyPr>
+          <a:lstStyle/>
+          <a:p>
+            <a:pPr algn="l" fontAlgn="base">
+              <a:lnSpc>
+                <a:spcPts val="1806"/>
+              </a:lnSpc>
+              <a:spcBef>
+                <a:spcPts val="0"/>
+              </a:spcBef>
+              <a:spcAft>
+                <a:spcPts val="0"/>
+              </a:spcAft>
+              <a:defRPr sz="1570" b="1" i="0" lang="zh-CN" dirty="0">
+                <a:solidFill>
+                  <a:srgbClr val="000000"/>
+                </a:solidFill>
+                <a:latin typeface="Times New Roman"/>
+                <a:ea typeface="Times New Roman"/>
+                <a:cs typeface="Times New Roman"/>
+              </a:defRPr>
+            </a:pPr>
+            <a:r>
+              <a:rPr sz="1570" b="1" i="0" lang="zh-CN" dirty="0">
+                <a:solidFill>
+                  <a:srgbClr val="000000"/>
+                </a:solidFill>
+                <a:latin typeface="Times New Roman"/>
+                <a:ea typeface="Times New Roman"/>
+                <a:cs typeface="Times New Roman"/>
+              </a:rPr>
+              <a:t>0</a:t>
+            </a:r>
+          </a:p>
+        </p:txBody>
+      </p:sp>
+      <p:sp>
+        <p:nvSpPr>
+          <p:cNvPr id="64" name="initial_distribution_5" descr="Editable text; source id initial_distribution_5"/>
+          <p:cNvSpPr txBox="1"/>
+          <p:nvPr/>
+        </p:nvSpPr>
+        <p:spPr>
+          <a:xfrm>
+            <a:off x="1517669" y="5039078"/>
+            <a:ext cx="61381" cy="240924"/>
+          </a:xfrm>
+          <a:prstGeom prst="rect">
+            <a:avLst/>
+          </a:prstGeom>
+          <a:noFill/>
+          <a:effectLst/>
+        </p:spPr>
+        <p:txBody>
+          <a:bodyPr wrap="none" anchor="t" tIns="3836" rIns="0" bIns="0" lIns="3836" anchorCtr="0" vertOverflow="overflow">
+            <a:noAutofit/>
+          </a:bodyPr>
+          <a:lstStyle/>
+          <a:p>
+            <a:pPr algn="l" fontAlgn="base">
+              <a:lnSpc>
+                <a:spcPts val="1806"/>
+              </a:lnSpc>
+              <a:spcBef>
+                <a:spcPts val="0"/>
+              </a:spcBef>
+              <a:spcAft>
+                <a:spcPts val="0"/>
+              </a:spcAft>
+              <a:defRPr sz="1570" b="0" i="0" lang="zh-CN" dirty="0">
+                <a:solidFill>
+                  <a:srgbClr val="000000"/>
+                </a:solidFill>
+                <a:latin typeface="Times New Roman"/>
+                <a:ea typeface="Times New Roman"/>
+                <a:cs typeface="Times New Roman"/>
+              </a:defRPr>
+            </a:pPr>
+            <a:r>
+              <a:rPr sz="1570" b="0" i="0" lang="zh-CN" dirty="0">
+                <a:solidFill>
+                  <a:srgbClr val="000000"/>
+                </a:solidFill>
+                <a:latin typeface="Times New Roman"/>
+                <a:ea typeface="Times New Roman"/>
+                <a:cs typeface="Times New Roman"/>
+              </a:rPr>
+              <a:t>,</a:t>
+            </a:r>
+          </a:p>
+        </p:txBody>
+      </p:sp>
+      <p:sp>
+        <p:nvSpPr>
+          <p:cNvPr id="65" name="initial_distribution_6" descr="Editable text; source id initial_distribution_6"/>
+          <p:cNvSpPr txBox="1"/>
+          <p:nvPr/>
+        </p:nvSpPr>
+        <p:spPr>
+          <a:xfrm>
+            <a:off x="1597466" y="5039078"/>
+            <a:ext cx="111254" cy="240924"/>
+          </a:xfrm>
+          <a:prstGeom prst="rect">
+            <a:avLst/>
+          </a:prstGeom>
+          <a:noFill/>
+          <a:effectLst/>
+        </p:spPr>
+        <p:txBody>
+          <a:bodyPr wrap="none" anchor="t" tIns="3836" rIns="0" bIns="0" lIns="3836" anchorCtr="0" vertOverflow="overflow">
+            <a:noAutofit/>
+          </a:bodyPr>
+          <a:lstStyle/>
+          <a:p>
+            <a:pPr algn="l" fontAlgn="base">
+              <a:lnSpc>
+                <a:spcPts val="1806"/>
+              </a:lnSpc>
+              <a:spcBef>
+                <a:spcPts val="0"/>
+              </a:spcBef>
+              <a:spcAft>
+                <a:spcPts val="0"/>
+              </a:spcAft>
+              <a:defRPr sz="1570" b="1" i="0" lang="zh-CN" dirty="0">
+                <a:solidFill>
+                  <a:srgbClr val="000000"/>
+                </a:solidFill>
+                <a:latin typeface="Times New Roman"/>
+                <a:ea typeface="Times New Roman"/>
+                <a:cs typeface="Times New Roman"/>
+              </a:defRPr>
+            </a:pPr>
+            <a:r>
+              <a:rPr sz="1570" b="1" i="0" lang="zh-CN" dirty="0">
+                <a:solidFill>
+                  <a:srgbClr val="000000"/>
+                </a:solidFill>
+                <a:latin typeface="Times New Roman"/>
+                <a:ea typeface="Times New Roman"/>
+                <a:cs typeface="Times New Roman"/>
+              </a:rPr>
+              <a:t>1</a:t>
+            </a:r>
+          </a:p>
+        </p:txBody>
+      </p:sp>
+      <p:sp>
+        <p:nvSpPr>
+          <p:cNvPr id="66" name="initial_distribution_7" descr="Editable text; source id initial_distribution_7"/>
+          <p:cNvSpPr txBox="1"/>
+          <p:nvPr/>
+        </p:nvSpPr>
+        <p:spPr>
+          <a:xfrm>
+            <a:off x="1718695" y="5039078"/>
+            <a:ext cx="78645" cy="240924"/>
+          </a:xfrm>
+          <a:prstGeom prst="rect">
+            <a:avLst/>
+          </a:prstGeom>
+          <a:noFill/>
+          <a:effectLst/>
+        </p:spPr>
+        <p:txBody>
+          <a:bodyPr wrap="none" anchor="t" tIns="3836" rIns="0" bIns="0" lIns="3836" anchorCtr="0" vertOverflow="overflow">
+            <a:noAutofit/>
+          </a:bodyPr>
+          <a:lstStyle/>
+          <a:p>
+            <a:pPr algn="l" fontAlgn="base">
+              <a:lnSpc>
+                <a:spcPts val="1806"/>
+              </a:lnSpc>
+              <a:spcBef>
+                <a:spcPts val="0"/>
+              </a:spcBef>
+              <a:spcAft>
+                <a:spcPts val="0"/>
+              </a:spcAft>
+              <a:defRPr sz="1570" b="0" i="0" lang="zh-CN" dirty="0">
+                <a:solidFill>
+                  <a:srgbClr val="000000"/>
+                </a:solidFill>
+                <a:latin typeface="Times New Roman"/>
+                <a:ea typeface="Times New Roman"/>
+                <a:cs typeface="Times New Roman"/>
+              </a:defRPr>
+            </a:pPr>
+            <a:r>
+              <a:rPr sz="1570" b="0" i="0" lang="zh-CN" dirty="0">
+                <a:solidFill>
+                  <a:srgbClr val="000000"/>
+                </a:solidFill>
+                <a:latin typeface="Times New Roman"/>
+                <a:ea typeface="Times New Roman"/>
+                <a:cs typeface="Times New Roman"/>
+              </a:rPr>
+              <a:t>)</a:t>
+            </a:r>
+          </a:p>
+        </p:txBody>
+      </p:sp>
       <p:cxnSp>
         <p:nvCxnSpPr>
-          <p:cNvPr id="59" name="depth_h" descr="Editable line; source id depth_h"/>
+          <p:cNvPr id="67" name="depth_h" descr="Editable line; source id depth_h"/>
           <p:cNvCxnSpPr/>
           <p:nvPr/>
         </p:nvCxnSpPr>
@@ -7092,7 +7540,7 @@
       </p:cxnSp>
       <p:cxnSp>
         <p:nvCxnSpPr>
-          <p:cNvPr id="60" name="depth_v" descr="Editable line; source id depth_v"/>
+          <p:cNvPr id="68" name="depth_v" descr="Editable line; source id depth_v"/>
           <p:cNvCxnSpPr/>
           <p:nvPr/>
         </p:nvCxnSpPr>
@@ -7128,7 +7576,7 @@
       </p:cxnSp>
       <p:cxnSp>
         <p:nvCxnSpPr>
-          <p:cNvPr id="61" name="rgb_l" descr="Editable line; source id rgb_l"/>
+          <p:cNvPr id="69" name="rgb_l" descr="Editable line; source id rgb_l"/>
           <p:cNvCxnSpPr/>
           <p:nvPr/>
         </p:nvCxnSpPr>
@@ -7164,7 +7612,7 @@
       </p:cxnSp>
       <p:cxnSp>
         <p:nvCxnSpPr>
-          <p:cNvPr id="62" name="rgb_r" descr="Editable line; source id rgb_r"/>
+          <p:cNvPr id="70" name="rgb_r" descr="Editable line; source id rgb_r"/>
           <p:cNvCxnSpPr/>
           <p:nvPr/>
         </p:nvCxnSpPr>
@@ -7200,7 +7648,7 @@
       </p:cxnSp>
       <p:sp>
         <p:nvSpPr>
-          <p:cNvPr id="63" name="enc_grid" descr="Editable line; source id enc_grid"/>
+          <p:cNvPr id="71" name="enc_grid" descr="Editable line; source id enc_grid"/>
           <p:cNvSpPr/>
           <p:nvPr/>
         </p:nvSpPr>
@@ -7274,7 +7722,63 @@
       </p:sp>
       <p:sp>
         <p:nvSpPr>
-          <p:cNvPr id="64" name="grid_cloud" descr="Editable line; source id grid_cloud"/>
+          <p:cNvPr id="72" name="initial_relation_0" descr="Editable text; source id initial_relation_0"/>
+          <p:cNvSpPr txBox="1"/>
+          <p:nvPr/>
+        </p:nvSpPr>
+        <p:spPr>
+          <a:xfrm>
+            <a:off x="1062675" y="5060178"/>
+            <a:ext cx="153454" cy="209082"/>
+          </a:xfrm>
+          <a:prstGeom prst="rect">
+            <a:avLst/>
+          </a:prstGeom>
+          <a:noFill/>
+          <a:effectLst/>
+        </p:spPr>
+        <p:txBody>
+          <a:bodyPr wrap="none" anchor="t" tIns="3836" rIns="0" bIns="0" lIns="3836" anchorCtr="0" vertOverflow="overflow">
+            <a:noAutofit/>
+          </a:bodyPr>
+          <a:lstStyle/>
+          <a:p>
+            <a:pPr algn="l" fontAlgn="base">
+              <a:lnSpc>
+                <a:spcPts val="1555"/>
+              </a:lnSpc>
+              <a:spcBef>
+                <a:spcPts val="0"/>
+              </a:spcBef>
+              <a:spcAft>
+                <a:spcPts val="0"/>
+              </a:spcAft>
+              <a:defRPr sz="1329" b="0" i="0" lang="zh-CN" dirty="0">
+                <a:solidFill>
+                  <a:srgbClr val="000000"/>
+                </a:solidFill>
+                <a:latin typeface="DejaVu Sans"/>
+                <a:ea typeface="DejaVu Sans"/>
+                <a:cs typeface="DejaVu Sans"/>
+              </a:defRPr>
+            </a:pPr>
+            <a:r>
+              <a:rPr sz="1329" b="0" i="0" lang="zh-CN" dirty="0">
+                <a:solidFill>
+                  <a:srgbClr val="000000"/>
+                </a:solidFill>
+                <a:latin typeface="DejaVu Sans"/>
+                <a:ea typeface="DejaVu Sans"/>
+                <a:cs typeface="DejaVu Sans"/>
+              </a:rPr>
+              <a:t>∼</a:t>
+            </a:r>
+          </a:p>
+        </p:txBody>
+      </p:sp>
+      <p:sp>
+        <p:nvSpPr>
+          <p:cNvPr id="73" name="grid_cloud" descr="Editable line; source id grid_cloud"/>
           <p:cNvSpPr/>
           <p:nvPr/>
         </p:nvSpPr>
@@ -7348,7 +7852,7 @@
       </p:sp>
       <p:sp>
         <p:nvSpPr>
-          <p:cNvPr id="65" name="camtop_l" descr="Editable line; source id camtop_l"/>
+          <p:cNvPr id="74" name="camtop_l" descr="Editable line; source id camtop_l"/>
           <p:cNvSpPr/>
           <p:nvPr/>
         </p:nvSpPr>
@@ -7422,7 +7926,7 @@
       </p:sp>
       <p:sp>
         <p:nvSpPr>
-          <p:cNvPr id="66" name="camtop_r" descr="Editable line; source id camtop_r"/>
+          <p:cNvPr id="75" name="camtop_r" descr="Editable line; source id camtop_r"/>
           <p:cNvSpPr/>
           <p:nvPr/>
         </p:nvSpPr>
@@ -7496,7 +8000,7 @@
       </p:sp>
       <p:sp>
         <p:nvSpPr>
-          <p:cNvPr id="67" name="camright_r" descr="Editable line; source id camright_r"/>
+          <p:cNvPr id="76" name="camright_r" descr="Editable line; source id camright_r"/>
           <p:cNvSpPr/>
           <p:nvPr/>
         </p:nvSpPr>
@@ -7570,7 +8074,7 @@
       </p:sp>
       <p:sp>
         <p:nvSpPr>
-          <p:cNvPr id="68" name="camright_l" descr="Editable line; source id camright_l"/>
+          <p:cNvPr id="77" name="camright_l" descr="Editable line; source id camright_l"/>
           <p:cNvSpPr/>
           <p:nvPr/>
         </p:nvSpPr>
@@ -7644,7 +8148,7 @@
       </p:sp>
       <p:sp>
         <p:nvSpPr>
-          <p:cNvPr id="69" name="camleft_l" descr="Editable line; source id camleft_l"/>
+          <p:cNvPr id="78" name="camleft_l" descr="Editable line; source id camleft_l"/>
           <p:cNvSpPr/>
           <p:nvPr/>
         </p:nvSpPr>
@@ -7718,7 +8222,7 @@
       </p:sp>
       <p:cxnSp>
         <p:nvCxnSpPr>
-          <p:cNvPr id="70" name="rgb_arrow_upper" descr="Editable line; source id rgb_arrow_upper"/>
+          <p:cNvPr id="79" name="rgb_arrow_upper" descr="Editable line; source id rgb_arrow_upper"/>
           <p:cNvCxnSpPr/>
           <p:nvPr/>
         </p:nvCxnSpPr>
@@ -7754,7 +8258,7 @@
       </p:cxnSp>
       <p:cxnSp>
         <p:nvCxnSpPr>
-          <p:cNvPr id="71" name="rgb_arrow_lower" descr="Editable line; source id rgb_arrow_lower"/>
+          <p:cNvPr id="80" name="rgb_arrow_lower" descr="Editable line; source id rgb_arrow_lower"/>
           <p:cNvCxnSpPr/>
           <p:nvPr/>
         </p:nvCxnSpPr>
@@ -7790,7 +8294,7 @@
       </p:cxnSp>
       <p:cxnSp>
         <p:nvCxnSpPr>
-          <p:cNvPr id="72" name="rgb_arrow_notch" descr="Editable line; source id rgb_arrow_notch"/>
+          <p:cNvPr id="81" name="rgb_arrow_notch" descr="Editable line; source id rgb_arrow_notch"/>
           <p:cNvCxnSpPr/>
           <p:nvPr/>
         </p:nvCxnSpPr>
@@ -7826,7 +8330,7 @@
       </p:cxnSp>
       <p:cxnSp>
         <p:nvCxnSpPr>
-          <p:cNvPr id="73" name="rgb_arrow_notch2" descr="Editable line; source id rgb_arrow_notch2"/>
+          <p:cNvPr id="82" name="rgb_arrow_notch2" descr="Editable line; source id rgb_arrow_notch2"/>
           <p:cNvCxnSpPr/>
           <p:nvPr/>
         </p:nvCxnSpPr>
@@ -7862,7 +8366,7 @@
       </p:cxnSp>
       <p:sp>
         <p:nvSpPr>
-          <p:cNvPr id="74" name="scene_yellow" descr="Editable line; source id scene_yellow"/>
+          <p:cNvPr id="83" name="scene_yellow" descr="Editable line; source id scene_yellow"/>
           <p:cNvSpPr/>
           <p:nvPr/>
         </p:nvSpPr>
@@ -7936,7 +8440,7 @@
       </p:sp>
       <p:sp>
         <p:nvSpPr>
-          <p:cNvPr id="75" name="scene_magenta" descr="Editable line; source id scene_magenta"/>
+          <p:cNvPr id="84" name="scene_magenta" descr="Editable line; source id scene_magenta"/>
           <p:cNvSpPr/>
           <p:nvPr/>
         </p:nvSpPr>
@@ -8010,7 +8514,7 @@
       </p:sp>
       <p:sp>
         <p:nvSpPr>
-          <p:cNvPr id="76" name="scene_teal" descr="Editable line; source id scene_teal"/>
+          <p:cNvPr id="85" name="scene_teal" descr="Editable line; source id scene_teal"/>
           <p:cNvSpPr/>
           <p:nvPr/>
         </p:nvSpPr>
@@ -8084,7 +8588,7 @@
       </p:sp>
       <p:cxnSp>
         <p:nvCxnSpPr>
-          <p:cNvPr id="77" name="prop_0" descr="Editable line; source id prop_0"/>
+          <p:cNvPr id="86" name="prop_0" descr="Editable line; source id prop_0"/>
           <p:cNvCxnSpPr/>
           <p:nvPr/>
         </p:nvCxnSpPr>
@@ -8120,7 +8624,7 @@
       </p:cxnSp>
       <p:cxnSp>
         <p:nvCxnSpPr>
-          <p:cNvPr id="78" name="prop_1" descr="Editable line; source id prop_1"/>
+          <p:cNvPr id="87" name="prop_1" descr="Editable line; source id prop_1"/>
           <p:cNvCxnSpPr/>
           <p:nvPr/>
         </p:nvCxnSpPr>
@@ -8156,7 +8660,7 @@
       </p:cxnSp>
       <p:cxnSp>
         <p:nvCxnSpPr>
-          <p:cNvPr id="79" name="prop_2" descr="Editable line; source id prop_2"/>
+          <p:cNvPr id="88" name="prop_2" descr="Editable line; source id prop_2"/>
           <p:cNvCxnSpPr/>
           <p:nvPr/>
         </p:nvCxnSpPr>
@@ -8192,7 +8696,7 @@
       </p:cxnSp>
       <p:cxnSp>
         <p:nvCxnSpPr>
-          <p:cNvPr id="80" name="prop_3" descr="Editable line; source id prop_3"/>
+          <p:cNvPr id="89" name="prop_3" descr="Editable line; source id prop_3"/>
           <p:cNvCxnSpPr/>
           <p:nvPr/>
         </p:nvCxnSpPr>
@@ -8228,7 +8732,7 @@
       </p:cxnSp>
       <p:cxnSp>
         <p:nvCxnSpPr>
-          <p:cNvPr id="81" name="noised0_0" descr="Editable line; source id noised0_0"/>
+          <p:cNvPr id="90" name="noised0_0" descr="Editable line; source id noised0_0"/>
           <p:cNvCxnSpPr/>
           <p:nvPr/>
         </p:nvCxnSpPr>
@@ -8264,7 +8768,7 @@
       </p:cxnSp>
       <p:cxnSp>
         <p:nvCxnSpPr>
-          <p:cNvPr id="82" name="noised0_1" descr="Editable line; source id noised0_1"/>
+          <p:cNvPr id="91" name="noised0_1" descr="Editable line; source id noised0_1"/>
           <p:cNvCxnSpPr/>
           <p:nvPr/>
         </p:nvCxnSpPr>
@@ -8300,7 +8804,7 @@
       </p:cxnSp>
       <p:cxnSp>
         <p:nvCxnSpPr>
-          <p:cNvPr id="83" name="noised0_2" descr="Editable line; source id noised0_2"/>
+          <p:cNvPr id="92" name="noised0_2" descr="Editable line; source id noised0_2"/>
           <p:cNvCxnSpPr/>
           <p:nvPr/>
         </p:nvCxnSpPr>
@@ -8336,7 +8840,7 @@
       </p:cxnSp>
       <p:cxnSp>
         <p:nvCxnSpPr>
-          <p:cNvPr id="84" name="noised0_3" descr="Editable line; source id noised0_3"/>
+          <p:cNvPr id="93" name="noised0_3" descr="Editable line; source id noised0_3"/>
           <p:cNvCxnSpPr/>
           <p:nvPr/>
         </p:nvCxnSpPr>
@@ -8372,7 +8876,7 @@
       </p:cxnSp>
       <p:cxnSp>
         <p:nvCxnSpPr>
-          <p:cNvPr id="85" name="noised1_0" descr="Editable line; source id noised1_0"/>
+          <p:cNvPr id="94" name="noised1_0" descr="Editable line; source id noised1_0"/>
           <p:cNvCxnSpPr/>
           <p:nvPr/>
         </p:nvCxnSpPr>
@@ -8408,7 +8912,7 @@
       </p:cxnSp>
       <p:cxnSp>
         <p:nvCxnSpPr>
-          <p:cNvPr id="86" name="noised1_1" descr="Editable line; source id noised1_1"/>
+          <p:cNvPr id="95" name="noised1_1" descr="Editable line; source id noised1_1"/>
           <p:cNvCxnSpPr/>
           <p:nvPr/>
         </p:nvCxnSpPr>
@@ -8444,7 +8948,7 @@
       </p:cxnSp>
       <p:cxnSp>
         <p:nvCxnSpPr>
-          <p:cNvPr id="87" name="noised1_2" descr="Editable line; source id noised1_2"/>
+          <p:cNvPr id="96" name="noised1_2" descr="Editable line; source id noised1_2"/>
           <p:cNvCxnSpPr/>
           <p:nvPr/>
         </p:nvCxnSpPr>
@@ -8480,7 +8984,7 @@
       </p:cxnSp>
       <p:cxnSp>
         <p:nvCxnSpPr>
-          <p:cNvPr id="88" name="noised1_3" descr="Editable line; source id noised1_3"/>
+          <p:cNvPr id="97" name="noised1_3" descr="Editable line; source id noised1_3"/>
           <p:cNvCxnSpPr/>
           <p:nvPr/>
         </p:nvCxnSpPr>
@@ -8516,7 +9020,7 @@
       </p:cxnSp>
       <p:cxnSp>
         <p:nvCxnSpPr>
-          <p:cNvPr id="89" name="noised2_0" descr="Editable line; source id noised2_0"/>
+          <p:cNvPr id="98" name="noised2_0" descr="Editable line; source id noised2_0"/>
           <p:cNvCxnSpPr/>
           <p:nvPr/>
         </p:nvCxnSpPr>
@@ -8552,7 +9056,7 @@
       </p:cxnSp>
       <p:cxnSp>
         <p:nvCxnSpPr>
-          <p:cNvPr id="90" name="noised2_1" descr="Editable line; source id noised2_1"/>
+          <p:cNvPr id="99" name="noised2_1" descr="Editable line; source id noised2_1"/>
           <p:cNvCxnSpPr/>
           <p:nvPr/>
         </p:nvCxnSpPr>
@@ -8588,7 +9092,7 @@
       </p:cxnSp>
       <p:cxnSp>
         <p:nvCxnSpPr>
-          <p:cNvPr id="91" name="noised2_2" descr="Editable line; source id noised2_2"/>
+          <p:cNvPr id="100" name="noised2_2" descr="Editable line; source id noised2_2"/>
           <p:cNvCxnSpPr/>
           <p:nvPr/>
         </p:nvCxnSpPr>
@@ -8624,7 +9128,7 @@
       </p:cxnSp>
       <p:cxnSp>
         <p:nvCxnSpPr>
-          <p:cNvPr id="92" name="noised2_3" descr="Editable line; source id noised2_3"/>
+          <p:cNvPr id="101" name="noised2_3" descr="Editable line; source id noised2_3"/>
           <p:cNvCxnSpPr/>
           <p:nvPr/>
         </p:nvCxnSpPr>
@@ -8660,7 +9164,7 @@
       </p:cxnSp>
       <p:sp>
         <p:nvSpPr>
-          <p:cNvPr id="93" name="mlp_0" descr="Editable shape; source id mlp_0"/>
+          <p:cNvPr id="102" name="mlp_0" descr="Editable shape; source id mlp_0"/>
           <p:cNvSpPr/>
           <p:nvPr/>
         </p:nvSpPr>
@@ -8704,7 +9208,7 @@
       </p:sp>
       <p:sp>
         <p:nvSpPr>
-          <p:cNvPr id="94" name="mlp_text_0" descr="Editable text; source id mlp_text_0"/>
+          <p:cNvPr id="103" name="mlp_text_0" descr="Editable text; source id mlp_text_0"/>
           <p:cNvSpPr txBox="1"/>
           <p:nvPr/>
         </p:nvSpPr>
@@ -8760,7 +9264,7 @@
       </p:sp>
       <p:sp>
         <p:nvSpPr>
-          <p:cNvPr id="95" name="mlp_1" descr="Editable shape; source id mlp_1"/>
+          <p:cNvPr id="104" name="mlp_1" descr="Editable shape; source id mlp_1"/>
           <p:cNvSpPr/>
           <p:nvPr/>
         </p:nvSpPr>
@@ -8804,7 +9308,7 @@
       </p:sp>
       <p:sp>
         <p:nvSpPr>
-          <p:cNvPr id="96" name="mlp_text_1" descr="Editable text; source id mlp_text_1"/>
+          <p:cNvPr id="105" name="mlp_text_1" descr="Editable text; source id mlp_text_1"/>
           <p:cNvSpPr txBox="1"/>
           <p:nvPr/>
         </p:nvSpPr>
@@ -8860,7 +9364,7 @@
       </p:sp>
       <p:sp>
         <p:nvSpPr>
-          <p:cNvPr id="97" name="mlp_2" descr="Editable shape; source id mlp_2"/>
+          <p:cNvPr id="106" name="mlp_2" descr="Editable shape; source id mlp_2"/>
           <p:cNvSpPr/>
           <p:nvPr/>
         </p:nvSpPr>
@@ -8904,7 +9408,7 @@
       </p:sp>
       <p:sp>
         <p:nvSpPr>
-          <p:cNvPr id="98" name="mlp_text_2" descr="Editable text; source id mlp_text_2"/>
+          <p:cNvPr id="107" name="mlp_text_2" descr="Editable text; source id mlp_text_2"/>
           <p:cNvSpPr txBox="1"/>
           <p:nvPr/>
         </p:nvSpPr>
@@ -8960,7 +9464,7 @@
       </p:sp>
       <p:sp>
         <p:nvSpPr>
-          <p:cNvPr id="99" name="mlp_3" descr="Editable shape; source id mlp_3"/>
+          <p:cNvPr id="108" name="mlp_3" descr="Editable shape; source id mlp_3"/>
           <p:cNvSpPr/>
           <p:nvPr/>
         </p:nvSpPr>
@@ -9004,7 +9508,7 @@
       </p:sp>
       <p:sp>
         <p:nvSpPr>
-          <p:cNvPr id="100" name="mlp_text_3" descr="Editable text; source id mlp_text_3"/>
+          <p:cNvPr id="109" name="mlp_text_3" descr="Editable text; source id mlp_text_3"/>
           <p:cNvSpPr txBox="1"/>
           <p:nvPr/>
         </p:nvSpPr>
@@ -9060,7 +9564,7 @@
       </p:sp>
       <p:sp>
         <p:nvSpPr>
-          <p:cNvPr id="101" name="proptoken_front" descr="Editable shape; source id proptoken_front"/>
+          <p:cNvPr id="110" name="proptoken_front" descr="Editable shape; source id proptoken_front"/>
           <p:cNvSpPr/>
           <p:nvPr/>
         </p:nvSpPr>
@@ -9104,7 +9608,7 @@
       </p:sp>
       <p:sp>
         <p:nvSpPr>
-          <p:cNvPr id="102" name="proptoken_top" descr="Editable shape; source id proptoken_top"/>
+          <p:cNvPr id="111" name="proptoken_top" descr="Editable shape; source id proptoken_top"/>
           <p:cNvSpPr/>
           <p:nvPr/>
         </p:nvSpPr>
@@ -9170,7 +9674,7 @@
       </p:sp>
       <p:sp>
         <p:nvSpPr>
-          <p:cNvPr id="103" name="proptoken_side" descr="Editable shape; source id proptoken_side"/>
+          <p:cNvPr id="112" name="proptoken_side" descr="Editable shape; source id proptoken_side"/>
           <p:cNvSpPr/>
           <p:nvPr/>
         </p:nvSpPr>
@@ -9236,7 +9740,7 @@
       </p:sp>
       <p:sp>
         <p:nvSpPr>
-          <p:cNvPr id="104" name="noise0_front" descr="Editable shape; source id noise0_front"/>
+          <p:cNvPr id="113" name="noise0_front" descr="Editable shape; source id noise0_front"/>
           <p:cNvSpPr/>
           <p:nvPr/>
         </p:nvSpPr>
@@ -9280,7 +9784,7 @@
       </p:sp>
       <p:sp>
         <p:nvSpPr>
-          <p:cNvPr id="105" name="noise0_top" descr="Editable shape; source id noise0_top"/>
+          <p:cNvPr id="114" name="noise0_top" descr="Editable shape; source id noise0_top"/>
           <p:cNvSpPr/>
           <p:nvPr/>
         </p:nvSpPr>
@@ -9346,7 +9850,7 @@
       </p:sp>
       <p:sp>
         <p:nvSpPr>
-          <p:cNvPr id="106" name="noise0_side" descr="Editable shape; source id noise0_side"/>
+          <p:cNvPr id="115" name="noise0_side" descr="Editable shape; source id noise0_side"/>
           <p:cNvSpPr/>
           <p:nvPr/>
         </p:nvSpPr>
@@ -9412,7 +9916,7 @@
       </p:sp>
       <p:sp>
         <p:nvSpPr>
-          <p:cNvPr id="107" name="noise1_front" descr="Editable shape; source id noise1_front"/>
+          <p:cNvPr id="116" name="noise1_front" descr="Editable shape; source id noise1_front"/>
           <p:cNvSpPr/>
           <p:nvPr/>
         </p:nvSpPr>
@@ -9456,7 +9960,7 @@
       </p:sp>
       <p:sp>
         <p:nvSpPr>
-          <p:cNvPr id="108" name="noise1_top" descr="Editable shape; source id noise1_top"/>
+          <p:cNvPr id="117" name="noise1_top" descr="Editable shape; source id noise1_top"/>
           <p:cNvSpPr/>
           <p:nvPr/>
         </p:nvSpPr>
@@ -9522,7 +10026,7 @@
       </p:sp>
       <p:sp>
         <p:nvSpPr>
-          <p:cNvPr id="109" name="noise1_side" descr="Editable shape; source id noise1_side"/>
+          <p:cNvPr id="118" name="noise1_side" descr="Editable shape; source id noise1_side"/>
           <p:cNvSpPr/>
           <p:nvPr/>
         </p:nvSpPr>
@@ -9588,7 +10092,7 @@
       </p:sp>
       <p:sp>
         <p:nvSpPr>
-          <p:cNvPr id="110" name="noise2_front" descr="Editable shape; source id noise2_front"/>
+          <p:cNvPr id="119" name="noise2_front" descr="Editable shape; source id noise2_front"/>
           <p:cNvSpPr/>
           <p:nvPr/>
         </p:nvSpPr>
@@ -9632,7 +10136,7 @@
       </p:sp>
       <p:sp>
         <p:nvSpPr>
-          <p:cNvPr id="111" name="noise2_top" descr="Editable shape; source id noise2_top"/>
+          <p:cNvPr id="120" name="noise2_top" descr="Editable shape; source id noise2_top"/>
           <p:cNvSpPr/>
           <p:nvPr/>
         </p:nvSpPr>
@@ -9698,7 +10202,7 @@
       </p:sp>
       <p:sp>
         <p:nvSpPr>
-          <p:cNvPr id="112" name="noise2_side" descr="Editable shape; source id noise2_side"/>
+          <p:cNvPr id="121" name="noise2_side" descr="Editable shape; source id noise2_side"/>
           <p:cNvSpPr/>
           <p:nvPr/>
         </p:nvSpPr>
@@ -9764,7 +10268,7 @@
       </p:sp>
       <p:sp>
         <p:nvSpPr>
-          <p:cNvPr id="113" name="scene0_front" descr="Editable shape; source id scene0_front"/>
+          <p:cNvPr id="122" name="scene0_front" descr="Editable shape; source id scene0_front"/>
           <p:cNvSpPr/>
           <p:nvPr/>
         </p:nvSpPr>
@@ -9808,7 +10312,7 @@
       </p:sp>
       <p:sp>
         <p:nvSpPr>
-          <p:cNvPr id="114" name="scene0_top" descr="Editable shape; source id scene0_top"/>
+          <p:cNvPr id="123" name="scene0_top" descr="Editable shape; source id scene0_top"/>
           <p:cNvSpPr/>
           <p:nvPr/>
         </p:nvSpPr>
@@ -9874,7 +10378,7 @@
       </p:sp>
       <p:sp>
         <p:nvSpPr>
-          <p:cNvPr id="115" name="scene0_side" descr="Editable shape; source id scene0_side"/>
+          <p:cNvPr id="124" name="scene0_side" descr="Editable shape; source id scene0_side"/>
           <p:cNvSpPr/>
           <p:nvPr/>
         </p:nvSpPr>
@@ -9940,7 +10444,7 @@
       </p:sp>
       <p:sp>
         <p:nvSpPr>
-          <p:cNvPr id="116" name="scene1_front" descr="Editable shape; source id scene1_front"/>
+          <p:cNvPr id="125" name="scene1_front" descr="Editable shape; source id scene1_front"/>
           <p:cNvSpPr/>
           <p:nvPr/>
         </p:nvSpPr>
@@ -9984,7 +10488,7 @@
       </p:sp>
       <p:sp>
         <p:nvSpPr>
-          <p:cNvPr id="117" name="scene1_top" descr="Editable shape; source id scene1_top"/>
+          <p:cNvPr id="126" name="scene1_top" descr="Editable shape; source id scene1_top"/>
           <p:cNvSpPr/>
           <p:nvPr/>
         </p:nvSpPr>
@@ -10050,7 +10554,7 @@
       </p:sp>
       <p:sp>
         <p:nvSpPr>
-          <p:cNvPr id="118" name="scene1_side" descr="Editable shape; source id scene1_side"/>
+          <p:cNvPr id="127" name="scene1_side" descr="Editable shape; source id scene1_side"/>
           <p:cNvSpPr/>
           <p:nvPr/>
         </p:nvSpPr>
@@ -10116,7 +10620,7 @@
       </p:sp>
       <p:sp>
         <p:nvSpPr>
-          <p:cNvPr id="119" name="scene2_front" descr="Editable shape; source id scene2_front"/>
+          <p:cNvPr id="128" name="scene2_front" descr="Editable shape; source id scene2_front"/>
           <p:cNvSpPr/>
           <p:nvPr/>
         </p:nvSpPr>
@@ -10160,7 +10664,7 @@
       </p:sp>
       <p:sp>
         <p:nvSpPr>
-          <p:cNvPr id="120" name="scene2_top" descr="Editable shape; source id scene2_top"/>
+          <p:cNvPr id="129" name="scene2_top" descr="Editable shape; source id scene2_top"/>
           <p:cNvSpPr/>
           <p:nvPr/>
         </p:nvSpPr>
@@ -10226,7 +10730,7 @@
       </p:sp>
       <p:sp>
         <p:nvSpPr>
-          <p:cNvPr id="121" name="scene2_side" descr="Editable shape; source id scene2_side"/>
+          <p:cNvPr id="130" name="scene2_side" descr="Editable shape; source id scene2_side"/>
           <p:cNvSpPr/>
           <p:nvPr/>
         </p:nvSpPr>
@@ -10292,7 +10796,7 @@
       </p:sp>
       <p:sp>
         <p:nvSpPr>
-          <p:cNvPr id="122" name="language0_front" descr="Editable shape; source id language0_front"/>
+          <p:cNvPr id="131" name="language0_front" descr="Editable shape; source id language0_front"/>
           <p:cNvSpPr/>
           <p:nvPr/>
         </p:nvSpPr>
@@ -10336,7 +10840,7 @@
       </p:sp>
       <p:sp>
         <p:nvSpPr>
-          <p:cNvPr id="123" name="language0_top" descr="Editable shape; source id language0_top"/>
+          <p:cNvPr id="132" name="language0_top" descr="Editable shape; source id language0_top"/>
           <p:cNvSpPr/>
           <p:nvPr/>
         </p:nvSpPr>
@@ -10402,7 +10906,7 @@
       </p:sp>
       <p:sp>
         <p:nvSpPr>
-          <p:cNvPr id="124" name="language0_side" descr="Editable shape; source id language0_side"/>
+          <p:cNvPr id="133" name="language0_side" descr="Editable shape; source id language0_side"/>
           <p:cNvSpPr/>
           <p:nvPr/>
         </p:nvSpPr>
@@ -10468,7 +10972,7 @@
       </p:sp>
       <p:sp>
         <p:nvSpPr>
-          <p:cNvPr id="125" name="language1_front" descr="Editable shape; source id language1_front"/>
+          <p:cNvPr id="134" name="language1_front" descr="Editable shape; source id language1_front"/>
           <p:cNvSpPr/>
           <p:nvPr/>
         </p:nvSpPr>
@@ -10512,7 +11016,7 @@
       </p:sp>
       <p:sp>
         <p:nvSpPr>
-          <p:cNvPr id="126" name="language1_top" descr="Editable shape; source id language1_top"/>
+          <p:cNvPr id="135" name="language1_top" descr="Editable shape; source id language1_top"/>
           <p:cNvSpPr/>
           <p:nvPr/>
         </p:nvSpPr>
@@ -10578,7 +11082,7 @@
       </p:sp>
       <p:sp>
         <p:nvSpPr>
-          <p:cNvPr id="127" name="language1_side" descr="Editable shape; source id language1_side"/>
+          <p:cNvPr id="136" name="language1_side" descr="Editable shape; source id language1_side"/>
           <p:cNvSpPr/>
           <p:nvPr/>
         </p:nvSpPr>
@@ -10644,7 +11148,7 @@
       </p:sp>
       <p:sp>
         <p:nvSpPr>
-          <p:cNvPr id="128" name="proprio" descr="Editable text; source id proprio"/>
+          <p:cNvPr id="137" name="proprio" descr="Editable text; source id proprio"/>
           <p:cNvSpPr txBox="1"/>
           <p:nvPr/>
         </p:nvSpPr>
@@ -10700,7 +11204,7 @@
       </p:sp>
       <p:sp>
         <p:nvSpPr>
-          <p:cNvPr id="129" name="prop_c" descr="Editable text; source id prop_c"/>
+          <p:cNvPr id="138" name="prop_c" descr="Editable text; source id prop_c"/>
           <p:cNvSpPr txBox="1"/>
           <p:nvPr/>
         </p:nvSpPr>
@@ -10756,7 +11260,7 @@
       </p:sp>
       <p:sp>
         <p:nvSpPr>
-          <p:cNvPr id="130" name="noised" descr="Editable text; source id noised"/>
+          <p:cNvPr id="139" name="noised" descr="Editable text; source id noised"/>
           <p:cNvSpPr txBox="1"/>
           <p:nvPr/>
         </p:nvSpPr>
@@ -10844,7 +11348,7 @@
       </p:sp>
       <p:sp>
         <p:nvSpPr>
-          <p:cNvPr id="131" name="noise_tau" descr="Editable text; source id noise_tau"/>
+          <p:cNvPr id="140" name="noise_tau" descr="Editable text; source id noise_tau"/>
           <p:cNvSpPr txBox="1"/>
           <p:nvPr/>
         </p:nvSpPr>
@@ -10900,7 +11404,7 @@
       </p:sp>
       <p:sp>
         <p:nvSpPr>
-          <p:cNvPr id="132" name="noise_i" descr="Editable text; source id noise_i"/>
+          <p:cNvPr id="141" name="noise_i" descr="Editable text; source id noise_i"/>
           <p:cNvSpPr txBox="1"/>
           <p:nvPr/>
         </p:nvSpPr>
@@ -10956,7 +11460,7 @@
       </p:sp>
       <p:sp>
         <p:nvSpPr>
-          <p:cNvPr id="133" name="scene_3d" descr="Editable text; source id scene_3d"/>
+          <p:cNvPr id="142" name="scene_3d" descr="Editable text; source id scene_3d"/>
           <p:cNvSpPr txBox="1"/>
           <p:nvPr/>
         </p:nvSpPr>
@@ -11012,7 +11516,7 @@
       </p:sp>
       <p:sp>
         <p:nvSpPr>
-          <p:cNvPr id="134" name="scene_word" descr="Editable text; source id scene_word"/>
+          <p:cNvPr id="143" name="scene_word" descr="Editable text; source id scene_word"/>
           <p:cNvSpPr txBox="1"/>
           <p:nvPr/>
         </p:nvSpPr>
@@ -11068,7 +11572,7 @@
       </p:sp>
       <p:sp>
         <p:nvSpPr>
-          <p:cNvPr id="135" name="token_word" descr="Editable text; source id token_word"/>
+          <p:cNvPr id="144" name="token_word" descr="Editable text; source id token_word"/>
           <p:cNvSpPr txBox="1"/>
           <p:nvPr/>
         </p:nvSpPr>
@@ -11124,7 +11628,7 @@
       </p:sp>
       <p:sp>
         <p:nvSpPr>
-          <p:cNvPr id="136" name="scene_o" descr="Editable text; source id scene_o"/>
+          <p:cNvPr id="145" name="scene_o" descr="Editable text; source id scene_o"/>
           <p:cNvSpPr txBox="1"/>
           <p:nvPr/>
         </p:nvSpPr>
@@ -11180,7 +11684,7 @@
       </p:sp>
       <p:sp>
         <p:nvSpPr>
-          <p:cNvPr id="137" name="language_tokens" descr="Editable text; source id language_tokens"/>
+          <p:cNvPr id="146" name="language_tokens" descr="Editable text; source id language_tokens"/>
           <p:cNvSpPr txBox="1"/>
           <p:nvPr/>
         </p:nvSpPr>
@@ -11236,7 +11740,7 @@
       </p:sp>
       <p:sp>
         <p:nvSpPr>
-          <p:cNvPr id="138" name="lang_l" descr="Editable text; source id lang_l"/>
+          <p:cNvPr id="147" name="lang_l" descr="Editable text; source id lang_l"/>
           <p:cNvSpPr txBox="1"/>
           <p:nvPr/>
         </p:nvSpPr>
@@ -11292,7 +11796,7 @@
       </p:sp>
       <p:sp>
         <p:nvSpPr>
-          <p:cNvPr id="139" name="lang_dots" descr="Editable text; source id lang_dots"/>
+          <p:cNvPr id="148" name="lang_dots" descr="Editable text; source id lang_dots"/>
           <p:cNvSpPr txBox="1"/>
           <p:nvPr/>
         </p:nvSpPr>
@@ -11348,7 +11852,7 @@
       </p:sp>
       <p:sp>
         <p:nvSpPr>
-          <p:cNvPr id="140" name="transformer" descr="Editable shape; source id transformer"/>
+          <p:cNvPr id="149" name="transformer" descr="Editable shape; source id transformer"/>
           <p:cNvSpPr/>
           <p:nvPr/>
         </p:nvSpPr>
@@ -11414,7 +11918,7 @@
       </p:sp>
       <p:sp>
         <p:nvSpPr>
-          <p:cNvPr id="141" name="transformer_label" descr="Editable text; source id transformer_label"/>
+          <p:cNvPr id="150" name="transformer_label" descr="Editable text; source id transformer_label"/>
           <p:cNvSpPr txBox="1"/>
           <p:nvPr/>
         </p:nvSpPr>
@@ -11502,7 +12006,7 @@
       </p:sp>
       <p:sp>
         <p:nvSpPr>
-          <p:cNvPr id="142" name="language_encoder" descr="Editable shape; source id language_encoder"/>
+          <p:cNvPr id="151" name="language_encoder" descr="Editable shape; source id language_encoder"/>
           <p:cNvSpPr/>
           <p:nvPr/>
         </p:nvSpPr>
@@ -11568,7 +12072,7 @@
       </p:sp>
       <p:sp>
         <p:nvSpPr>
-          <p:cNvPr id="143" name="language_encoder_label" descr="Editable text; source id language_encoder_label"/>
+          <p:cNvPr id="152" name="language_encoder_label" descr="Editable text; source id language_encoder_label"/>
           <p:cNvSpPr txBox="1"/>
           <p:nvPr/>
         </p:nvSpPr>
@@ -11656,7 +12160,7 @@
       </p:sp>
       <p:sp>
         <p:nvSpPr>
-          <p:cNvPr id="144" name="denoise_step_arrow" descr="Editable line; source id denoise_step_arrow"/>
+          <p:cNvPr id="153" name="denoise_step_arrow" descr="Editable line; source id denoise_step_arrow"/>
           <p:cNvSpPr/>
           <p:nvPr/>
         </p:nvSpPr>
@@ -11730,7 +12234,7 @@
       </p:sp>
       <p:sp>
         <p:nvSpPr>
-          <p:cNvPr id="145" name="noise_transformer" descr="Editable line; source id noise_transformer"/>
+          <p:cNvPr id="154" name="noise_transformer" descr="Editable line; source id noise_transformer"/>
           <p:cNvSpPr/>
           <p:nvPr/>
         </p:nvSpPr>
@@ -11804,7 +12308,7 @@
       </p:sp>
       <p:sp>
         <p:nvSpPr>
-          <p:cNvPr id="146" name="language_transformer" descr="Editable line; source id language_transformer"/>
+          <p:cNvPr id="155" name="language_transformer" descr="Editable line; source id language_transformer"/>
           <p:cNvSpPr/>
           <p:nvPr/>
         </p:nvSpPr>
@@ -11878,7 +12382,7 @@
       </p:sp>
       <p:sp>
         <p:nvSpPr>
-          <p:cNvPr id="147" name="transformer_output" descr="Editable line; source id transformer_output"/>
+          <p:cNvPr id="156" name="transformer_output" descr="Editable line; source id transformer_output"/>
           <p:cNvSpPr/>
           <p:nvPr/>
         </p:nvSpPr>
@@ -11952,7 +12456,7 @@
       </p:sp>
       <p:sp>
         <p:nvSpPr>
-          <p:cNvPr id="148" name="denoising_step" descr="Editable text; source id denoising_step"/>
+          <p:cNvPr id="157" name="denoising_step" descr="Editable text; source id denoising_step"/>
           <p:cNvSpPr txBox="1"/>
           <p:nvPr/>
         </p:nvSpPr>
@@ -12008,7 +12512,7 @@
       </p:sp>
       <p:sp>
         <p:nvSpPr>
-          <p:cNvPr id="149" name="denoising_i" descr="Editable text; source id denoising_i"/>
+          <p:cNvPr id="158" name="denoising_i" descr="Editable text; source id denoising_i"/>
           <p:cNvSpPr txBox="1"/>
           <p:nvPr/>
         </p:nvSpPr>
@@ -12064,7 +12568,7 @@
       </p:sp>
       <p:sp>
         <p:nvSpPr>
-          <p:cNvPr id="150" name="output_equations" descr="Editable shape; source id output_equations"/>
+          <p:cNvPr id="159" name="output_equations" descr="Editable shape; source id output_equations"/>
           <p:cNvSpPr/>
           <p:nvPr/>
         </p:nvSpPr>
@@ -12108,499 +12612,7 @@
       </p:sp>
       <p:sp>
         <p:nvSpPr>
-          <p:cNvPr id="151" name="output_loc_epsilon" descr="Editable text; source id output_loc_epsilon"/>
-          <p:cNvSpPr txBox="1"/>
-          <p:nvPr/>
-        </p:nvSpPr>
-        <p:spPr>
-          <a:xfrm>
-            <a:off x="11071778" y="867020"/>
-            <a:ext cx="99745" cy="191818"/>
-          </a:xfrm>
-          <a:prstGeom prst="rect">
-            <a:avLst/>
-          </a:prstGeom>
-          <a:noFill/>
-          <a:effectLst/>
-        </p:spPr>
-        <p:txBody>
-          <a:bodyPr wrap="none" anchor="t" tIns="0" rIns="0" bIns="0" lIns="0" anchorCtr="0" vertOverflow="overflow">
-            <a:noAutofit/>
-          </a:bodyPr>
-          <a:lstStyle/>
-          <a:p>
-            <a:pPr algn="l" fontAlgn="base">
-              <a:lnSpc>
-                <a:spcPts val="1389"/>
-              </a:lnSpc>
-              <a:spcBef>
-                <a:spcPts val="0"/>
-              </a:spcBef>
-              <a:spcAft>
-                <a:spcPts val="0"/>
-              </a:spcAft>
-              <a:defRPr sz="1208" b="0" i="1" lang="zh-CN" dirty="0">
-                <a:solidFill>
-                  <a:srgbClr val="000000"/>
-                </a:solidFill>
-                <a:latin typeface="Times New Roman"/>
-                <a:ea typeface="Times New Roman"/>
-                <a:cs typeface="Times New Roman"/>
-              </a:defRPr>
-            </a:pPr>
-            <a:r>
-              <a:rPr sz="1208" b="0" i="1" lang="zh-CN" dirty="0">
-                <a:solidFill>
-                  <a:srgbClr val="000000"/>
-                </a:solidFill>
-                <a:latin typeface="Times New Roman"/>
-                <a:ea typeface="Times New Roman"/>
-                <a:cs typeface="Times New Roman"/>
-              </a:rPr>
-              <a:t>ϵ</a:t>
-            </a:r>
-          </a:p>
-        </p:txBody>
-      </p:sp>
-      <p:sp>
-        <p:nvSpPr>
-          <p:cNvPr id="152" name="output_loc_sup" descr="Editable text; source id output_loc_sup"/>
-          <p:cNvSpPr txBox="1"/>
-          <p:nvPr/>
-        </p:nvSpPr>
-        <p:spPr>
-          <a:xfrm>
-            <a:off x="11148505" y="836329"/>
-            <a:ext cx="191818" cy="130436"/>
-          </a:xfrm>
-          <a:prstGeom prst="rect">
-            <a:avLst/>
-          </a:prstGeom>
-          <a:noFill/>
-          <a:effectLst/>
-        </p:spPr>
-        <p:txBody>
-          <a:bodyPr wrap="none" anchor="t" tIns="0" rIns="0" bIns="0" lIns="0" anchorCtr="0" vertOverflow="overflow">
-            <a:noAutofit/>
-          </a:bodyPr>
-          <a:lstStyle/>
-          <a:p>
-            <a:pPr algn="l" fontAlgn="base">
-              <a:lnSpc>
-                <a:spcPts val="833"/>
-              </a:lnSpc>
-              <a:spcBef>
-                <a:spcPts val="0"/>
-              </a:spcBef>
-              <a:spcAft>
-                <a:spcPts val="0"/>
-              </a:spcAft>
-              <a:defRPr sz="724" b="0" i="1" lang="zh-CN" dirty="0">
-                <a:solidFill>
-                  <a:srgbClr val="000000"/>
-                </a:solidFill>
-                <a:latin typeface="Times New Roman"/>
-                <a:ea typeface="Times New Roman"/>
-                <a:cs typeface="Times New Roman"/>
-              </a:defRPr>
-            </a:pPr>
-            <a:r>
-              <a:rPr sz="724" b="0" i="1" lang="zh-CN" dirty="0">
-                <a:solidFill>
-                  <a:srgbClr val="000000"/>
-                </a:solidFill>
-                <a:latin typeface="Times New Roman"/>
-                <a:ea typeface="Times New Roman"/>
-                <a:cs typeface="Times New Roman"/>
-              </a:rPr>
-              <a:t>loc</a:t>
-            </a:r>
-          </a:p>
-        </p:txBody>
-      </p:sp>
-      <p:sp>
-        <p:nvSpPr>
-          <p:cNvPr id="153" name="output_loc_theta" descr="Editable text; source id output_loc_theta"/>
-          <p:cNvSpPr txBox="1"/>
-          <p:nvPr/>
-        </p:nvSpPr>
-        <p:spPr>
-          <a:xfrm>
-            <a:off x="11125487" y="951420"/>
-            <a:ext cx="84400" cy="122763"/>
-          </a:xfrm>
-          <a:prstGeom prst="rect">
-            <a:avLst/>
-          </a:prstGeom>
-          <a:noFill/>
-          <a:effectLst/>
-        </p:spPr>
-        <p:txBody>
-          <a:bodyPr wrap="none" anchor="t" tIns="0" rIns="0" bIns="0" lIns="0" anchorCtr="0" vertOverflow="overflow">
-            <a:noAutofit/>
-          </a:bodyPr>
-          <a:lstStyle/>
-          <a:p>
-            <a:pPr algn="l" fontAlgn="base">
-              <a:lnSpc>
-                <a:spcPts val="833"/>
-              </a:lnSpc>
-              <a:spcBef>
-                <a:spcPts val="0"/>
-              </a:spcBef>
-              <a:spcAft>
-                <a:spcPts val="0"/>
-              </a:spcAft>
-              <a:defRPr sz="724" b="0" i="1" lang="zh-CN" dirty="0">
-                <a:solidFill>
-                  <a:srgbClr val="000000"/>
-                </a:solidFill>
-                <a:latin typeface="Times New Roman"/>
-                <a:ea typeface="Times New Roman"/>
-                <a:cs typeface="Times New Roman"/>
-              </a:defRPr>
-            </a:pPr>
-            <a:r>
-              <a:rPr sz="724" b="0" i="1" lang="zh-CN" dirty="0">
-                <a:solidFill>
-                  <a:srgbClr val="000000"/>
-                </a:solidFill>
-                <a:latin typeface="Times New Roman"/>
-                <a:ea typeface="Times New Roman"/>
-                <a:cs typeface="Times New Roman"/>
-              </a:rPr>
-              <a:t>θ</a:t>
-            </a:r>
-          </a:p>
-        </p:txBody>
-      </p:sp>
-      <p:sp>
-        <p:nvSpPr>
-          <p:cNvPr id="154" name="output_loc_args" descr="Editable text; source id output_loc_args"/>
-          <p:cNvSpPr txBox="1"/>
-          <p:nvPr/>
-        </p:nvSpPr>
-        <p:spPr>
-          <a:xfrm>
-            <a:off x="11278942" y="859347"/>
-            <a:ext cx="659856" cy="207164"/>
-          </a:xfrm>
-          <a:prstGeom prst="rect">
-            <a:avLst/>
-          </a:prstGeom>
-          <a:noFill/>
-          <a:effectLst/>
-        </p:spPr>
-        <p:txBody>
-          <a:bodyPr wrap="none" anchor="t" tIns="0" rIns="0" bIns="0" lIns="0" anchorCtr="0" vertOverflow="overflow">
-            <a:noAutofit/>
-          </a:bodyPr>
-          <a:lstStyle/>
-          <a:p>
-            <a:pPr algn="l" fontAlgn="base">
-              <a:lnSpc>
-                <a:spcPts val="1465"/>
-              </a:lnSpc>
-              <a:spcBef>
-                <a:spcPts val="0"/>
-              </a:spcBef>
-              <a:spcAft>
-                <a:spcPts val="0"/>
-              </a:spcAft>
-              <a:defRPr sz="1238" b="1" i="1" lang="zh-CN" dirty="0">
-                <a:solidFill>
-                  <a:srgbClr val="000000"/>
-                </a:solidFill>
-                <a:latin typeface="Times New Roman"/>
-                <a:ea typeface="Times New Roman"/>
-                <a:cs typeface="Times New Roman"/>
-              </a:defRPr>
-            </a:pPr>
-            <a:r>
-              <a:rPr sz="1238" b="1" i="1" lang="zh-CN" dirty="0">
-                <a:solidFill>
-                  <a:srgbClr val="000000"/>
-                </a:solidFill>
-                <a:latin typeface="Times New Roman"/>
-                <a:ea typeface="Times New Roman"/>
-                <a:cs typeface="Times New Roman"/>
-              </a:rPr>
-              <a:t>(o,l,c, τ</a:t>
-            </a:r>
-            <a:r>
-              <a:rPr sz="1238" b="1" i="1" lang="zh-CN" dirty="0">
-                <a:solidFill>
-                  <a:srgbClr val="000000"/>
-                </a:solidFill>
-                <a:latin typeface="DejaVu Sans"/>
-                <a:ea typeface="DejaVu Sans"/>
-                <a:cs typeface="DejaVu Sans"/>
-              </a:rPr>
-              <a:t>ⁱ</a:t>
-            </a:r>
-            <a:r>
-              <a:rPr sz="1238" b="1" i="1" lang="zh-CN" dirty="0">
-                <a:solidFill>
-                  <a:srgbClr val="000000"/>
-                </a:solidFill>
-                <a:latin typeface="Times New Roman"/>
-                <a:ea typeface="Times New Roman"/>
-                <a:cs typeface="Times New Roman"/>
-              </a:rPr>
-              <a:t>,i)</a:t>
-            </a:r>
-          </a:p>
-        </p:txBody>
-      </p:sp>
-      <p:sp>
-        <p:nvSpPr>
-          <p:cNvPr id="155" name="output_rot_epsilon" descr="Editable text; source id output_rot_epsilon"/>
-          <p:cNvSpPr txBox="1"/>
-          <p:nvPr/>
-        </p:nvSpPr>
-        <p:spPr>
-          <a:xfrm>
-            <a:off x="11071778" y="1097203"/>
-            <a:ext cx="99745" cy="191818"/>
-          </a:xfrm>
-          <a:prstGeom prst="rect">
-            <a:avLst/>
-          </a:prstGeom>
-          <a:noFill/>
-          <a:effectLst/>
-        </p:spPr>
-        <p:txBody>
-          <a:bodyPr wrap="none" anchor="t" tIns="0" rIns="0" bIns="0" lIns="0" anchorCtr="0" vertOverflow="overflow">
-            <a:noAutofit/>
-          </a:bodyPr>
-          <a:lstStyle/>
-          <a:p>
-            <a:pPr algn="l" fontAlgn="base">
-              <a:lnSpc>
-                <a:spcPts val="1389"/>
-              </a:lnSpc>
-              <a:spcBef>
-                <a:spcPts val="0"/>
-              </a:spcBef>
-              <a:spcAft>
-                <a:spcPts val="0"/>
-              </a:spcAft>
-              <a:defRPr sz="1208" b="0" i="1" lang="zh-CN" dirty="0">
-                <a:solidFill>
-                  <a:srgbClr val="000000"/>
-                </a:solidFill>
-                <a:latin typeface="Times New Roman"/>
-                <a:ea typeface="Times New Roman"/>
-                <a:cs typeface="Times New Roman"/>
-              </a:defRPr>
-            </a:pPr>
-            <a:r>
-              <a:rPr sz="1208" b="0" i="1" lang="zh-CN" dirty="0">
-                <a:solidFill>
-                  <a:srgbClr val="000000"/>
-                </a:solidFill>
-                <a:latin typeface="Times New Roman"/>
-                <a:ea typeface="Times New Roman"/>
-                <a:cs typeface="Times New Roman"/>
-              </a:rPr>
-              <a:t>ϵ</a:t>
-            </a:r>
-          </a:p>
-        </p:txBody>
-      </p:sp>
-      <p:sp>
-        <p:nvSpPr>
-          <p:cNvPr id="156" name="output_rot_sup" descr="Editable text; source id output_rot_sup"/>
-          <p:cNvSpPr txBox="1"/>
-          <p:nvPr/>
-        </p:nvSpPr>
-        <p:spPr>
-          <a:xfrm>
-            <a:off x="11148505" y="1066512"/>
-            <a:ext cx="191818" cy="130436"/>
-          </a:xfrm>
-          <a:prstGeom prst="rect">
-            <a:avLst/>
-          </a:prstGeom>
-          <a:noFill/>
-          <a:effectLst/>
-        </p:spPr>
-        <p:txBody>
-          <a:bodyPr wrap="none" anchor="t" tIns="0" rIns="0" bIns="0" lIns="0" anchorCtr="0" vertOverflow="overflow">
-            <a:noAutofit/>
-          </a:bodyPr>
-          <a:lstStyle/>
-          <a:p>
-            <a:pPr algn="l" fontAlgn="base">
-              <a:lnSpc>
-                <a:spcPts val="833"/>
-              </a:lnSpc>
-              <a:spcBef>
-                <a:spcPts val="0"/>
-              </a:spcBef>
-              <a:spcAft>
-                <a:spcPts val="0"/>
-              </a:spcAft>
-              <a:defRPr sz="724" b="0" i="1" lang="zh-CN" dirty="0">
-                <a:solidFill>
-                  <a:srgbClr val="000000"/>
-                </a:solidFill>
-                <a:latin typeface="Times New Roman"/>
-                <a:ea typeface="Times New Roman"/>
-                <a:cs typeface="Times New Roman"/>
-              </a:defRPr>
-            </a:pPr>
-            <a:r>
-              <a:rPr sz="724" b="0" i="1" lang="zh-CN" dirty="0">
-                <a:solidFill>
-                  <a:srgbClr val="000000"/>
-                </a:solidFill>
-                <a:latin typeface="Times New Roman"/>
-                <a:ea typeface="Times New Roman"/>
-                <a:cs typeface="Times New Roman"/>
-              </a:rPr>
-              <a:t>rot</a:t>
-            </a:r>
-          </a:p>
-        </p:txBody>
-      </p:sp>
-      <p:sp>
-        <p:nvSpPr>
-          <p:cNvPr id="157" name="output_rot_theta" descr="Editable text; source id output_rot_theta"/>
-          <p:cNvSpPr txBox="1"/>
-          <p:nvPr/>
-        </p:nvSpPr>
-        <p:spPr>
-          <a:xfrm>
-            <a:off x="11125487" y="1181603"/>
-            <a:ext cx="84400" cy="122763"/>
-          </a:xfrm>
-          <a:prstGeom prst="rect">
-            <a:avLst/>
-          </a:prstGeom>
-          <a:noFill/>
-          <a:effectLst/>
-        </p:spPr>
-        <p:txBody>
-          <a:bodyPr wrap="none" anchor="t" tIns="0" rIns="0" bIns="0" lIns="0" anchorCtr="0" vertOverflow="overflow">
-            <a:noAutofit/>
-          </a:bodyPr>
-          <a:lstStyle/>
-          <a:p>
-            <a:pPr algn="l" fontAlgn="base">
-              <a:lnSpc>
-                <a:spcPts val="833"/>
-              </a:lnSpc>
-              <a:spcBef>
-                <a:spcPts val="0"/>
-              </a:spcBef>
-              <a:spcAft>
-                <a:spcPts val="0"/>
-              </a:spcAft>
-              <a:defRPr sz="724" b="0" i="1" lang="zh-CN" dirty="0">
-                <a:solidFill>
-                  <a:srgbClr val="000000"/>
-                </a:solidFill>
-                <a:latin typeface="Times New Roman"/>
-                <a:ea typeface="Times New Roman"/>
-                <a:cs typeface="Times New Roman"/>
-              </a:defRPr>
-            </a:pPr>
-            <a:r>
-              <a:rPr sz="724" b="0" i="1" lang="zh-CN" dirty="0">
-                <a:solidFill>
-                  <a:srgbClr val="000000"/>
-                </a:solidFill>
-                <a:latin typeface="Times New Roman"/>
-                <a:ea typeface="Times New Roman"/>
-                <a:cs typeface="Times New Roman"/>
-              </a:rPr>
-              <a:t>θ</a:t>
-            </a:r>
-          </a:p>
-        </p:txBody>
-      </p:sp>
-      <p:sp>
-        <p:nvSpPr>
-          <p:cNvPr id="158" name="output_rot_args" descr="Editable text; source id output_rot_args"/>
-          <p:cNvSpPr txBox="1"/>
-          <p:nvPr/>
-        </p:nvSpPr>
-        <p:spPr>
-          <a:xfrm>
-            <a:off x="11278942" y="1089530"/>
-            <a:ext cx="659856" cy="207164"/>
-          </a:xfrm>
-          <a:prstGeom prst="rect">
-            <a:avLst/>
-          </a:prstGeom>
-          <a:noFill/>
-          <a:effectLst/>
-        </p:spPr>
-        <p:txBody>
-          <a:bodyPr wrap="none" anchor="t" tIns="0" rIns="0" bIns="0" lIns="0" anchorCtr="0" vertOverflow="overflow">
-            <a:noAutofit/>
-          </a:bodyPr>
-          <a:lstStyle/>
-          <a:p>
-            <a:pPr algn="l" fontAlgn="base">
-              <a:lnSpc>
-                <a:spcPts val="1465"/>
-              </a:lnSpc>
-              <a:spcBef>
-                <a:spcPts val="0"/>
-              </a:spcBef>
-              <a:spcAft>
-                <a:spcPts val="0"/>
-              </a:spcAft>
-              <a:defRPr sz="1238" b="1" i="1" lang="zh-CN" dirty="0">
-                <a:solidFill>
-                  <a:srgbClr val="000000"/>
-                </a:solidFill>
-                <a:latin typeface="Times New Roman"/>
-                <a:ea typeface="Times New Roman"/>
-                <a:cs typeface="Times New Roman"/>
-              </a:defRPr>
-            </a:pPr>
-            <a:r>
-              <a:rPr sz="1238" b="1" i="1" lang="zh-CN" dirty="0">
-                <a:solidFill>
-                  <a:srgbClr val="000000"/>
-                </a:solidFill>
-                <a:latin typeface="Times New Roman"/>
-                <a:ea typeface="Times New Roman"/>
-                <a:cs typeface="Times New Roman"/>
-              </a:rPr>
-              <a:t>(o,l,c, τ</a:t>
-            </a:r>
-            <a:r>
-              <a:rPr sz="1238" b="1" i="1" lang="zh-CN" dirty="0">
-                <a:solidFill>
-                  <a:srgbClr val="000000"/>
-                </a:solidFill>
-                <a:latin typeface="DejaVu Sans"/>
-                <a:ea typeface="DejaVu Sans"/>
-                <a:cs typeface="DejaVu Sans"/>
-              </a:rPr>
-              <a:t>ⁱ</a:t>
-            </a:r>
-            <a:r>
-              <a:rPr sz="1238" b="1" i="1" lang="zh-CN" dirty="0">
-                <a:solidFill>
-                  <a:srgbClr val="000000"/>
-                </a:solidFill>
-                <a:latin typeface="Times New Roman"/>
-                <a:ea typeface="Times New Roman"/>
-                <a:cs typeface="Times New Roman"/>
-              </a:rPr>
-              <a:t>,i)</a:t>
-            </a:r>
-          </a:p>
-        </p:txBody>
-      </p:sp>
-      <p:sp>
-        <p:nvSpPr>
-          <p:cNvPr id="159" name="prompt" descr="Editable text; source id prompt"/>
+          <p:cNvPr id="160" name="prompt" descr="Editable text; source id prompt"/>
           <p:cNvSpPr txBox="1"/>
           <p:nvPr/>
         </p:nvSpPr>
@@ -12656,7 +12668,7 @@
       </p:sp>
       <p:sp>
         <p:nvSpPr>
-          <p:cNvPr id="160" name="unprojection" descr="Editable text; source id unprojection"/>
+          <p:cNvPr id="161" name="unprojection" descr="Editable text; source id unprojection"/>
           <p:cNvSpPr txBox="1"/>
           <p:nvPr/>
         </p:nvSpPr>
@@ -12712,7 +12724,7 @@
       </p:sp>
       <p:sp>
         <p:nvSpPr>
-          <p:cNvPr id="161" name="multiview" descr="Editable text; source id multiview"/>
+          <p:cNvPr id="162" name="multiview" descr="Editable text; source id multiview"/>
           <p:cNvSpPr txBox="1"/>
           <p:nvPr/>
         </p:nvSpPr>
@@ -12768,7 +12780,7 @@
       </p:sp>
       <p:sp>
         <p:nvSpPr>
-          <p:cNvPr id="162" name="panel_a" descr="Editable text; source id panel_a"/>
+          <p:cNvPr id="163" name="panel_a" descr="Editable text; source id panel_a"/>
           <p:cNvSpPr txBox="1"/>
           <p:nvPr/>
         </p:nvSpPr>
@@ -12824,7 +12836,7 @@
       </p:sp>
       <p:cxnSp>
         <p:nvCxnSpPr>
-          <p:cNvPr id="163" name="rule_a" descr="Editable line; source id rule_a"/>
+          <p:cNvPr id="164" name="rule_a" descr="Editable line; source id rule_a"/>
           <p:cNvCxnSpPr/>
           <p:nvPr/>
         </p:nvCxnSpPr>
@@ -12860,7 +12872,7 @@
       </p:cxnSp>
       <p:pic>
         <p:nvPicPr>
-          <p:cNvPr id="164" name="denoiseN" descr="Exact text-free crop from Figure 1, Ke et al. CoRL 2024 / PMLR 2025, source pixels [41, 482, 204, 177]. Photographic/pointcloud artwork retains internally fused trajectory and camera ray marks."/>
+          <p:cNvPr id="165" name="denoiseN" descr="Exact text-free crop from Figure 1, Ke et al. CoRL 2024 / PMLR 2025, source pixels [41, 482, 204, 177]. Photographic/pointcloud artwork retains internally fused trajectory and camera ray marks."/>
           <p:cNvPicPr>
             <a:picLocks noChangeAspect="1"/>
           </p:cNvPicPr>
@@ -12885,7 +12897,7 @@
       </p:pic>
       <p:pic>
         <p:nvPicPr>
-          <p:cNvPr id="165" name="denoiseNm1" descr="Exact text-free crop from Figure 1, Ke et al. CoRL 2024 / PMLR 2025, source pixels [313, 482, 254, 177]. Photographic/pointcloud artwork retains internally fused trajectory and camera ray marks."/>
+          <p:cNvPr id="166" name="denoiseNm1" descr="Exact text-free crop from Figure 1, Ke et al. CoRL 2024 / PMLR 2025, source pixels [313, 482, 254, 177]. Photographic/pointcloud artwork retains internally fused trajectory and camera ray marks."/>
           <p:cNvPicPr>
             <a:picLocks noChangeAspect="1"/>
           </p:cNvPicPr>
@@ -12910,7 +12922,7 @@
       </p:pic>
       <p:pic>
         <p:nvPicPr>
-          <p:cNvPr id="166" name="denoise2" descr="Exact text-free crop from Figure 1, Ke et al. CoRL 2024 / PMLR 2025, source pixels [689, 482, 238, 177]. Photographic/pointcloud artwork retains internally fused trajectory and camera ray marks."/>
+          <p:cNvPr id="167" name="denoise2" descr="Exact text-free crop from Figure 1, Ke et al. CoRL 2024 / PMLR 2025, source pixels [689, 482, 238, 177]. Photographic/pointcloud artwork retains internally fused trajectory and camera ray marks."/>
           <p:cNvPicPr>
             <a:picLocks noChangeAspect="1"/>
           </p:cNvPicPr>
@@ -12935,7 +12947,7 @@
       </p:pic>
       <p:pic>
         <p:nvPicPr>
-          <p:cNvPr id="167" name="denoise1" descr="Exact text-free crop from Figure 1, Ke et al. CoRL 2024 / PMLR 2025, source pixels [1001, 482, 232, 177]. Photographic/pointcloud artwork retains internally fused trajectory and camera ray marks."/>
+          <p:cNvPr id="168" name="denoise1" descr="Exact text-free crop from Figure 1, Ke et al. CoRL 2024 / PMLR 2025, source pixels [1001, 482, 232, 177]. Photographic/pointcloud artwork retains internally fused trajectory and camera ray marks."/>
           <p:cNvPicPr>
             <a:picLocks noChangeAspect="1"/>
           </p:cNvPicPr>
@@ -12960,7 +12972,7 @@
       </p:pic>
       <p:pic>
         <p:nvPicPr>
-          <p:cNvPr id="168" name="denoise0" descr="Exact text-free crop from Figure 1, Ke et al. CoRL 2024 / PMLR 2025, source pixels [1321, 482, 224, 177]. Photographic/pointcloud artwork retains internally fused trajectory and camera ray marks."/>
+          <p:cNvPr id="169" name="denoise0" descr="Exact text-free crop from Figure 1, Ke et al. CoRL 2024 / PMLR 2025, source pixels [1321, 482, 224, 177]. Photographic/pointcloud artwork retains internally fused trajectory and camera ray marks."/>
           <p:cNvPicPr>
             <a:picLocks noChangeAspect="1"/>
           </p:cNvPicPr>
@@ -12985,13 +12997,13 @@
       </p:pic>
       <p:sp>
         <p:nvSpPr>
-          <p:cNvPr id="169" name="tauN" descr="Editable text; source id tauN"/>
+          <p:cNvPr id="170" name="tauNm1" descr="Editable text; source id tauNm1"/>
           <p:cNvSpPr txBox="1"/>
           <p:nvPr/>
         </p:nvSpPr>
         <p:spPr>
           <a:xfrm>
-            <a:off x="797965" y="5048669"/>
+            <a:off x="3253245" y="5048669"/>
             <a:ext cx="191818" cy="276218"/>
           </a:xfrm>
           <a:prstGeom prst="rect">
@@ -13041,13 +13053,13 @@
       </p:sp>
       <p:sp>
         <p:nvSpPr>
-          <p:cNvPr id="170" name="tauN_sup" descr="Editable text; source id tauN_sup"/>
+          <p:cNvPr id="171" name="tauNm1_sup" descr="Editable text; source id tauNm1_sup"/>
           <p:cNvSpPr txBox="1"/>
           <p:nvPr/>
         </p:nvSpPr>
         <p:spPr>
           <a:xfrm>
-            <a:off x="905384" y="5017978"/>
+            <a:off x="3360664" y="5017978"/>
             <a:ext cx="375964" cy="170335"/>
           </a:xfrm>
           <a:prstGeom prst="rect">
@@ -13090,20 +13102,20 @@
                 <a:ea typeface="Times New Roman"/>
                 <a:cs typeface="Times New Roman"/>
               </a:rPr>
-              <a:t>N</a:t>
+              <a:t>N−1</a:t>
             </a:r>
           </a:p>
         </p:txBody>
       </p:sp>
       <p:sp>
         <p:nvSpPr>
-          <p:cNvPr id="171" name="tauNm1" descr="Editable text; source id tauNm1"/>
+          <p:cNvPr id="172" name="tau2" descr="Editable text; source id tau2"/>
           <p:cNvSpPr txBox="1"/>
           <p:nvPr/>
         </p:nvSpPr>
         <p:spPr>
           <a:xfrm>
-            <a:off x="3253245" y="5048669"/>
+            <a:off x="6138199" y="5048669"/>
             <a:ext cx="191818" cy="276218"/>
           </a:xfrm>
           <a:prstGeom prst="rect">
@@ -13153,13 +13165,13 @@
       </p:sp>
       <p:sp>
         <p:nvSpPr>
-          <p:cNvPr id="172" name="tauNm1_sup" descr="Editable text; source id tauNm1_sup"/>
+          <p:cNvPr id="173" name="tau2_sup" descr="Editable text; source id tau2_sup"/>
           <p:cNvSpPr txBox="1"/>
           <p:nvPr/>
         </p:nvSpPr>
         <p:spPr>
           <a:xfrm>
-            <a:off x="3360664" y="5017978"/>
+            <a:off x="6245618" y="5017978"/>
             <a:ext cx="375964" cy="170335"/>
           </a:xfrm>
           <a:prstGeom prst="rect">
@@ -13202,20 +13214,20 @@
                 <a:ea typeface="Times New Roman"/>
                 <a:cs typeface="Times New Roman"/>
               </a:rPr>
-              <a:t>N−1</a:t>
+              <a:t>2</a:t>
             </a:r>
           </a:p>
         </p:txBody>
       </p:sp>
       <p:sp>
         <p:nvSpPr>
-          <p:cNvPr id="173" name="tau2" descr="Editable text; source id tau2"/>
+          <p:cNvPr id="174" name="tau1" descr="Editable text; source id tau1"/>
           <p:cNvSpPr txBox="1"/>
           <p:nvPr/>
         </p:nvSpPr>
         <p:spPr>
           <a:xfrm>
-            <a:off x="6138199" y="5048669"/>
+            <a:off x="8524425" y="5048669"/>
             <a:ext cx="191818" cy="276218"/>
           </a:xfrm>
           <a:prstGeom prst="rect">
@@ -13265,13 +13277,13 @@
       </p:sp>
       <p:sp>
         <p:nvSpPr>
-          <p:cNvPr id="174" name="tau2_sup" descr="Editable text; source id tau2_sup"/>
+          <p:cNvPr id="175" name="tau1_sup" descr="Editable text; source id tau1_sup"/>
           <p:cNvSpPr txBox="1"/>
           <p:nvPr/>
         </p:nvSpPr>
         <p:spPr>
           <a:xfrm>
-            <a:off x="6245618" y="5017978"/>
+            <a:off x="8631843" y="5017978"/>
             <a:ext cx="375964" cy="170335"/>
           </a:xfrm>
           <a:prstGeom prst="rect">
@@ -13314,20 +13326,20 @@
                 <a:ea typeface="Times New Roman"/>
                 <a:cs typeface="Times New Roman"/>
               </a:rPr>
-              <a:t>2</a:t>
+              <a:t>1</a:t>
             </a:r>
           </a:p>
         </p:txBody>
       </p:sp>
       <p:sp>
         <p:nvSpPr>
-          <p:cNvPr id="175" name="tau1" descr="Editable text; source id tau1"/>
+          <p:cNvPr id="176" name="tau0" descr="Editable text; source id tau0"/>
           <p:cNvSpPr txBox="1"/>
           <p:nvPr/>
         </p:nvSpPr>
         <p:spPr>
           <a:xfrm>
-            <a:off x="8524425" y="5048669"/>
+            <a:off x="11685598" y="5048669"/>
             <a:ext cx="191818" cy="276218"/>
           </a:xfrm>
           <a:prstGeom prst="rect">
@@ -13377,13 +13389,13 @@
       </p:sp>
       <p:sp>
         <p:nvSpPr>
-          <p:cNvPr id="176" name="tau1_sup" descr="Editable text; source id tau1_sup"/>
+          <p:cNvPr id="177" name="tau0_sup" descr="Editable text; source id tau0_sup"/>
           <p:cNvSpPr txBox="1"/>
           <p:nvPr/>
         </p:nvSpPr>
         <p:spPr>
           <a:xfrm>
-            <a:off x="8631843" y="5017978"/>
+            <a:off x="11793016" y="5017978"/>
             <a:ext cx="375964" cy="170335"/>
           </a:xfrm>
           <a:prstGeom prst="rect">
@@ -13426,118 +13438,6 @@
                 <a:ea typeface="Times New Roman"/>
                 <a:cs typeface="Times New Roman"/>
               </a:rPr>
-              <a:t>1</a:t>
-            </a:r>
-          </a:p>
-        </p:txBody>
-      </p:sp>
-      <p:sp>
-        <p:nvSpPr>
-          <p:cNvPr id="177" name="tau0" descr="Editable text; source id tau0"/>
-          <p:cNvSpPr txBox="1"/>
-          <p:nvPr/>
-        </p:nvSpPr>
-        <p:spPr>
-          <a:xfrm>
-            <a:off x="11685598" y="5048669"/>
-            <a:ext cx="191818" cy="276218"/>
-          </a:xfrm>
-          <a:prstGeom prst="rect">
-            <a:avLst/>
-          </a:prstGeom>
-          <a:noFill/>
-          <a:effectLst/>
-        </p:spPr>
-        <p:txBody>
-          <a:bodyPr wrap="none" anchor="t" tIns="0" rIns="0" bIns="0" lIns="0" anchorCtr="0" vertOverflow="overflow">
-            <a:noAutofit/>
-          </a:bodyPr>
-          <a:lstStyle/>
-          <a:p>
-            <a:pPr algn="l" fontAlgn="base">
-              <a:lnSpc>
-                <a:spcPts val="2084"/>
-              </a:lnSpc>
-              <a:spcBef>
-                <a:spcPts val="0"/>
-              </a:spcBef>
-              <a:spcAft>
-                <a:spcPts val="0"/>
-              </a:spcAft>
-              <a:defRPr sz="1812" b="1" i="1" lang="zh-CN" dirty="0">
-                <a:solidFill>
-                  <a:srgbClr val="000000"/>
-                </a:solidFill>
-                <a:latin typeface="Times New Roman"/>
-                <a:ea typeface="Times New Roman"/>
-                <a:cs typeface="Times New Roman"/>
-              </a:defRPr>
-            </a:pPr>
-            <a:r>
-              <a:rPr sz="1812" b="1" i="1" lang="zh-CN" dirty="0">
-                <a:solidFill>
-                  <a:srgbClr val="000000"/>
-                </a:solidFill>
-                <a:latin typeface="Times New Roman"/>
-                <a:ea typeface="Times New Roman"/>
-                <a:cs typeface="Times New Roman"/>
-              </a:rPr>
-              <a:t>τ</a:t>
-            </a:r>
-          </a:p>
-        </p:txBody>
-      </p:sp>
-      <p:sp>
-        <p:nvSpPr>
-          <p:cNvPr id="178" name="tau0_sup" descr="Editable text; source id tau0_sup"/>
-          <p:cNvSpPr txBox="1"/>
-          <p:nvPr/>
-        </p:nvSpPr>
-        <p:spPr>
-          <a:xfrm>
-            <a:off x="11793016" y="5017978"/>
-            <a:ext cx="375964" cy="170335"/>
-          </a:xfrm>
-          <a:prstGeom prst="rect">
-            <a:avLst/>
-          </a:prstGeom>
-          <a:noFill/>
-          <a:effectLst/>
-        </p:spPr>
-        <p:txBody>
-          <a:bodyPr wrap="none" anchor="t" tIns="0" rIns="0" bIns="0" lIns="0" anchorCtr="0" vertOverflow="overflow">
-            <a:noAutofit/>
-          </a:bodyPr>
-          <a:lstStyle/>
-          <a:p>
-            <a:pPr algn="l" fontAlgn="base">
-              <a:lnSpc>
-                <a:spcPts val="1250"/>
-              </a:lnSpc>
-              <a:spcBef>
-                <a:spcPts val="0"/>
-              </a:spcBef>
-              <a:spcAft>
-                <a:spcPts val="0"/>
-              </a:spcAft>
-              <a:defRPr sz="1087" b="0" i="1" lang="zh-CN" dirty="0">
-                <a:solidFill>
-                  <a:srgbClr val="000000"/>
-                </a:solidFill>
-                <a:latin typeface="Times New Roman"/>
-                <a:ea typeface="Times New Roman"/>
-                <a:cs typeface="Times New Roman"/>
-              </a:defRPr>
-            </a:pPr>
-            <a:r>
-              <a:rPr sz="1087" b="0" i="1" lang="zh-CN" dirty="0">
-                <a:solidFill>
-                  <a:srgbClr val="000000"/>
-                </a:solidFill>
-                <a:latin typeface="Times New Roman"/>
-                <a:ea typeface="Times New Roman"/>
-                <a:cs typeface="Times New Roman"/>
-              </a:rPr>
               <a:t>0</a:t>
             </a:r>
           </a:p>
@@ -13545,74 +13445,7 @@
       </p:sp>
       <p:sp>
         <p:nvSpPr>
-          <p:cNvPr id="179" name="gaussian" descr="Editable text; source id gaussian"/>
-          <p:cNvSpPr txBox="1"/>
-          <p:nvPr/>
-        </p:nvSpPr>
-        <p:spPr>
-          <a:xfrm>
-            <a:off x="1058839" y="5048669"/>
-            <a:ext cx="784538" cy="268546"/>
-          </a:xfrm>
-          <a:prstGeom prst="rect">
-            <a:avLst/>
-          </a:prstGeom>
-          <a:noFill/>
-          <a:effectLst/>
-        </p:spPr>
-        <p:txBody>
-          <a:bodyPr wrap="none" anchor="t" tIns="0" rIns="0" bIns="0" lIns="0" anchorCtr="0" vertOverflow="overflow">
-            <a:noAutofit/>
-          </a:bodyPr>
-          <a:lstStyle/>
-          <a:p>
-            <a:pPr algn="l" fontAlgn="base">
-              <a:lnSpc>
-                <a:spcPts val="1842"/>
-              </a:lnSpc>
-              <a:spcBef>
-                <a:spcPts val="0"/>
-              </a:spcBef>
-              <a:spcAft>
-                <a:spcPts val="0"/>
-              </a:spcAft>
-              <a:defRPr sz="1570" b="0" i="0" lang="zh-CN" dirty="0">
-                <a:solidFill>
-                  <a:srgbClr val="000000"/>
-                </a:solidFill>
-                <a:latin typeface="DejaVu Sans"/>
-                <a:ea typeface="DejaVu Sans"/>
-                <a:cs typeface="DejaVu Sans"/>
-              </a:defRPr>
-            </a:pPr>
-            <a:r>
-              <a:rPr sz="1570" b="0" i="0" lang="zh-CN" dirty="0">
-                <a:solidFill>
-                  <a:srgbClr val="000000"/>
-                </a:solidFill>
-                <a:latin typeface="DejaVu Sans"/>
-                <a:ea typeface="DejaVu Sans"/>
-                <a:cs typeface="DejaVu Sans"/>
-              </a:rPr>
-              <a:t>∼</a:t>
-            </a:r>
-            <a:r>
-              <a:rPr sz="1570" b="0" i="0" lang="zh-CN" dirty="0">
-                <a:solidFill>
-                  <a:srgbClr val="000000"/>
-                </a:solidFill>
-                <a:latin typeface="Times New Roman"/>
-                <a:ea typeface="Times New Roman"/>
-                <a:cs typeface="Times New Roman"/>
-              </a:rPr>
-              <a:t>N(0, 1)</a:t>
-            </a:r>
-          </a:p>
-        </p:txBody>
-      </p:sp>
-      <p:sp>
-        <p:nvSpPr>
-          <p:cNvPr id="180" name="trajectory" descr="Editable text; source id trajectory"/>
+          <p:cNvPr id="178" name="trajectory" descr="Editable text; source id trajectory"/>
           <p:cNvSpPr txBox="1"/>
           <p:nvPr/>
         </p:nvSpPr>
@@ -13668,7 +13501,7 @@
       </p:sp>
       <p:sp>
         <p:nvSpPr>
-          <p:cNvPr id="181" name="denoising_dots" descr="Editable text; source id denoising_dots"/>
+          <p:cNvPr id="179" name="denoising_dots" descr="Editable text; source id denoising_dots"/>
           <p:cNvSpPr txBox="1"/>
           <p:nvPr/>
         </p:nvSpPr>
@@ -13724,7 +13557,7 @@
       </p:sp>
       <p:sp>
         <p:nvSpPr>
-          <p:cNvPr id="182" name="noise_box_0" descr="Editable shape; source id noise_box_0"/>
+          <p:cNvPr id="180" name="noise_box_0" descr="Editable shape; source id noise_box_0"/>
           <p:cNvSpPr/>
           <p:nvPr/>
         </p:nvSpPr>
@@ -13768,401 +13601,9 @@
           </a:p>
         </p:txBody>
       </p:sp>
-      <p:sp>
-        <p:nvSpPr>
-          <p:cNvPr id="183" name="step_loc_0_epsilon" descr="Editable text; source id step_loc_0_epsilon"/>
-          <p:cNvSpPr txBox="1"/>
-          <p:nvPr/>
-        </p:nvSpPr>
-        <p:spPr>
-          <a:xfrm>
-            <a:off x="1910514" y="4933578"/>
-            <a:ext cx="99745" cy="191818"/>
-          </a:xfrm>
-          <a:prstGeom prst="rect">
-            <a:avLst/>
-          </a:prstGeom>
-          <a:noFill/>
-          <a:effectLst/>
-        </p:spPr>
-        <p:txBody>
-          <a:bodyPr wrap="none" anchor="t" tIns="0" rIns="0" bIns="0" lIns="0" anchorCtr="0" vertOverflow="overflow">
-            <a:noAutofit/>
-          </a:bodyPr>
-          <a:lstStyle/>
-          <a:p>
-            <a:pPr algn="l" fontAlgn="base">
-              <a:lnSpc>
-                <a:spcPts val="1389"/>
-              </a:lnSpc>
-              <a:spcBef>
-                <a:spcPts val="0"/>
-              </a:spcBef>
-              <a:spcAft>
-                <a:spcPts val="0"/>
-              </a:spcAft>
-              <a:defRPr sz="1208" b="0" i="1" lang="zh-CN" dirty="0">
-                <a:solidFill>
-                  <a:srgbClr val="000000"/>
-                </a:solidFill>
-                <a:latin typeface="Times New Roman"/>
-                <a:ea typeface="Times New Roman"/>
-                <a:cs typeface="Times New Roman"/>
-              </a:defRPr>
-            </a:pPr>
-            <a:r>
-              <a:rPr sz="1208" b="0" i="1" lang="zh-CN" dirty="0">
-                <a:solidFill>
-                  <a:srgbClr val="000000"/>
-                </a:solidFill>
-                <a:latin typeface="Times New Roman"/>
-                <a:ea typeface="Times New Roman"/>
-                <a:cs typeface="Times New Roman"/>
-              </a:rPr>
-              <a:t>ϵ</a:t>
-            </a:r>
-          </a:p>
-        </p:txBody>
-      </p:sp>
-      <p:sp>
-        <p:nvSpPr>
-          <p:cNvPr id="184" name="step_loc_0_sup" descr="Editable text; source id step_loc_0_sup"/>
-          <p:cNvSpPr txBox="1"/>
-          <p:nvPr/>
-        </p:nvSpPr>
-        <p:spPr>
-          <a:xfrm>
-            <a:off x="1987242" y="4902887"/>
-            <a:ext cx="191818" cy="130436"/>
-          </a:xfrm>
-          <a:prstGeom prst="rect">
-            <a:avLst/>
-          </a:prstGeom>
-          <a:noFill/>
-          <a:effectLst/>
-        </p:spPr>
-        <p:txBody>
-          <a:bodyPr wrap="none" anchor="t" tIns="0" rIns="0" bIns="0" lIns="0" anchorCtr="0" vertOverflow="overflow">
-            <a:noAutofit/>
-          </a:bodyPr>
-          <a:lstStyle/>
-          <a:p>
-            <a:pPr algn="l" fontAlgn="base">
-              <a:lnSpc>
-                <a:spcPts val="833"/>
-              </a:lnSpc>
-              <a:spcBef>
-                <a:spcPts val="0"/>
-              </a:spcBef>
-              <a:spcAft>
-                <a:spcPts val="0"/>
-              </a:spcAft>
-              <a:defRPr sz="724" b="0" i="1" lang="zh-CN" dirty="0">
-                <a:solidFill>
-                  <a:srgbClr val="000000"/>
-                </a:solidFill>
-                <a:latin typeface="Times New Roman"/>
-                <a:ea typeface="Times New Roman"/>
-                <a:cs typeface="Times New Roman"/>
-              </a:defRPr>
-            </a:pPr>
-            <a:r>
-              <a:rPr sz="724" b="0" i="1" lang="zh-CN" dirty="0">
-                <a:solidFill>
-                  <a:srgbClr val="000000"/>
-                </a:solidFill>
-                <a:latin typeface="Times New Roman"/>
-                <a:ea typeface="Times New Roman"/>
-                <a:cs typeface="Times New Roman"/>
-              </a:rPr>
-              <a:t>loc</a:t>
-            </a:r>
-          </a:p>
-        </p:txBody>
-      </p:sp>
-      <p:sp>
-        <p:nvSpPr>
-          <p:cNvPr id="185" name="step_loc_0_theta" descr="Editable text; source id step_loc_0_theta"/>
-          <p:cNvSpPr txBox="1"/>
-          <p:nvPr/>
-        </p:nvSpPr>
-        <p:spPr>
-          <a:xfrm>
-            <a:off x="1964223" y="5017978"/>
-            <a:ext cx="84400" cy="122763"/>
-          </a:xfrm>
-          <a:prstGeom prst="rect">
-            <a:avLst/>
-          </a:prstGeom>
-          <a:noFill/>
-          <a:effectLst/>
-        </p:spPr>
-        <p:txBody>
-          <a:bodyPr wrap="none" anchor="t" tIns="0" rIns="0" bIns="0" lIns="0" anchorCtr="0" vertOverflow="overflow">
-            <a:noAutofit/>
-          </a:bodyPr>
-          <a:lstStyle/>
-          <a:p>
-            <a:pPr algn="l" fontAlgn="base">
-              <a:lnSpc>
-                <a:spcPts val="833"/>
-              </a:lnSpc>
-              <a:spcBef>
-                <a:spcPts val="0"/>
-              </a:spcBef>
-              <a:spcAft>
-                <a:spcPts val="0"/>
-              </a:spcAft>
-              <a:defRPr sz="724" b="0" i="1" lang="zh-CN" dirty="0">
-                <a:solidFill>
-                  <a:srgbClr val="000000"/>
-                </a:solidFill>
-                <a:latin typeface="Times New Roman"/>
-                <a:ea typeface="Times New Roman"/>
-                <a:cs typeface="Times New Roman"/>
-              </a:defRPr>
-            </a:pPr>
-            <a:r>
-              <a:rPr sz="724" b="0" i="1" lang="zh-CN" dirty="0">
-                <a:solidFill>
-                  <a:srgbClr val="000000"/>
-                </a:solidFill>
-                <a:latin typeface="Times New Roman"/>
-                <a:ea typeface="Times New Roman"/>
-                <a:cs typeface="Times New Roman"/>
-              </a:rPr>
-              <a:t>θ</a:t>
-            </a:r>
-          </a:p>
-        </p:txBody>
-      </p:sp>
-      <p:sp>
-        <p:nvSpPr>
-          <p:cNvPr id="186" name="step_rot_0_epsilon" descr="Editable text; source id step_rot_0_epsilon"/>
-          <p:cNvSpPr txBox="1"/>
-          <p:nvPr/>
-        </p:nvSpPr>
-        <p:spPr>
-          <a:xfrm>
-            <a:off x="2148369" y="4933578"/>
-            <a:ext cx="99745" cy="191818"/>
-          </a:xfrm>
-          <a:prstGeom prst="rect">
-            <a:avLst/>
-          </a:prstGeom>
-          <a:noFill/>
-          <a:effectLst/>
-        </p:spPr>
-        <p:txBody>
-          <a:bodyPr wrap="none" anchor="t" tIns="0" rIns="0" bIns="0" lIns="0" anchorCtr="0" vertOverflow="overflow">
-            <a:noAutofit/>
-          </a:bodyPr>
-          <a:lstStyle/>
-          <a:p>
-            <a:pPr algn="l" fontAlgn="base">
-              <a:lnSpc>
-                <a:spcPts val="1389"/>
-              </a:lnSpc>
-              <a:spcBef>
-                <a:spcPts val="0"/>
-              </a:spcBef>
-              <a:spcAft>
-                <a:spcPts val="0"/>
-              </a:spcAft>
-              <a:defRPr sz="1208" b="0" i="1" lang="zh-CN" dirty="0">
-                <a:solidFill>
-                  <a:srgbClr val="000000"/>
-                </a:solidFill>
-                <a:latin typeface="Times New Roman"/>
-                <a:ea typeface="Times New Roman"/>
-                <a:cs typeface="Times New Roman"/>
-              </a:defRPr>
-            </a:pPr>
-            <a:r>
-              <a:rPr sz="1208" b="0" i="1" lang="zh-CN" dirty="0">
-                <a:solidFill>
-                  <a:srgbClr val="000000"/>
-                </a:solidFill>
-                <a:latin typeface="Times New Roman"/>
-                <a:ea typeface="Times New Roman"/>
-                <a:cs typeface="Times New Roman"/>
-              </a:rPr>
-              <a:t>ϵ</a:t>
-            </a:r>
-          </a:p>
-        </p:txBody>
-      </p:sp>
-      <p:sp>
-        <p:nvSpPr>
-          <p:cNvPr id="187" name="step_rot_0_sup" descr="Editable text; source id step_rot_0_sup"/>
-          <p:cNvSpPr txBox="1"/>
-          <p:nvPr/>
-        </p:nvSpPr>
-        <p:spPr>
-          <a:xfrm>
-            <a:off x="2225097" y="4902887"/>
-            <a:ext cx="191818" cy="130436"/>
-          </a:xfrm>
-          <a:prstGeom prst="rect">
-            <a:avLst/>
-          </a:prstGeom>
-          <a:noFill/>
-          <a:effectLst/>
-        </p:spPr>
-        <p:txBody>
-          <a:bodyPr wrap="none" anchor="t" tIns="0" rIns="0" bIns="0" lIns="0" anchorCtr="0" vertOverflow="overflow">
-            <a:noAutofit/>
-          </a:bodyPr>
-          <a:lstStyle/>
-          <a:p>
-            <a:pPr algn="l" fontAlgn="base">
-              <a:lnSpc>
-                <a:spcPts val="833"/>
-              </a:lnSpc>
-              <a:spcBef>
-                <a:spcPts val="0"/>
-              </a:spcBef>
-              <a:spcAft>
-                <a:spcPts val="0"/>
-              </a:spcAft>
-              <a:defRPr sz="724" b="0" i="1" lang="zh-CN" dirty="0">
-                <a:solidFill>
-                  <a:srgbClr val="000000"/>
-                </a:solidFill>
-                <a:latin typeface="Times New Roman"/>
-                <a:ea typeface="Times New Roman"/>
-                <a:cs typeface="Times New Roman"/>
-              </a:defRPr>
-            </a:pPr>
-            <a:r>
-              <a:rPr sz="724" b="0" i="1" lang="zh-CN" dirty="0">
-                <a:solidFill>
-                  <a:srgbClr val="000000"/>
-                </a:solidFill>
-                <a:latin typeface="Times New Roman"/>
-                <a:ea typeface="Times New Roman"/>
-                <a:cs typeface="Times New Roman"/>
-              </a:rPr>
-              <a:t>rot</a:t>
-            </a:r>
-          </a:p>
-        </p:txBody>
-      </p:sp>
-      <p:sp>
-        <p:nvSpPr>
-          <p:cNvPr id="188" name="step_rot_0_theta" descr="Editable text; source id step_rot_0_theta"/>
-          <p:cNvSpPr txBox="1"/>
-          <p:nvPr/>
-        </p:nvSpPr>
-        <p:spPr>
-          <a:xfrm>
-            <a:off x="2202079" y="5017978"/>
-            <a:ext cx="84400" cy="122763"/>
-          </a:xfrm>
-          <a:prstGeom prst="rect">
-            <a:avLst/>
-          </a:prstGeom>
-          <a:noFill/>
-          <a:effectLst/>
-        </p:spPr>
-        <p:txBody>
-          <a:bodyPr wrap="none" anchor="t" tIns="0" rIns="0" bIns="0" lIns="0" anchorCtr="0" vertOverflow="overflow">
-            <a:noAutofit/>
-          </a:bodyPr>
-          <a:lstStyle/>
-          <a:p>
-            <a:pPr algn="l" fontAlgn="base">
-              <a:lnSpc>
-                <a:spcPts val="833"/>
-              </a:lnSpc>
-              <a:spcBef>
-                <a:spcPts val="0"/>
-              </a:spcBef>
-              <a:spcAft>
-                <a:spcPts val="0"/>
-              </a:spcAft>
-              <a:defRPr sz="724" b="0" i="1" lang="zh-CN" dirty="0">
-                <a:solidFill>
-                  <a:srgbClr val="000000"/>
-                </a:solidFill>
-                <a:latin typeface="Times New Roman"/>
-                <a:ea typeface="Times New Roman"/>
-                <a:cs typeface="Times New Roman"/>
-              </a:defRPr>
-            </a:pPr>
-            <a:r>
-              <a:rPr sz="724" b="0" i="1" lang="zh-CN" dirty="0">
-                <a:solidFill>
-                  <a:srgbClr val="000000"/>
-                </a:solidFill>
-                <a:latin typeface="Times New Roman"/>
-                <a:ea typeface="Times New Roman"/>
-                <a:cs typeface="Times New Roman"/>
-              </a:rPr>
-              <a:t>θ</a:t>
-            </a:r>
-          </a:p>
-        </p:txBody>
-      </p:sp>
-      <p:sp>
-        <p:nvSpPr>
-          <p:cNvPr id="189" name="comma_0" descr="Editable text; source id comma_0"/>
-          <p:cNvSpPr txBox="1"/>
-          <p:nvPr/>
-        </p:nvSpPr>
-        <p:spPr>
-          <a:xfrm>
-            <a:off x="2094660" y="4941250"/>
-            <a:ext cx="69054" cy="170335"/>
-          </a:xfrm>
-          <a:prstGeom prst="rect">
-            <a:avLst/>
-          </a:prstGeom>
-          <a:noFill/>
-          <a:effectLst/>
-        </p:spPr>
-        <p:txBody>
-          <a:bodyPr wrap="none" anchor="t" tIns="0" rIns="0" bIns="0" lIns="0" anchorCtr="0" vertOverflow="overflow">
-            <a:noAutofit/>
-          </a:bodyPr>
-          <a:lstStyle/>
-          <a:p>
-            <a:pPr algn="l" fontAlgn="base">
-              <a:lnSpc>
-                <a:spcPts val="1250"/>
-              </a:lnSpc>
-              <a:spcBef>
-                <a:spcPts val="0"/>
-              </a:spcBef>
-              <a:spcAft>
-                <a:spcPts val="0"/>
-              </a:spcAft>
-              <a:defRPr sz="1087" b="0" i="0" lang="zh-CN" dirty="0">
-                <a:solidFill>
-                  <a:srgbClr val="000000"/>
-                </a:solidFill>
-                <a:latin typeface="Times New Roman"/>
-                <a:ea typeface="Times New Roman"/>
-                <a:cs typeface="Times New Roman"/>
-              </a:defRPr>
-            </a:pPr>
-            <a:r>
-              <a:rPr sz="1087" b="0" i="0" lang="zh-CN" dirty="0">
-                <a:solidFill>
-                  <a:srgbClr val="000000"/>
-                </a:solidFill>
-                <a:latin typeface="Times New Roman"/>
-                <a:ea typeface="Times New Roman"/>
-                <a:cs typeface="Times New Roman"/>
-              </a:rPr>
-              <a:t>,</a:t>
-            </a:r>
-          </a:p>
-        </p:txBody>
-      </p:sp>
       <p:cxnSp>
         <p:nvCxnSpPr>
-          <p:cNvPr id="190" name="curve_in_0" descr="Editable line; source id curve_in_0"/>
+          <p:cNvPr id="181" name="curve_in_0" descr="Editable line; source id curve_in_0"/>
           <p:cNvCxnSpPr/>
           <p:nvPr/>
         </p:nvCxnSpPr>
@@ -14198,7 +13639,7 @@
       </p:cxnSp>
       <p:cxnSp>
         <p:nvCxnSpPr>
-          <p:cNvPr id="191" name="curve_join_0" descr="Editable line; source id curve_join_0"/>
+          <p:cNvPr id="182" name="curve_join_0" descr="Editable line; source id curve_join_0"/>
           <p:cNvCxnSpPr/>
           <p:nvPr/>
         </p:nvCxnSpPr>
@@ -14234,7 +13675,7 @@
       </p:cxnSp>
       <p:sp>
         <p:nvSpPr>
-          <p:cNvPr id="192" name="curve_out_0" descr="Editable line; source id curve_out_0"/>
+          <p:cNvPr id="183" name="curve_out_0" descr="Editable line; source id curve_out_0"/>
           <p:cNvSpPr/>
           <p:nvPr/>
         </p:nvSpPr>
@@ -14308,7 +13749,7 @@
       </p:sp>
       <p:sp>
         <p:nvSpPr>
-          <p:cNvPr id="193" name="noise_box_1" descr="Editable shape; source id noise_box_1"/>
+          <p:cNvPr id="184" name="noise_box_1" descr="Editable shape; source id noise_box_1"/>
           <p:cNvSpPr/>
           <p:nvPr/>
         </p:nvSpPr>
@@ -14352,401 +13793,9 @@
           </a:p>
         </p:txBody>
       </p:sp>
-      <p:sp>
-        <p:nvSpPr>
-          <p:cNvPr id="194" name="step_loc_1_epsilon" descr="Editable text; source id step_loc_1_epsilon"/>
-          <p:cNvSpPr txBox="1"/>
-          <p:nvPr/>
-        </p:nvSpPr>
-        <p:spPr>
-          <a:xfrm>
-            <a:off x="7151002" y="4933578"/>
-            <a:ext cx="99745" cy="191818"/>
-          </a:xfrm>
-          <a:prstGeom prst="rect">
-            <a:avLst/>
-          </a:prstGeom>
-          <a:noFill/>
-          <a:effectLst/>
-        </p:spPr>
-        <p:txBody>
-          <a:bodyPr wrap="none" anchor="t" tIns="0" rIns="0" bIns="0" lIns="0" anchorCtr="0" vertOverflow="overflow">
-            <a:noAutofit/>
-          </a:bodyPr>
-          <a:lstStyle/>
-          <a:p>
-            <a:pPr algn="l" fontAlgn="base">
-              <a:lnSpc>
-                <a:spcPts val="1389"/>
-              </a:lnSpc>
-              <a:spcBef>
-                <a:spcPts val="0"/>
-              </a:spcBef>
-              <a:spcAft>
-                <a:spcPts val="0"/>
-              </a:spcAft>
-              <a:defRPr sz="1208" b="0" i="1" lang="zh-CN" dirty="0">
-                <a:solidFill>
-                  <a:srgbClr val="000000"/>
-                </a:solidFill>
-                <a:latin typeface="Times New Roman"/>
-                <a:ea typeface="Times New Roman"/>
-                <a:cs typeface="Times New Roman"/>
-              </a:defRPr>
-            </a:pPr>
-            <a:r>
-              <a:rPr sz="1208" b="0" i="1" lang="zh-CN" dirty="0">
-                <a:solidFill>
-                  <a:srgbClr val="000000"/>
-                </a:solidFill>
-                <a:latin typeface="Times New Roman"/>
-                <a:ea typeface="Times New Roman"/>
-                <a:cs typeface="Times New Roman"/>
-              </a:rPr>
-              <a:t>ϵ</a:t>
-            </a:r>
-          </a:p>
-        </p:txBody>
-      </p:sp>
-      <p:sp>
-        <p:nvSpPr>
-          <p:cNvPr id="195" name="step_loc_1_sup" descr="Editable text; source id step_loc_1_sup"/>
-          <p:cNvSpPr txBox="1"/>
-          <p:nvPr/>
-        </p:nvSpPr>
-        <p:spPr>
-          <a:xfrm>
-            <a:off x="7227730" y="4902887"/>
-            <a:ext cx="191818" cy="130436"/>
-          </a:xfrm>
-          <a:prstGeom prst="rect">
-            <a:avLst/>
-          </a:prstGeom>
-          <a:noFill/>
-          <a:effectLst/>
-        </p:spPr>
-        <p:txBody>
-          <a:bodyPr wrap="none" anchor="t" tIns="0" rIns="0" bIns="0" lIns="0" anchorCtr="0" vertOverflow="overflow">
-            <a:noAutofit/>
-          </a:bodyPr>
-          <a:lstStyle/>
-          <a:p>
-            <a:pPr algn="l" fontAlgn="base">
-              <a:lnSpc>
-                <a:spcPts val="833"/>
-              </a:lnSpc>
-              <a:spcBef>
-                <a:spcPts val="0"/>
-              </a:spcBef>
-              <a:spcAft>
-                <a:spcPts val="0"/>
-              </a:spcAft>
-              <a:defRPr sz="724" b="0" i="1" lang="zh-CN" dirty="0">
-                <a:solidFill>
-                  <a:srgbClr val="000000"/>
-                </a:solidFill>
-                <a:latin typeface="Times New Roman"/>
-                <a:ea typeface="Times New Roman"/>
-                <a:cs typeface="Times New Roman"/>
-              </a:defRPr>
-            </a:pPr>
-            <a:r>
-              <a:rPr sz="724" b="0" i="1" lang="zh-CN" dirty="0">
-                <a:solidFill>
-                  <a:srgbClr val="000000"/>
-                </a:solidFill>
-                <a:latin typeface="Times New Roman"/>
-                <a:ea typeface="Times New Roman"/>
-                <a:cs typeface="Times New Roman"/>
-              </a:rPr>
-              <a:t>loc</a:t>
-            </a:r>
-          </a:p>
-        </p:txBody>
-      </p:sp>
-      <p:sp>
-        <p:nvSpPr>
-          <p:cNvPr id="196" name="step_loc_1_theta" descr="Editable text; source id step_loc_1_theta"/>
-          <p:cNvSpPr txBox="1"/>
-          <p:nvPr/>
-        </p:nvSpPr>
-        <p:spPr>
-          <a:xfrm>
-            <a:off x="7204712" y="5017978"/>
-            <a:ext cx="84400" cy="122763"/>
-          </a:xfrm>
-          <a:prstGeom prst="rect">
-            <a:avLst/>
-          </a:prstGeom>
-          <a:noFill/>
-          <a:effectLst/>
-        </p:spPr>
-        <p:txBody>
-          <a:bodyPr wrap="none" anchor="t" tIns="0" rIns="0" bIns="0" lIns="0" anchorCtr="0" vertOverflow="overflow">
-            <a:noAutofit/>
-          </a:bodyPr>
-          <a:lstStyle/>
-          <a:p>
-            <a:pPr algn="l" fontAlgn="base">
-              <a:lnSpc>
-                <a:spcPts val="833"/>
-              </a:lnSpc>
-              <a:spcBef>
-                <a:spcPts val="0"/>
-              </a:spcBef>
-              <a:spcAft>
-                <a:spcPts val="0"/>
-              </a:spcAft>
-              <a:defRPr sz="724" b="0" i="1" lang="zh-CN" dirty="0">
-                <a:solidFill>
-                  <a:srgbClr val="000000"/>
-                </a:solidFill>
-                <a:latin typeface="Times New Roman"/>
-                <a:ea typeface="Times New Roman"/>
-                <a:cs typeface="Times New Roman"/>
-              </a:defRPr>
-            </a:pPr>
-            <a:r>
-              <a:rPr sz="724" b="0" i="1" lang="zh-CN" dirty="0">
-                <a:solidFill>
-                  <a:srgbClr val="000000"/>
-                </a:solidFill>
-                <a:latin typeface="Times New Roman"/>
-                <a:ea typeface="Times New Roman"/>
-                <a:cs typeface="Times New Roman"/>
-              </a:rPr>
-              <a:t>θ</a:t>
-            </a:r>
-          </a:p>
-        </p:txBody>
-      </p:sp>
-      <p:sp>
-        <p:nvSpPr>
-          <p:cNvPr id="197" name="step_rot_1_epsilon" descr="Editable text; source id step_rot_1_epsilon"/>
-          <p:cNvSpPr txBox="1"/>
-          <p:nvPr/>
-        </p:nvSpPr>
-        <p:spPr>
-          <a:xfrm>
-            <a:off x="7388858" y="4933578"/>
-            <a:ext cx="99745" cy="191818"/>
-          </a:xfrm>
-          <a:prstGeom prst="rect">
-            <a:avLst/>
-          </a:prstGeom>
-          <a:noFill/>
-          <a:effectLst/>
-        </p:spPr>
-        <p:txBody>
-          <a:bodyPr wrap="none" anchor="t" tIns="0" rIns="0" bIns="0" lIns="0" anchorCtr="0" vertOverflow="overflow">
-            <a:noAutofit/>
-          </a:bodyPr>
-          <a:lstStyle/>
-          <a:p>
-            <a:pPr algn="l" fontAlgn="base">
-              <a:lnSpc>
-                <a:spcPts val="1389"/>
-              </a:lnSpc>
-              <a:spcBef>
-                <a:spcPts val="0"/>
-              </a:spcBef>
-              <a:spcAft>
-                <a:spcPts val="0"/>
-              </a:spcAft>
-              <a:defRPr sz="1208" b="0" i="1" lang="zh-CN" dirty="0">
-                <a:solidFill>
-                  <a:srgbClr val="000000"/>
-                </a:solidFill>
-                <a:latin typeface="Times New Roman"/>
-                <a:ea typeface="Times New Roman"/>
-                <a:cs typeface="Times New Roman"/>
-              </a:defRPr>
-            </a:pPr>
-            <a:r>
-              <a:rPr sz="1208" b="0" i="1" lang="zh-CN" dirty="0">
-                <a:solidFill>
-                  <a:srgbClr val="000000"/>
-                </a:solidFill>
-                <a:latin typeface="Times New Roman"/>
-                <a:ea typeface="Times New Roman"/>
-                <a:cs typeface="Times New Roman"/>
-              </a:rPr>
-              <a:t>ϵ</a:t>
-            </a:r>
-          </a:p>
-        </p:txBody>
-      </p:sp>
-      <p:sp>
-        <p:nvSpPr>
-          <p:cNvPr id="198" name="step_rot_1_sup" descr="Editable text; source id step_rot_1_sup"/>
-          <p:cNvSpPr txBox="1"/>
-          <p:nvPr/>
-        </p:nvSpPr>
-        <p:spPr>
-          <a:xfrm>
-            <a:off x="7465585" y="4902887"/>
-            <a:ext cx="191818" cy="130436"/>
-          </a:xfrm>
-          <a:prstGeom prst="rect">
-            <a:avLst/>
-          </a:prstGeom>
-          <a:noFill/>
-          <a:effectLst/>
-        </p:spPr>
-        <p:txBody>
-          <a:bodyPr wrap="none" anchor="t" tIns="0" rIns="0" bIns="0" lIns="0" anchorCtr="0" vertOverflow="overflow">
-            <a:noAutofit/>
-          </a:bodyPr>
-          <a:lstStyle/>
-          <a:p>
-            <a:pPr algn="l" fontAlgn="base">
-              <a:lnSpc>
-                <a:spcPts val="833"/>
-              </a:lnSpc>
-              <a:spcBef>
-                <a:spcPts val="0"/>
-              </a:spcBef>
-              <a:spcAft>
-                <a:spcPts val="0"/>
-              </a:spcAft>
-              <a:defRPr sz="724" b="0" i="1" lang="zh-CN" dirty="0">
-                <a:solidFill>
-                  <a:srgbClr val="000000"/>
-                </a:solidFill>
-                <a:latin typeface="Times New Roman"/>
-                <a:ea typeface="Times New Roman"/>
-                <a:cs typeface="Times New Roman"/>
-              </a:defRPr>
-            </a:pPr>
-            <a:r>
-              <a:rPr sz="724" b="0" i="1" lang="zh-CN" dirty="0">
-                <a:solidFill>
-                  <a:srgbClr val="000000"/>
-                </a:solidFill>
-                <a:latin typeface="Times New Roman"/>
-                <a:ea typeface="Times New Roman"/>
-                <a:cs typeface="Times New Roman"/>
-              </a:rPr>
-              <a:t>rot</a:t>
-            </a:r>
-          </a:p>
-        </p:txBody>
-      </p:sp>
-      <p:sp>
-        <p:nvSpPr>
-          <p:cNvPr id="199" name="step_rot_1_theta" descr="Editable text; source id step_rot_1_theta"/>
-          <p:cNvSpPr txBox="1"/>
-          <p:nvPr/>
-        </p:nvSpPr>
-        <p:spPr>
-          <a:xfrm>
-            <a:off x="7442567" y="5017978"/>
-            <a:ext cx="84400" cy="122763"/>
-          </a:xfrm>
-          <a:prstGeom prst="rect">
-            <a:avLst/>
-          </a:prstGeom>
-          <a:noFill/>
-          <a:effectLst/>
-        </p:spPr>
-        <p:txBody>
-          <a:bodyPr wrap="none" anchor="t" tIns="0" rIns="0" bIns="0" lIns="0" anchorCtr="0" vertOverflow="overflow">
-            <a:noAutofit/>
-          </a:bodyPr>
-          <a:lstStyle/>
-          <a:p>
-            <a:pPr algn="l" fontAlgn="base">
-              <a:lnSpc>
-                <a:spcPts val="833"/>
-              </a:lnSpc>
-              <a:spcBef>
-                <a:spcPts val="0"/>
-              </a:spcBef>
-              <a:spcAft>
-                <a:spcPts val="0"/>
-              </a:spcAft>
-              <a:defRPr sz="724" b="0" i="1" lang="zh-CN" dirty="0">
-                <a:solidFill>
-                  <a:srgbClr val="000000"/>
-                </a:solidFill>
-                <a:latin typeface="Times New Roman"/>
-                <a:ea typeface="Times New Roman"/>
-                <a:cs typeface="Times New Roman"/>
-              </a:defRPr>
-            </a:pPr>
-            <a:r>
-              <a:rPr sz="724" b="0" i="1" lang="zh-CN" dirty="0">
-                <a:solidFill>
-                  <a:srgbClr val="000000"/>
-                </a:solidFill>
-                <a:latin typeface="Times New Roman"/>
-                <a:ea typeface="Times New Roman"/>
-                <a:cs typeface="Times New Roman"/>
-              </a:rPr>
-              <a:t>θ</a:t>
-            </a:r>
-          </a:p>
-        </p:txBody>
-      </p:sp>
-      <p:sp>
-        <p:nvSpPr>
-          <p:cNvPr id="200" name="comma_1" descr="Editable text; source id comma_1"/>
-          <p:cNvSpPr txBox="1"/>
-          <p:nvPr/>
-        </p:nvSpPr>
-        <p:spPr>
-          <a:xfrm>
-            <a:off x="7335148" y="4941250"/>
-            <a:ext cx="69054" cy="170335"/>
-          </a:xfrm>
-          <a:prstGeom prst="rect">
-            <a:avLst/>
-          </a:prstGeom>
-          <a:noFill/>
-          <a:effectLst/>
-        </p:spPr>
-        <p:txBody>
-          <a:bodyPr wrap="none" anchor="t" tIns="0" rIns="0" bIns="0" lIns="0" anchorCtr="0" vertOverflow="overflow">
-            <a:noAutofit/>
-          </a:bodyPr>
-          <a:lstStyle/>
-          <a:p>
-            <a:pPr algn="l" fontAlgn="base">
-              <a:lnSpc>
-                <a:spcPts val="1250"/>
-              </a:lnSpc>
-              <a:spcBef>
-                <a:spcPts val="0"/>
-              </a:spcBef>
-              <a:spcAft>
-                <a:spcPts val="0"/>
-              </a:spcAft>
-              <a:defRPr sz="1087" b="0" i="0" lang="zh-CN" dirty="0">
-                <a:solidFill>
-                  <a:srgbClr val="000000"/>
-                </a:solidFill>
-                <a:latin typeface="Times New Roman"/>
-                <a:ea typeface="Times New Roman"/>
-                <a:cs typeface="Times New Roman"/>
-              </a:defRPr>
-            </a:pPr>
-            <a:r>
-              <a:rPr sz="1087" b="0" i="0" lang="zh-CN" dirty="0">
-                <a:solidFill>
-                  <a:srgbClr val="000000"/>
-                </a:solidFill>
-                <a:latin typeface="Times New Roman"/>
-                <a:ea typeface="Times New Roman"/>
-                <a:cs typeface="Times New Roman"/>
-              </a:rPr>
-              <a:t>,</a:t>
-            </a:r>
-          </a:p>
-        </p:txBody>
-      </p:sp>
       <p:cxnSp>
         <p:nvCxnSpPr>
-          <p:cNvPr id="201" name="curve_in_1" descr="Editable line; source id curve_in_1"/>
+          <p:cNvPr id="185" name="curve_in_1" descr="Editable line; source id curve_in_1"/>
           <p:cNvCxnSpPr/>
           <p:nvPr/>
         </p:nvCxnSpPr>
@@ -14782,7 +13831,7 @@
       </p:cxnSp>
       <p:cxnSp>
         <p:nvCxnSpPr>
-          <p:cNvPr id="202" name="curve_join_1" descr="Editable line; source id curve_join_1"/>
+          <p:cNvPr id="186" name="curve_join_1" descr="Editable line; source id curve_join_1"/>
           <p:cNvCxnSpPr/>
           <p:nvPr/>
         </p:nvCxnSpPr>
@@ -14818,7 +13867,7 @@
       </p:cxnSp>
       <p:sp>
         <p:nvSpPr>
-          <p:cNvPr id="203" name="curve_out_1" descr="Editable line; source id curve_out_1"/>
+          <p:cNvPr id="187" name="curve_out_1" descr="Editable line; source id curve_out_1"/>
           <p:cNvSpPr/>
           <p:nvPr/>
         </p:nvSpPr>
@@ -14892,7 +13941,7 @@
       </p:sp>
       <p:sp>
         <p:nvSpPr>
-          <p:cNvPr id="204" name="noise_box_2" descr="Editable shape; source id noise_box_2"/>
+          <p:cNvPr id="188" name="noise_box_2" descr="Editable shape; source id noise_box_2"/>
           <p:cNvSpPr/>
           <p:nvPr/>
         </p:nvSpPr>
@@ -14936,401 +13985,9 @@
           </a:p>
         </p:txBody>
       </p:sp>
-      <p:sp>
-        <p:nvSpPr>
-          <p:cNvPr id="205" name="step_loc_2_epsilon" descr="Editable text; source id step_loc_2_epsilon"/>
-          <p:cNvSpPr txBox="1"/>
-          <p:nvPr/>
-        </p:nvSpPr>
-        <p:spPr>
-          <a:xfrm>
-            <a:off x="9491191" y="4933578"/>
-            <a:ext cx="99745" cy="191818"/>
-          </a:xfrm>
-          <a:prstGeom prst="rect">
-            <a:avLst/>
-          </a:prstGeom>
-          <a:noFill/>
-          <a:effectLst/>
-        </p:spPr>
-        <p:txBody>
-          <a:bodyPr wrap="none" anchor="t" tIns="0" rIns="0" bIns="0" lIns="0" anchorCtr="0" vertOverflow="overflow">
-            <a:noAutofit/>
-          </a:bodyPr>
-          <a:lstStyle/>
-          <a:p>
-            <a:pPr algn="l" fontAlgn="base">
-              <a:lnSpc>
-                <a:spcPts val="1389"/>
-              </a:lnSpc>
-              <a:spcBef>
-                <a:spcPts val="0"/>
-              </a:spcBef>
-              <a:spcAft>
-                <a:spcPts val="0"/>
-              </a:spcAft>
-              <a:defRPr sz="1208" b="0" i="1" lang="zh-CN" dirty="0">
-                <a:solidFill>
-                  <a:srgbClr val="000000"/>
-                </a:solidFill>
-                <a:latin typeface="Times New Roman"/>
-                <a:ea typeface="Times New Roman"/>
-                <a:cs typeface="Times New Roman"/>
-              </a:defRPr>
-            </a:pPr>
-            <a:r>
-              <a:rPr sz="1208" b="0" i="1" lang="zh-CN" dirty="0">
-                <a:solidFill>
-                  <a:srgbClr val="000000"/>
-                </a:solidFill>
-                <a:latin typeface="Times New Roman"/>
-                <a:ea typeface="Times New Roman"/>
-                <a:cs typeface="Times New Roman"/>
-              </a:rPr>
-              <a:t>ϵ</a:t>
-            </a:r>
-          </a:p>
-        </p:txBody>
-      </p:sp>
-      <p:sp>
-        <p:nvSpPr>
-          <p:cNvPr id="206" name="step_loc_2_sup" descr="Editable text; source id step_loc_2_sup"/>
-          <p:cNvSpPr txBox="1"/>
-          <p:nvPr/>
-        </p:nvSpPr>
-        <p:spPr>
-          <a:xfrm>
-            <a:off x="9567919" y="4902887"/>
-            <a:ext cx="191818" cy="130436"/>
-          </a:xfrm>
-          <a:prstGeom prst="rect">
-            <a:avLst/>
-          </a:prstGeom>
-          <a:noFill/>
-          <a:effectLst/>
-        </p:spPr>
-        <p:txBody>
-          <a:bodyPr wrap="none" anchor="t" tIns="0" rIns="0" bIns="0" lIns="0" anchorCtr="0" vertOverflow="overflow">
-            <a:noAutofit/>
-          </a:bodyPr>
-          <a:lstStyle/>
-          <a:p>
-            <a:pPr algn="l" fontAlgn="base">
-              <a:lnSpc>
-                <a:spcPts val="833"/>
-              </a:lnSpc>
-              <a:spcBef>
-                <a:spcPts val="0"/>
-              </a:spcBef>
-              <a:spcAft>
-                <a:spcPts val="0"/>
-              </a:spcAft>
-              <a:defRPr sz="724" b="0" i="1" lang="zh-CN" dirty="0">
-                <a:solidFill>
-                  <a:srgbClr val="000000"/>
-                </a:solidFill>
-                <a:latin typeface="Times New Roman"/>
-                <a:ea typeface="Times New Roman"/>
-                <a:cs typeface="Times New Roman"/>
-              </a:defRPr>
-            </a:pPr>
-            <a:r>
-              <a:rPr sz="724" b="0" i="1" lang="zh-CN" dirty="0">
-                <a:solidFill>
-                  <a:srgbClr val="000000"/>
-                </a:solidFill>
-                <a:latin typeface="Times New Roman"/>
-                <a:ea typeface="Times New Roman"/>
-                <a:cs typeface="Times New Roman"/>
-              </a:rPr>
-              <a:t>loc</a:t>
-            </a:r>
-          </a:p>
-        </p:txBody>
-      </p:sp>
-      <p:sp>
-        <p:nvSpPr>
-          <p:cNvPr id="207" name="step_loc_2_theta" descr="Editable text; source id step_loc_2_theta"/>
-          <p:cNvSpPr txBox="1"/>
-          <p:nvPr/>
-        </p:nvSpPr>
-        <p:spPr>
-          <a:xfrm>
-            <a:off x="9544900" y="5017978"/>
-            <a:ext cx="84400" cy="122763"/>
-          </a:xfrm>
-          <a:prstGeom prst="rect">
-            <a:avLst/>
-          </a:prstGeom>
-          <a:noFill/>
-          <a:effectLst/>
-        </p:spPr>
-        <p:txBody>
-          <a:bodyPr wrap="none" anchor="t" tIns="0" rIns="0" bIns="0" lIns="0" anchorCtr="0" vertOverflow="overflow">
-            <a:noAutofit/>
-          </a:bodyPr>
-          <a:lstStyle/>
-          <a:p>
-            <a:pPr algn="l" fontAlgn="base">
-              <a:lnSpc>
-                <a:spcPts val="833"/>
-              </a:lnSpc>
-              <a:spcBef>
-                <a:spcPts val="0"/>
-              </a:spcBef>
-              <a:spcAft>
-                <a:spcPts val="0"/>
-              </a:spcAft>
-              <a:defRPr sz="724" b="0" i="1" lang="zh-CN" dirty="0">
-                <a:solidFill>
-                  <a:srgbClr val="000000"/>
-                </a:solidFill>
-                <a:latin typeface="Times New Roman"/>
-                <a:ea typeface="Times New Roman"/>
-                <a:cs typeface="Times New Roman"/>
-              </a:defRPr>
-            </a:pPr>
-            <a:r>
-              <a:rPr sz="724" b="0" i="1" lang="zh-CN" dirty="0">
-                <a:solidFill>
-                  <a:srgbClr val="000000"/>
-                </a:solidFill>
-                <a:latin typeface="Times New Roman"/>
-                <a:ea typeface="Times New Roman"/>
-                <a:cs typeface="Times New Roman"/>
-              </a:rPr>
-              <a:t>θ</a:t>
-            </a:r>
-          </a:p>
-        </p:txBody>
-      </p:sp>
-      <p:sp>
-        <p:nvSpPr>
-          <p:cNvPr id="208" name="step_rot_2_epsilon" descr="Editable text; source id step_rot_2_epsilon"/>
-          <p:cNvSpPr txBox="1"/>
-          <p:nvPr/>
-        </p:nvSpPr>
-        <p:spPr>
-          <a:xfrm>
-            <a:off x="9729046" y="4933578"/>
-            <a:ext cx="99745" cy="191818"/>
-          </a:xfrm>
-          <a:prstGeom prst="rect">
-            <a:avLst/>
-          </a:prstGeom>
-          <a:noFill/>
-          <a:effectLst/>
-        </p:spPr>
-        <p:txBody>
-          <a:bodyPr wrap="none" anchor="t" tIns="0" rIns="0" bIns="0" lIns="0" anchorCtr="0" vertOverflow="overflow">
-            <a:noAutofit/>
-          </a:bodyPr>
-          <a:lstStyle/>
-          <a:p>
-            <a:pPr algn="l" fontAlgn="base">
-              <a:lnSpc>
-                <a:spcPts val="1389"/>
-              </a:lnSpc>
-              <a:spcBef>
-                <a:spcPts val="0"/>
-              </a:spcBef>
-              <a:spcAft>
-                <a:spcPts val="0"/>
-              </a:spcAft>
-              <a:defRPr sz="1208" b="0" i="1" lang="zh-CN" dirty="0">
-                <a:solidFill>
-                  <a:srgbClr val="000000"/>
-                </a:solidFill>
-                <a:latin typeface="Times New Roman"/>
-                <a:ea typeface="Times New Roman"/>
-                <a:cs typeface="Times New Roman"/>
-              </a:defRPr>
-            </a:pPr>
-            <a:r>
-              <a:rPr sz="1208" b="0" i="1" lang="zh-CN" dirty="0">
-                <a:solidFill>
-                  <a:srgbClr val="000000"/>
-                </a:solidFill>
-                <a:latin typeface="Times New Roman"/>
-                <a:ea typeface="Times New Roman"/>
-                <a:cs typeface="Times New Roman"/>
-              </a:rPr>
-              <a:t>ϵ</a:t>
-            </a:r>
-          </a:p>
-        </p:txBody>
-      </p:sp>
-      <p:sp>
-        <p:nvSpPr>
-          <p:cNvPr id="209" name="step_rot_2_sup" descr="Editable text; source id step_rot_2_sup"/>
-          <p:cNvSpPr txBox="1"/>
-          <p:nvPr/>
-        </p:nvSpPr>
-        <p:spPr>
-          <a:xfrm>
-            <a:off x="9805774" y="4902887"/>
-            <a:ext cx="191818" cy="130436"/>
-          </a:xfrm>
-          <a:prstGeom prst="rect">
-            <a:avLst/>
-          </a:prstGeom>
-          <a:noFill/>
-          <a:effectLst/>
-        </p:spPr>
-        <p:txBody>
-          <a:bodyPr wrap="none" anchor="t" tIns="0" rIns="0" bIns="0" lIns="0" anchorCtr="0" vertOverflow="overflow">
-            <a:noAutofit/>
-          </a:bodyPr>
-          <a:lstStyle/>
-          <a:p>
-            <a:pPr algn="l" fontAlgn="base">
-              <a:lnSpc>
-                <a:spcPts val="833"/>
-              </a:lnSpc>
-              <a:spcBef>
-                <a:spcPts val="0"/>
-              </a:spcBef>
-              <a:spcAft>
-                <a:spcPts val="0"/>
-              </a:spcAft>
-              <a:defRPr sz="724" b="0" i="1" lang="zh-CN" dirty="0">
-                <a:solidFill>
-                  <a:srgbClr val="000000"/>
-                </a:solidFill>
-                <a:latin typeface="Times New Roman"/>
-                <a:ea typeface="Times New Roman"/>
-                <a:cs typeface="Times New Roman"/>
-              </a:defRPr>
-            </a:pPr>
-            <a:r>
-              <a:rPr sz="724" b="0" i="1" lang="zh-CN" dirty="0">
-                <a:solidFill>
-                  <a:srgbClr val="000000"/>
-                </a:solidFill>
-                <a:latin typeface="Times New Roman"/>
-                <a:ea typeface="Times New Roman"/>
-                <a:cs typeface="Times New Roman"/>
-              </a:rPr>
-              <a:t>rot</a:t>
-            </a:r>
-          </a:p>
-        </p:txBody>
-      </p:sp>
-      <p:sp>
-        <p:nvSpPr>
-          <p:cNvPr id="210" name="step_rot_2_theta" descr="Editable text; source id step_rot_2_theta"/>
-          <p:cNvSpPr txBox="1"/>
-          <p:nvPr/>
-        </p:nvSpPr>
-        <p:spPr>
-          <a:xfrm>
-            <a:off x="9782756" y="5017978"/>
-            <a:ext cx="84400" cy="122763"/>
-          </a:xfrm>
-          <a:prstGeom prst="rect">
-            <a:avLst/>
-          </a:prstGeom>
-          <a:noFill/>
-          <a:effectLst/>
-        </p:spPr>
-        <p:txBody>
-          <a:bodyPr wrap="none" anchor="t" tIns="0" rIns="0" bIns="0" lIns="0" anchorCtr="0" vertOverflow="overflow">
-            <a:noAutofit/>
-          </a:bodyPr>
-          <a:lstStyle/>
-          <a:p>
-            <a:pPr algn="l" fontAlgn="base">
-              <a:lnSpc>
-                <a:spcPts val="833"/>
-              </a:lnSpc>
-              <a:spcBef>
-                <a:spcPts val="0"/>
-              </a:spcBef>
-              <a:spcAft>
-                <a:spcPts val="0"/>
-              </a:spcAft>
-              <a:defRPr sz="724" b="0" i="1" lang="zh-CN" dirty="0">
-                <a:solidFill>
-                  <a:srgbClr val="000000"/>
-                </a:solidFill>
-                <a:latin typeface="Times New Roman"/>
-                <a:ea typeface="Times New Roman"/>
-                <a:cs typeface="Times New Roman"/>
-              </a:defRPr>
-            </a:pPr>
-            <a:r>
-              <a:rPr sz="724" b="0" i="1" lang="zh-CN" dirty="0">
-                <a:solidFill>
-                  <a:srgbClr val="000000"/>
-                </a:solidFill>
-                <a:latin typeface="Times New Roman"/>
-                <a:ea typeface="Times New Roman"/>
-                <a:cs typeface="Times New Roman"/>
-              </a:rPr>
-              <a:t>θ</a:t>
-            </a:r>
-          </a:p>
-        </p:txBody>
-      </p:sp>
-      <p:sp>
-        <p:nvSpPr>
-          <p:cNvPr id="211" name="comma_2" descr="Editable text; source id comma_2"/>
-          <p:cNvSpPr txBox="1"/>
-          <p:nvPr/>
-        </p:nvSpPr>
-        <p:spPr>
-          <a:xfrm>
-            <a:off x="9675337" y="4941250"/>
-            <a:ext cx="69054" cy="170335"/>
-          </a:xfrm>
-          <a:prstGeom prst="rect">
-            <a:avLst/>
-          </a:prstGeom>
-          <a:noFill/>
-          <a:effectLst/>
-        </p:spPr>
-        <p:txBody>
-          <a:bodyPr wrap="none" anchor="t" tIns="0" rIns="0" bIns="0" lIns="0" anchorCtr="0" vertOverflow="overflow">
-            <a:noAutofit/>
-          </a:bodyPr>
-          <a:lstStyle/>
-          <a:p>
-            <a:pPr algn="l" fontAlgn="base">
-              <a:lnSpc>
-                <a:spcPts val="1250"/>
-              </a:lnSpc>
-              <a:spcBef>
-                <a:spcPts val="0"/>
-              </a:spcBef>
-              <a:spcAft>
-                <a:spcPts val="0"/>
-              </a:spcAft>
-              <a:defRPr sz="1087" b="0" i="0" lang="zh-CN" dirty="0">
-                <a:solidFill>
-                  <a:srgbClr val="000000"/>
-                </a:solidFill>
-                <a:latin typeface="Times New Roman"/>
-                <a:ea typeface="Times New Roman"/>
-                <a:cs typeface="Times New Roman"/>
-              </a:defRPr>
-            </a:pPr>
-            <a:r>
-              <a:rPr sz="1087" b="0" i="0" lang="zh-CN" dirty="0">
-                <a:solidFill>
-                  <a:srgbClr val="000000"/>
-                </a:solidFill>
-                <a:latin typeface="Times New Roman"/>
-                <a:ea typeface="Times New Roman"/>
-                <a:cs typeface="Times New Roman"/>
-              </a:rPr>
-              <a:t>,</a:t>
-            </a:r>
-          </a:p>
-        </p:txBody>
-      </p:sp>
       <p:cxnSp>
         <p:nvCxnSpPr>
-          <p:cNvPr id="212" name="curve_in_2" descr="Editable line; source id curve_in_2"/>
+          <p:cNvPr id="189" name="curve_in_2" descr="Editable line; source id curve_in_2"/>
           <p:cNvCxnSpPr/>
           <p:nvPr/>
         </p:nvCxnSpPr>
@@ -15366,7 +14023,7 @@
       </p:cxnSp>
       <p:cxnSp>
         <p:nvCxnSpPr>
-          <p:cNvPr id="213" name="curve_join_2" descr="Editable line; source id curve_join_2"/>
+          <p:cNvPr id="190" name="curve_join_2" descr="Editable line; source id curve_join_2"/>
           <p:cNvCxnSpPr/>
           <p:nvPr/>
         </p:nvCxnSpPr>
@@ -15402,7 +14059,7 @@
       </p:cxnSp>
       <p:sp>
         <p:nvSpPr>
-          <p:cNvPr id="214" name="curve_out_2" descr="Editable line; source id curve_out_2"/>
+          <p:cNvPr id="191" name="curve_out_2" descr="Editable line; source id curve_out_2"/>
           <p:cNvSpPr/>
           <p:nvPr/>
         </p:nvSpPr>
@@ -15476,7 +14133,7 @@
       </p:sp>
       <p:sp>
         <p:nvSpPr>
-          <p:cNvPr id="215" name="denoising_progress" descr="Editable line; source id denoising_progress"/>
+          <p:cNvPr id="192" name="denoising_progress" descr="Editable line; source id denoising_progress"/>
           <p:cNvSpPr/>
           <p:nvPr/>
         </p:nvSpPr>
@@ -15550,7 +14207,7 @@
       </p:sp>
       <p:sp>
         <p:nvSpPr>
-          <p:cNvPr id="216" name="panel_b" descr="Editable text; source id panel_b"/>
+          <p:cNvPr id="193" name="panel_b" descr="Editable text; source id panel_b"/>
           <p:cNvSpPr txBox="1"/>
           <p:nvPr/>
         </p:nvSpPr>
@@ -15606,7 +14263,7 @@
       </p:sp>
       <p:cxnSp>
         <p:nvCxnSpPr>
-          <p:cNvPr id="217" name="rule_b" descr="Editable line; source id rule_b"/>
+          <p:cNvPr id="194" name="rule_b" descr="Editable line; source id rule_b"/>
           <p:cNvCxnSpPr/>
           <p:nvPr/>
         </p:nvCxnSpPr>
@@ -15642,7 +14299,7 @@
       </p:cxnSp>
       <p:pic>
         <p:nvPicPr>
-          <p:cNvPr id="218" name="blocks1" descr="Exact text-free crop from Figure 1, Ke et al. CoRL 2024 / PMLR 2025, source pixels [15, 785, 250, 177]. Photographic/pointcloud artwork retains internally fused trajectory and camera ray marks."/>
+          <p:cNvPr id="195" name="blocks1" descr="Exact text-free crop from Figure 1, Ke et al. CoRL 2024 / PMLR 2025, source pixels [15, 785, 250, 177]. Photographic/pointcloud artwork retains internally fused trajectory and camera ray marks."/>
           <p:cNvPicPr>
             <a:picLocks noChangeAspect="1"/>
           </p:cNvPicPr>
@@ -15667,7 +14324,7 @@
       </p:pic>
       <p:pic>
         <p:nvPicPr>
-          <p:cNvPr id="219" name="blocks2" descr="Exact text-free crop from Figure 1, Ke et al. CoRL 2024 / PMLR 2025, source pixels [270, 785, 250, 177]. Photographic/pointcloud artwork retains internally fused trajectory and camera ray marks."/>
+          <p:cNvPr id="196" name="blocks2" descr="Exact text-free crop from Figure 1, Ke et al. CoRL 2024 / PMLR 2025, source pixels [270, 785, 250, 177]. Photographic/pointcloud artwork retains internally fused trajectory and camera ray marks."/>
           <p:cNvPicPr>
             <a:picLocks noChangeAspect="1"/>
           </p:cNvPicPr>
@@ -15692,7 +14349,7 @@
       </p:pic>
       <p:pic>
         <p:nvPicPr>
-          <p:cNvPr id="220" name="blocks3" descr="Exact text-free crop from Figure 1, Ke et al. CoRL 2024 / PMLR 2025, source pixels [526, 785, 250, 177]. Photographic/pointcloud artwork retains internally fused trajectory and camera ray marks."/>
+          <p:cNvPr id="197" name="blocks3" descr="Exact text-free crop from Figure 1, Ke et al. CoRL 2024 / PMLR 2025, source pixels [526, 785, 250, 177]. Photographic/pointcloud artwork retains internally fused trajectory and camera ray marks."/>
           <p:cNvPicPr>
             <a:picLocks noChangeAspect="1"/>
           </p:cNvPicPr>
@@ -15717,7 +14374,7 @@
       </p:pic>
       <p:pic>
         <p:nvPicPr>
-          <p:cNvPr id="221" name="cups1" descr="Exact text-free crop from Figure 1, Ke et al. CoRL 2024 / PMLR 2025, source pixels [807, 785, 250, 177]. Photographic/pointcloud artwork retains internally fused trajectory and camera ray marks."/>
+          <p:cNvPr id="198" name="cups1" descr="Exact text-free crop from Figure 1, Ke et al. CoRL 2024 / PMLR 2025, source pixels [807, 785, 250, 177]. Photographic/pointcloud artwork retains internally fused trajectory and camera ray marks."/>
           <p:cNvPicPr>
             <a:picLocks noChangeAspect="1"/>
           </p:cNvPicPr>
@@ -15742,7 +14399,7 @@
       </p:pic>
       <p:pic>
         <p:nvPicPr>
-          <p:cNvPr id="222" name="cups2" descr="Exact text-free crop from Figure 1, Ke et al. CoRL 2024 / PMLR 2025, source pixels [1064, 785, 250, 177]. Photographic/pointcloud artwork retains internally fused trajectory and camera ray marks."/>
+          <p:cNvPr id="199" name="cups2" descr="Exact text-free crop from Figure 1, Ke et al. CoRL 2024 / PMLR 2025, source pixels [1064, 785, 250, 177]. Photographic/pointcloud artwork retains internally fused trajectory and camera ray marks."/>
           <p:cNvPicPr>
             <a:picLocks noChangeAspect="1"/>
           </p:cNvPicPr>
@@ -15767,7 +14424,7 @@
       </p:pic>
       <p:pic>
         <p:nvPicPr>
-          <p:cNvPr id="223" name="cups3" descr="Exact text-free crop from Figure 1, Ke et al. CoRL 2024 / PMLR 2025, source pixels [1319, 785, 250, 177]. Photographic/pointcloud artwork retains internally fused trajectory and camera ray marks."/>
+          <p:cNvPr id="200" name="cups3" descr="Exact text-free crop from Figure 1, Ke et al. CoRL 2024 / PMLR 2025, source pixels [1319, 785, 250, 177]. Photographic/pointcloud artwork retains internally fused trajectory and camera ray marks."/>
           <p:cNvPicPr>
             <a:picLocks noChangeAspect="1"/>
           </p:cNvPicPr>
@@ -15792,7 +14449,7 @@
       </p:pic>
       <p:pic>
         <p:nvPicPr>
-          <p:cNvPr id="224" name="blocks_inset" descr="Exact text-free crop from Figure 1, Ke et al. CoRL 2024 / PMLR 2025, source pixels [7, 904, 91, 64]. Photographic/pointcloud artwork retains internally fused trajectory and camera ray marks."/>
+          <p:cNvPr id="201" name="blocks_inset" descr="Exact text-free crop from Figure 1, Ke et al. CoRL 2024 / PMLR 2025, source pixels [7, 904, 91, 64]. Photographic/pointcloud artwork retains internally fused trajectory and camera ray marks."/>
           <p:cNvPicPr>
             <a:picLocks noChangeAspect="1"/>
           </p:cNvPicPr>
@@ -15817,7 +14474,7 @@
       </p:pic>
       <p:pic>
         <p:nvPicPr>
-          <p:cNvPr id="225" name="cups_inset" descr="Exact text-free crop from Figure 1, Ke et al. CoRL 2024 / PMLR 2025, source pixels [799, 904, 91, 64]. Photographic/pointcloud artwork retains internally fused trajectory and camera ray marks."/>
+          <p:cNvPr id="202" name="cups_inset" descr="Exact text-free crop from Figure 1, Ke et al. CoRL 2024 / PMLR 2025, source pixels [799, 904, 91, 64]. Photographic/pointcloud artwork retains internally fused trajectory and camera ray marks."/>
           <p:cNvPicPr>
             <a:picLocks noChangeAspect="1"/>
           </p:cNvPicPr>
@@ -15842,7 +14499,7 @@
       </p:pic>
       <p:sp>
         <p:nvSpPr>
-          <p:cNvPr id="226" name="blocks_prompt" descr="Editable text; source id blocks_prompt"/>
+          <p:cNvPr id="203" name="blocks_prompt" descr="Editable text; source id blocks_prompt"/>
           <p:cNvSpPr txBox="1"/>
           <p:nvPr/>
         </p:nvSpPr>
@@ -15898,7 +14555,7 @@
       </p:sp>
       <p:sp>
         <p:nvSpPr>
-          <p:cNvPr id="227" name="cups_prompt" descr="Editable text; source id cups_prompt"/>
+          <p:cNvPr id="204" name="cups_prompt" descr="Editable text; source id cups_prompt"/>
           <p:cNvSpPr txBox="1"/>
           <p:nvPr/>
         </p:nvSpPr>
@@ -15954,7 +14611,7 @@
       </p:sp>
       <p:sp>
         <p:nvSpPr>
-          <p:cNvPr id="228" name="panel_c" descr="Editable text; source id panel_c"/>
+          <p:cNvPr id="205" name="panel_c" descr="Editable text; source id panel_c"/>
           <p:cNvSpPr txBox="1"/>
           <p:nvPr/>
         </p:nvSpPr>
@@ -16010,7 +14667,567 @@
       </p:sp>
       <p:sp>
         <p:nvSpPr>
-          <p:cNvPr id="229" name="vertical_dot_0" descr="Editable shape; source id vertical_dot_0"/>
+          <p:cNvPr id="206" name="math_output_loc_0" descr="Editable text; source id math_output_loc_0"/>
+          <p:cNvSpPr txBox="1"/>
+          <p:nvPr/>
+        </p:nvSpPr>
+        <p:spPr>
+          <a:xfrm>
+            <a:off x="11071778" y="845920"/>
+            <a:ext cx="67136" cy="170335"/>
+          </a:xfrm>
+          <a:prstGeom prst="rect">
+            <a:avLst/>
+          </a:prstGeom>
+          <a:noFill/>
+          <a:effectLst/>
+        </p:spPr>
+        <p:txBody>
+          <a:bodyPr wrap="none" anchor="t" tIns="3836" rIns="0" bIns="0" lIns="3836" anchorCtr="0" vertOverflow="overflow">
+            <a:noAutofit/>
+          </a:bodyPr>
+          <a:lstStyle/>
+          <a:p>
+            <a:pPr algn="l" fontAlgn="base">
+              <a:lnSpc>
+                <a:spcPts val="1250"/>
+              </a:lnSpc>
+              <a:spcBef>
+                <a:spcPts val="0"/>
+              </a:spcBef>
+              <a:spcAft>
+                <a:spcPts val="0"/>
+              </a:spcAft>
+              <a:defRPr sz="1087" b="0" i="0" lang="zh-CN" dirty="0">
+                <a:solidFill>
+                  <a:srgbClr val="000000"/>
+                </a:solidFill>
+                <a:latin typeface="Times New Roman"/>
+                <a:ea typeface="Times New Roman"/>
+                <a:cs typeface="Times New Roman"/>
+              </a:defRPr>
+            </a:pPr>
+            <a:r>
+              <a:rPr sz="1087" b="0" i="0" lang="zh-CN" dirty="0">
+                <a:solidFill>
+                  <a:srgbClr val="000000"/>
+                </a:solidFill>
+                <a:latin typeface="Times New Roman"/>
+                <a:ea typeface="Times New Roman"/>
+                <a:cs typeface="Times New Roman"/>
+              </a:rPr>
+              <a:t>ϵ</a:t>
+            </a:r>
+          </a:p>
+        </p:txBody>
+      </p:sp>
+      <p:sp>
+        <p:nvSpPr>
+          <p:cNvPr id="207" name="math_output_loc_1" descr="Editable text; source id math_output_loc_1"/>
+          <p:cNvSpPr txBox="1"/>
+          <p:nvPr/>
+        </p:nvSpPr>
+        <p:spPr>
+          <a:xfrm>
+            <a:off x="11140832" y="817147"/>
+            <a:ext cx="147700" cy="138569"/>
+          </a:xfrm>
+          <a:prstGeom prst="rect">
+            <a:avLst/>
+          </a:prstGeom>
+          <a:noFill/>
+          <a:effectLst/>
+        </p:spPr>
+        <p:txBody>
+          <a:bodyPr wrap="none" anchor="t" tIns="3836" rIns="0" bIns="0" lIns="3836" anchorCtr="0" vertOverflow="overflow">
+            <a:noAutofit/>
+          </a:bodyPr>
+          <a:lstStyle/>
+          <a:p>
+            <a:pPr algn="l" fontAlgn="base">
+              <a:lnSpc>
+                <a:spcPts val="1000"/>
+              </a:lnSpc>
+              <a:spcBef>
+                <a:spcPts val="0"/>
+              </a:spcBef>
+              <a:spcAft>
+                <a:spcPts val="0"/>
+              </a:spcAft>
+              <a:defRPr sz="869" b="0" i="1" lang="zh-CN" dirty="0">
+                <a:solidFill>
+                  <a:srgbClr val="000000"/>
+                </a:solidFill>
+                <a:latin typeface="Times New Roman"/>
+                <a:ea typeface="Times New Roman"/>
+                <a:cs typeface="Times New Roman"/>
+              </a:defRPr>
+            </a:pPr>
+            <a:r>
+              <a:rPr sz="869" b="0" i="1" lang="zh-CN" dirty="0">
+                <a:solidFill>
+                  <a:srgbClr val="000000"/>
+                </a:solidFill>
+                <a:latin typeface="Times New Roman"/>
+                <a:ea typeface="Times New Roman"/>
+                <a:cs typeface="Times New Roman"/>
+              </a:rPr>
+              <a:t>loc</a:t>
+            </a:r>
+          </a:p>
+        </p:txBody>
+      </p:sp>
+      <p:sp>
+        <p:nvSpPr>
+          <p:cNvPr id="208" name="math_output_loc_2" descr="Editable text; source id math_output_loc_2"/>
+          <p:cNvSpPr txBox="1"/>
+          <p:nvPr/>
+        </p:nvSpPr>
+        <p:spPr>
+          <a:xfrm>
+            <a:off x="11133160" y="918811"/>
+            <a:ext cx="65218" cy="126216"/>
+          </a:xfrm>
+          <a:prstGeom prst="rect">
+            <a:avLst/>
+          </a:prstGeom>
+          <a:noFill/>
+          <a:effectLst/>
+        </p:spPr>
+        <p:txBody>
+          <a:bodyPr wrap="none" anchor="t" tIns="3836" rIns="0" bIns="0" lIns="3836" anchorCtr="0" vertOverflow="overflow">
+            <a:noAutofit/>
+          </a:bodyPr>
+          <a:lstStyle/>
+          <a:p>
+            <a:pPr algn="l" fontAlgn="base">
+              <a:lnSpc>
+                <a:spcPts val="903"/>
+              </a:lnSpc>
+              <a:spcBef>
+                <a:spcPts val="0"/>
+              </a:spcBef>
+              <a:spcAft>
+                <a:spcPts val="0"/>
+              </a:spcAft>
+              <a:defRPr sz="785" b="1" i="1" lang="zh-CN" dirty="0">
+                <a:solidFill>
+                  <a:srgbClr val="000000"/>
+                </a:solidFill>
+                <a:latin typeface="Times New Roman"/>
+                <a:ea typeface="Times New Roman"/>
+                <a:cs typeface="Times New Roman"/>
+              </a:defRPr>
+            </a:pPr>
+            <a:r>
+              <a:rPr sz="785" b="1" i="1" lang="zh-CN" dirty="0">
+                <a:solidFill>
+                  <a:srgbClr val="000000"/>
+                </a:solidFill>
+                <a:latin typeface="Times New Roman"/>
+                <a:ea typeface="Times New Roman"/>
+                <a:cs typeface="Times New Roman"/>
+              </a:rPr>
+              <a:t>θ</a:t>
+            </a:r>
+          </a:p>
+        </p:txBody>
+      </p:sp>
+      <p:sp>
+        <p:nvSpPr>
+          <p:cNvPr id="209" name="math_output_loc_3" descr="Editable text; source id math_output_loc_3"/>
+          <p:cNvSpPr txBox="1"/>
+          <p:nvPr/>
+        </p:nvSpPr>
+        <p:spPr>
+          <a:xfrm>
+            <a:off x="11294287" y="845920"/>
+            <a:ext cx="57545" cy="170335"/>
+          </a:xfrm>
+          <a:prstGeom prst="rect">
+            <a:avLst/>
+          </a:prstGeom>
+          <a:noFill/>
+          <a:effectLst/>
+        </p:spPr>
+        <p:txBody>
+          <a:bodyPr wrap="none" anchor="t" tIns="3836" rIns="0" bIns="0" lIns="3836" anchorCtr="0" vertOverflow="overflow">
+            <a:noAutofit/>
+          </a:bodyPr>
+          <a:lstStyle/>
+          <a:p>
+            <a:pPr algn="l" fontAlgn="base">
+              <a:lnSpc>
+                <a:spcPts val="1250"/>
+              </a:lnSpc>
+              <a:spcBef>
+                <a:spcPts val="0"/>
+              </a:spcBef>
+              <a:spcAft>
+                <a:spcPts val="0"/>
+              </a:spcAft>
+              <a:defRPr sz="1087" b="0" i="0" lang="zh-CN" dirty="0">
+                <a:solidFill>
+                  <a:srgbClr val="000000"/>
+                </a:solidFill>
+                <a:latin typeface="Times New Roman"/>
+                <a:ea typeface="Times New Roman"/>
+                <a:cs typeface="Times New Roman"/>
+              </a:defRPr>
+            </a:pPr>
+            <a:r>
+              <a:rPr sz="1087" b="0" i="0" lang="zh-CN" dirty="0">
+                <a:solidFill>
+                  <a:srgbClr val="000000"/>
+                </a:solidFill>
+                <a:latin typeface="Times New Roman"/>
+                <a:ea typeface="Times New Roman"/>
+                <a:cs typeface="Times New Roman"/>
+              </a:rPr>
+              <a:t>(</a:t>
+            </a:r>
+          </a:p>
+        </p:txBody>
+      </p:sp>
+      <p:sp>
+        <p:nvSpPr>
+          <p:cNvPr id="210" name="math_output_loc_4" descr="Editable text; source id math_output_loc_4"/>
+          <p:cNvSpPr txBox="1"/>
+          <p:nvPr/>
+        </p:nvSpPr>
+        <p:spPr>
+          <a:xfrm>
+            <a:off x="11349915" y="840166"/>
+            <a:ext cx="84400" cy="179158"/>
+          </a:xfrm>
+          <a:prstGeom prst="rect">
+            <a:avLst/>
+          </a:prstGeom>
+          <a:noFill/>
+          <a:effectLst/>
+        </p:spPr>
+        <p:txBody>
+          <a:bodyPr wrap="none" anchor="t" tIns="3836" rIns="0" bIns="0" lIns="3836" anchorCtr="0" vertOverflow="overflow">
+            <a:noAutofit/>
+          </a:bodyPr>
+          <a:lstStyle/>
+          <a:p>
+            <a:pPr algn="l" fontAlgn="base">
+              <a:lnSpc>
+                <a:spcPts val="1320"/>
+              </a:lnSpc>
+              <a:spcBef>
+                <a:spcPts val="0"/>
+              </a:spcBef>
+              <a:spcAft>
+                <a:spcPts val="0"/>
+              </a:spcAft>
+              <a:defRPr sz="1147" b="1" i="1" lang="zh-CN" dirty="0">
+                <a:solidFill>
+                  <a:srgbClr val="000000"/>
+                </a:solidFill>
+                <a:latin typeface="Times New Roman"/>
+                <a:ea typeface="Times New Roman"/>
+                <a:cs typeface="Times New Roman"/>
+              </a:defRPr>
+            </a:pPr>
+            <a:r>
+              <a:rPr sz="1147" b="1" i="1" lang="zh-CN" dirty="0">
+                <a:solidFill>
+                  <a:srgbClr val="000000"/>
+                </a:solidFill>
+                <a:latin typeface="Times New Roman"/>
+                <a:ea typeface="Times New Roman"/>
+                <a:cs typeface="Times New Roman"/>
+              </a:rPr>
+              <a:t>o</a:t>
+            </a:r>
+          </a:p>
+        </p:txBody>
+      </p:sp>
+      <p:sp>
+        <p:nvSpPr>
+          <p:cNvPr id="211" name="math_output_loc_5" descr="Editable text; source id math_output_loc_5"/>
+          <p:cNvSpPr txBox="1"/>
+          <p:nvPr/>
+        </p:nvSpPr>
+        <p:spPr>
+          <a:xfrm>
+            <a:off x="11424724" y="845920"/>
+            <a:ext cx="46036" cy="170335"/>
+          </a:xfrm>
+          <a:prstGeom prst="rect">
+            <a:avLst/>
+          </a:prstGeom>
+          <a:noFill/>
+          <a:effectLst/>
+        </p:spPr>
+        <p:txBody>
+          <a:bodyPr wrap="none" anchor="t" tIns="3836" rIns="0" bIns="0" lIns="3836" anchorCtr="0" vertOverflow="overflow">
+            <a:noAutofit/>
+          </a:bodyPr>
+          <a:lstStyle/>
+          <a:p>
+            <a:pPr algn="l" fontAlgn="base">
+              <a:lnSpc>
+                <a:spcPts val="1250"/>
+              </a:lnSpc>
+              <a:spcBef>
+                <a:spcPts val="0"/>
+              </a:spcBef>
+              <a:spcAft>
+                <a:spcPts val="0"/>
+              </a:spcAft>
+              <a:defRPr sz="1087" b="0" i="0" lang="zh-CN" dirty="0">
+                <a:solidFill>
+                  <a:srgbClr val="000000"/>
+                </a:solidFill>
+                <a:latin typeface="Times New Roman"/>
+                <a:ea typeface="Times New Roman"/>
+                <a:cs typeface="Times New Roman"/>
+              </a:defRPr>
+            </a:pPr>
+            <a:r>
+              <a:rPr sz="1087" b="0" i="0" lang="zh-CN" dirty="0">
+                <a:solidFill>
+                  <a:srgbClr val="000000"/>
+                </a:solidFill>
+                <a:latin typeface="Times New Roman"/>
+                <a:ea typeface="Times New Roman"/>
+                <a:cs typeface="Times New Roman"/>
+              </a:rPr>
+              <a:t>,</a:t>
+            </a:r>
+          </a:p>
+        </p:txBody>
+      </p:sp>
+      <p:sp>
+        <p:nvSpPr>
+          <p:cNvPr id="212" name="math_output_loc_6" descr="Editable text; source id math_output_loc_6"/>
+          <p:cNvSpPr txBox="1"/>
+          <p:nvPr/>
+        </p:nvSpPr>
+        <p:spPr>
+          <a:xfrm>
+            <a:off x="11478433" y="845920"/>
+            <a:ext cx="53709" cy="170335"/>
+          </a:xfrm>
+          <a:prstGeom prst="rect">
+            <a:avLst/>
+          </a:prstGeom>
+          <a:noFill/>
+          <a:effectLst/>
+        </p:spPr>
+        <p:txBody>
+          <a:bodyPr wrap="none" anchor="t" tIns="3836" rIns="0" bIns="0" lIns="3836" anchorCtr="0" vertOverflow="overflow">
+            <a:noAutofit/>
+          </a:bodyPr>
+          <a:lstStyle/>
+          <a:p>
+            <a:pPr algn="l" fontAlgn="base">
+              <a:lnSpc>
+                <a:spcPts val="1250"/>
+              </a:lnSpc>
+              <a:spcBef>
+                <a:spcPts val="0"/>
+              </a:spcBef>
+              <a:spcAft>
+                <a:spcPts val="0"/>
+              </a:spcAft>
+              <a:defRPr sz="1087" b="0" i="1" lang="zh-CN" dirty="0">
+                <a:solidFill>
+                  <a:srgbClr val="000000"/>
+                </a:solidFill>
+                <a:latin typeface="Times New Roman"/>
+                <a:ea typeface="Times New Roman"/>
+                <a:cs typeface="Times New Roman"/>
+              </a:defRPr>
+            </a:pPr>
+            <a:r>
+              <a:rPr sz="1087" b="0" i="1" lang="zh-CN" dirty="0">
+                <a:solidFill>
+                  <a:srgbClr val="000000"/>
+                </a:solidFill>
+                <a:latin typeface="Times New Roman"/>
+                <a:ea typeface="Times New Roman"/>
+                <a:cs typeface="Times New Roman"/>
+              </a:rPr>
+              <a:t>l</a:t>
+            </a:r>
+          </a:p>
+        </p:txBody>
+      </p:sp>
+      <p:sp>
+        <p:nvSpPr>
+          <p:cNvPr id="213" name="math_output_loc_7" descr="Editable text; source id math_output_loc_7"/>
+          <p:cNvSpPr txBox="1"/>
+          <p:nvPr/>
+        </p:nvSpPr>
+        <p:spPr>
+          <a:xfrm>
+            <a:off x="11516797" y="845920"/>
+            <a:ext cx="46036" cy="170335"/>
+          </a:xfrm>
+          <a:prstGeom prst="rect">
+            <a:avLst/>
+          </a:prstGeom>
+          <a:noFill/>
+          <a:effectLst/>
+        </p:spPr>
+        <p:txBody>
+          <a:bodyPr wrap="none" anchor="t" tIns="3836" rIns="0" bIns="0" lIns="3836" anchorCtr="0" vertOverflow="overflow">
+            <a:noAutofit/>
+          </a:bodyPr>
+          <a:lstStyle/>
+          <a:p>
+            <a:pPr algn="l" fontAlgn="base">
+              <a:lnSpc>
+                <a:spcPts val="1250"/>
+              </a:lnSpc>
+              <a:spcBef>
+                <a:spcPts val="0"/>
+              </a:spcBef>
+              <a:spcAft>
+                <a:spcPts val="0"/>
+              </a:spcAft>
+              <a:defRPr sz="1087" b="0" i="0" lang="zh-CN" dirty="0">
+                <a:solidFill>
+                  <a:srgbClr val="000000"/>
+                </a:solidFill>
+                <a:latin typeface="Times New Roman"/>
+                <a:ea typeface="Times New Roman"/>
+                <a:cs typeface="Times New Roman"/>
+              </a:defRPr>
+            </a:pPr>
+            <a:r>
+              <a:rPr sz="1087" b="0" i="0" lang="zh-CN" dirty="0">
+                <a:solidFill>
+                  <a:srgbClr val="000000"/>
+                </a:solidFill>
+                <a:latin typeface="Times New Roman"/>
+                <a:ea typeface="Times New Roman"/>
+                <a:cs typeface="Times New Roman"/>
+              </a:rPr>
+              <a:t>,</a:t>
+            </a:r>
+          </a:p>
+        </p:txBody>
+      </p:sp>
+      <p:sp>
+        <p:nvSpPr>
+          <p:cNvPr id="214" name="math_output_loc_8" descr="Editable text; source id math_output_loc_8"/>
+          <p:cNvSpPr txBox="1"/>
+          <p:nvPr/>
+        </p:nvSpPr>
+        <p:spPr>
+          <a:xfrm>
+            <a:off x="11570506" y="845920"/>
+            <a:ext cx="72891" cy="170335"/>
+          </a:xfrm>
+          <a:prstGeom prst="rect">
+            <a:avLst/>
+          </a:prstGeom>
+          <a:noFill/>
+          <a:effectLst/>
+        </p:spPr>
+        <p:txBody>
+          <a:bodyPr wrap="none" anchor="t" tIns="3836" rIns="0" bIns="0" lIns="3836" anchorCtr="0" vertOverflow="overflow">
+            <a:noAutofit/>
+          </a:bodyPr>
+          <a:lstStyle/>
+          <a:p>
+            <a:pPr algn="l" fontAlgn="base">
+              <a:lnSpc>
+                <a:spcPts val="1250"/>
+              </a:lnSpc>
+              <a:spcBef>
+                <a:spcPts val="0"/>
+              </a:spcBef>
+              <a:spcAft>
+                <a:spcPts val="0"/>
+              </a:spcAft>
+              <a:defRPr sz="1087" b="0" i="1" lang="zh-CN" dirty="0">
+                <a:solidFill>
+                  <a:srgbClr val="000000"/>
+                </a:solidFill>
+                <a:latin typeface="Times New Roman"/>
+                <a:ea typeface="Times New Roman"/>
+                <a:cs typeface="Times New Roman"/>
+              </a:defRPr>
+            </a:pPr>
+            <a:r>
+              <a:rPr sz="1087" b="0" i="1" lang="zh-CN" dirty="0">
+                <a:solidFill>
+                  <a:srgbClr val="000000"/>
+                </a:solidFill>
+                <a:latin typeface="Times New Roman"/>
+                <a:ea typeface="Times New Roman"/>
+                <a:cs typeface="Times New Roman"/>
+              </a:rPr>
+              <a:t>c</a:t>
+            </a:r>
+          </a:p>
+        </p:txBody>
+      </p:sp>
+      <p:sp>
+        <p:nvSpPr>
+          <p:cNvPr id="215" name="math_output_loc_9" descr="Editable text; source id math_output_loc_9"/>
+          <p:cNvSpPr txBox="1"/>
+          <p:nvPr/>
+        </p:nvSpPr>
+        <p:spPr>
+          <a:xfrm>
+            <a:off x="11631888" y="845920"/>
+            <a:ext cx="46036" cy="170335"/>
+          </a:xfrm>
+          <a:prstGeom prst="rect">
+            <a:avLst/>
+          </a:prstGeom>
+          <a:noFill/>
+          <a:effectLst/>
+        </p:spPr>
+        <p:txBody>
+          <a:bodyPr wrap="none" anchor="t" tIns="3836" rIns="0" bIns="0" lIns="3836" anchorCtr="0" vertOverflow="overflow">
+            <a:noAutofit/>
+          </a:bodyPr>
+          <a:lstStyle/>
+          <a:p>
+            <a:pPr algn="l" fontAlgn="base">
+              <a:lnSpc>
+                <a:spcPts val="1250"/>
+              </a:lnSpc>
+              <a:spcBef>
+                <a:spcPts val="0"/>
+              </a:spcBef>
+              <a:spcAft>
+                <a:spcPts val="0"/>
+              </a:spcAft>
+              <a:defRPr sz="1087" b="0" i="0" lang="zh-CN" dirty="0">
+                <a:solidFill>
+                  <a:srgbClr val="000000"/>
+                </a:solidFill>
+                <a:latin typeface="Times New Roman"/>
+                <a:ea typeface="Times New Roman"/>
+                <a:cs typeface="Times New Roman"/>
+              </a:defRPr>
+            </a:pPr>
+            <a:r>
+              <a:rPr sz="1087" b="0" i="0" lang="zh-CN" dirty="0">
+                <a:solidFill>
+                  <a:srgbClr val="000000"/>
+                </a:solidFill>
+                <a:latin typeface="Times New Roman"/>
+                <a:ea typeface="Times New Roman"/>
+                <a:cs typeface="Times New Roman"/>
+              </a:rPr>
+              <a:t>,</a:t>
+            </a:r>
+          </a:p>
+        </p:txBody>
+      </p:sp>
+      <p:sp>
+        <p:nvSpPr>
+          <p:cNvPr id="216" name="vertical_dot_0" descr="Editable shape; source id vertical_dot_0"/>
           <p:cNvSpPr/>
           <p:nvPr/>
         </p:nvSpPr>
@@ -16054,7 +15271,63 @@
       </p:sp>
       <p:sp>
         <p:nvSpPr>
-          <p:cNvPr id="230" name="vertical_dot_1" descr="Editable shape; source id vertical_dot_1"/>
+          <p:cNvPr id="217" name="math_output_loc_10" descr="Editable text; source id math_output_loc_10"/>
+          <p:cNvSpPr txBox="1"/>
+          <p:nvPr/>
+        </p:nvSpPr>
+        <p:spPr>
+          <a:xfrm>
+            <a:off x="11685598" y="840166"/>
+            <a:ext cx="80563" cy="179158"/>
+          </a:xfrm>
+          <a:prstGeom prst="rect">
+            <a:avLst/>
+          </a:prstGeom>
+          <a:noFill/>
+          <a:effectLst/>
+        </p:spPr>
+        <p:txBody>
+          <a:bodyPr wrap="none" anchor="t" tIns="3836" rIns="0" bIns="0" lIns="3836" anchorCtr="0" vertOverflow="overflow">
+            <a:noAutofit/>
+          </a:bodyPr>
+          <a:lstStyle/>
+          <a:p>
+            <a:pPr algn="l" fontAlgn="base">
+              <a:lnSpc>
+                <a:spcPts val="1320"/>
+              </a:lnSpc>
+              <a:spcBef>
+                <a:spcPts val="0"/>
+              </a:spcBef>
+              <a:spcAft>
+                <a:spcPts val="0"/>
+              </a:spcAft>
+              <a:defRPr sz="1147" b="1" i="1" lang="zh-CN" dirty="0">
+                <a:solidFill>
+                  <a:srgbClr val="000000"/>
+                </a:solidFill>
+                <a:latin typeface="Times New Roman"/>
+                <a:ea typeface="Times New Roman"/>
+                <a:cs typeface="Times New Roman"/>
+              </a:defRPr>
+            </a:pPr>
+            <a:r>
+              <a:rPr sz="1147" b="1" i="1" lang="zh-CN" dirty="0">
+                <a:solidFill>
+                  <a:srgbClr val="000000"/>
+                </a:solidFill>
+                <a:latin typeface="Times New Roman"/>
+                <a:ea typeface="Times New Roman"/>
+                <a:cs typeface="Times New Roman"/>
+              </a:rPr>
+              <a:t>τ</a:t>
+            </a:r>
+          </a:p>
+        </p:txBody>
+      </p:sp>
+      <p:sp>
+        <p:nvSpPr>
+          <p:cNvPr id="218" name="vertical_dot_1" descr="Editable shape; source id vertical_dot_1"/>
           <p:cNvSpPr/>
           <p:nvPr/>
         </p:nvSpPr>
@@ -16098,7 +15371,63 @@
       </p:sp>
       <p:sp>
         <p:nvSpPr>
-          <p:cNvPr id="231" name="vertical_dot_2" descr="Editable shape; source id vertical_dot_2"/>
+          <p:cNvPr id="219" name="math_output_loc_11" descr="Editable text; source id math_output_loc_11"/>
+          <p:cNvSpPr txBox="1"/>
+          <p:nvPr/>
+        </p:nvSpPr>
+        <p:spPr>
+          <a:xfrm>
+            <a:off x="11762325" y="842084"/>
+            <a:ext cx="38363" cy="117393"/>
+          </a:xfrm>
+          <a:prstGeom prst="rect">
+            <a:avLst/>
+          </a:prstGeom>
+          <a:noFill/>
+          <a:effectLst/>
+        </p:spPr>
+        <p:txBody>
+          <a:bodyPr wrap="none" anchor="t" tIns="3836" rIns="0" bIns="0" lIns="3836" anchorCtr="0" vertOverflow="overflow">
+            <a:noAutofit/>
+          </a:bodyPr>
+          <a:lstStyle/>
+          <a:p>
+            <a:pPr algn="l" fontAlgn="base">
+              <a:lnSpc>
+                <a:spcPts val="833"/>
+              </a:lnSpc>
+              <a:spcBef>
+                <a:spcPts val="0"/>
+              </a:spcBef>
+              <a:spcAft>
+                <a:spcPts val="0"/>
+              </a:spcAft>
+              <a:defRPr sz="724" b="0" i="1" lang="zh-CN" dirty="0">
+                <a:solidFill>
+                  <a:srgbClr val="000000"/>
+                </a:solidFill>
+                <a:latin typeface="Times New Roman"/>
+                <a:ea typeface="Times New Roman"/>
+                <a:cs typeface="Times New Roman"/>
+              </a:defRPr>
+            </a:pPr>
+            <a:r>
+              <a:rPr sz="724" b="0" i="1" lang="zh-CN" dirty="0">
+                <a:solidFill>
+                  <a:srgbClr val="000000"/>
+                </a:solidFill>
+                <a:latin typeface="Times New Roman"/>
+                <a:ea typeface="Times New Roman"/>
+                <a:cs typeface="Times New Roman"/>
+              </a:rPr>
+              <a:t>i</a:t>
+            </a:r>
+          </a:p>
+        </p:txBody>
+      </p:sp>
+      <p:sp>
+        <p:nvSpPr>
+          <p:cNvPr id="220" name="vertical_dot_2" descr="Editable shape; source id vertical_dot_2"/>
           <p:cNvSpPr/>
           <p:nvPr/>
         </p:nvSpPr>
@@ -16142,7 +15471,1015 @@
       </p:sp>
       <p:sp>
         <p:nvSpPr>
-          <p:cNvPr id="232" name="depth_label" descr="Editable text; source id depth_label"/>
+          <p:cNvPr id="221" name="math_output_loc_12" descr="Editable text; source id math_output_loc_12"/>
+          <p:cNvSpPr txBox="1"/>
+          <p:nvPr/>
+        </p:nvSpPr>
+        <p:spPr>
+          <a:xfrm>
+            <a:off x="11793016" y="845920"/>
+            <a:ext cx="46036" cy="170335"/>
+          </a:xfrm>
+          <a:prstGeom prst="rect">
+            <a:avLst/>
+          </a:prstGeom>
+          <a:noFill/>
+          <a:effectLst/>
+        </p:spPr>
+        <p:txBody>
+          <a:bodyPr wrap="none" anchor="t" tIns="3836" rIns="0" bIns="0" lIns="3836" anchorCtr="0" vertOverflow="overflow">
+            <a:noAutofit/>
+          </a:bodyPr>
+          <a:lstStyle/>
+          <a:p>
+            <a:pPr algn="l" fontAlgn="base">
+              <a:lnSpc>
+                <a:spcPts val="1250"/>
+              </a:lnSpc>
+              <a:spcBef>
+                <a:spcPts val="0"/>
+              </a:spcBef>
+              <a:spcAft>
+                <a:spcPts val="0"/>
+              </a:spcAft>
+              <a:defRPr sz="1087" b="0" i="0" lang="zh-CN" dirty="0">
+                <a:solidFill>
+                  <a:srgbClr val="000000"/>
+                </a:solidFill>
+                <a:latin typeface="Times New Roman"/>
+                <a:ea typeface="Times New Roman"/>
+                <a:cs typeface="Times New Roman"/>
+              </a:defRPr>
+            </a:pPr>
+            <a:r>
+              <a:rPr sz="1087" b="0" i="0" lang="zh-CN" dirty="0">
+                <a:solidFill>
+                  <a:srgbClr val="000000"/>
+                </a:solidFill>
+                <a:latin typeface="Times New Roman"/>
+                <a:ea typeface="Times New Roman"/>
+                <a:cs typeface="Times New Roman"/>
+              </a:rPr>
+              <a:t>,</a:t>
+            </a:r>
+          </a:p>
+        </p:txBody>
+      </p:sp>
+      <p:sp>
+        <p:nvSpPr>
+          <p:cNvPr id="222" name="math_output_loc_13" descr="Editable text; source id math_output_loc_13"/>
+          <p:cNvSpPr txBox="1"/>
+          <p:nvPr/>
+        </p:nvSpPr>
+        <p:spPr>
+          <a:xfrm>
+            <a:off x="11854398" y="845920"/>
+            <a:ext cx="49872" cy="170335"/>
+          </a:xfrm>
+          <a:prstGeom prst="rect">
+            <a:avLst/>
+          </a:prstGeom>
+          <a:noFill/>
+          <a:effectLst/>
+        </p:spPr>
+        <p:txBody>
+          <a:bodyPr wrap="none" anchor="t" tIns="3836" rIns="0" bIns="0" lIns="3836" anchorCtr="0" vertOverflow="overflow">
+            <a:noAutofit/>
+          </a:bodyPr>
+          <a:lstStyle/>
+          <a:p>
+            <a:pPr algn="l" fontAlgn="base">
+              <a:lnSpc>
+                <a:spcPts val="1250"/>
+              </a:lnSpc>
+              <a:spcBef>
+                <a:spcPts val="0"/>
+              </a:spcBef>
+              <a:spcAft>
+                <a:spcPts val="0"/>
+              </a:spcAft>
+              <a:defRPr sz="1087" b="0" i="1" lang="zh-CN" dirty="0">
+                <a:solidFill>
+                  <a:srgbClr val="000000"/>
+                </a:solidFill>
+                <a:latin typeface="Times New Roman"/>
+                <a:ea typeface="Times New Roman"/>
+                <a:cs typeface="Times New Roman"/>
+              </a:defRPr>
+            </a:pPr>
+            <a:r>
+              <a:rPr sz="1087" b="0" i="1" lang="zh-CN" dirty="0">
+                <a:solidFill>
+                  <a:srgbClr val="000000"/>
+                </a:solidFill>
+                <a:latin typeface="Times New Roman"/>
+                <a:ea typeface="Times New Roman"/>
+                <a:cs typeface="Times New Roman"/>
+              </a:rPr>
+              <a:t>i</a:t>
+            </a:r>
+          </a:p>
+        </p:txBody>
+      </p:sp>
+      <p:sp>
+        <p:nvSpPr>
+          <p:cNvPr id="223" name="math_output_loc_14" descr="Editable text; source id math_output_loc_14"/>
+          <p:cNvSpPr txBox="1"/>
+          <p:nvPr/>
+        </p:nvSpPr>
+        <p:spPr>
+          <a:xfrm>
+            <a:off x="11896598" y="845920"/>
+            <a:ext cx="57545" cy="170335"/>
+          </a:xfrm>
+          <a:prstGeom prst="rect">
+            <a:avLst/>
+          </a:prstGeom>
+          <a:noFill/>
+          <a:effectLst/>
+        </p:spPr>
+        <p:txBody>
+          <a:bodyPr wrap="none" anchor="t" tIns="3836" rIns="0" bIns="0" lIns="3836" anchorCtr="0" vertOverflow="overflow">
+            <a:noAutofit/>
+          </a:bodyPr>
+          <a:lstStyle/>
+          <a:p>
+            <a:pPr algn="l" fontAlgn="base">
+              <a:lnSpc>
+                <a:spcPts val="1250"/>
+              </a:lnSpc>
+              <a:spcBef>
+                <a:spcPts val="0"/>
+              </a:spcBef>
+              <a:spcAft>
+                <a:spcPts val="0"/>
+              </a:spcAft>
+              <a:defRPr sz="1087" b="0" i="0" lang="zh-CN" dirty="0">
+                <a:solidFill>
+                  <a:srgbClr val="000000"/>
+                </a:solidFill>
+                <a:latin typeface="Times New Roman"/>
+                <a:ea typeface="Times New Roman"/>
+                <a:cs typeface="Times New Roman"/>
+              </a:defRPr>
+            </a:pPr>
+            <a:r>
+              <a:rPr sz="1087" b="0" i="0" lang="zh-CN" dirty="0">
+                <a:solidFill>
+                  <a:srgbClr val="000000"/>
+                </a:solidFill>
+                <a:latin typeface="Times New Roman"/>
+                <a:ea typeface="Times New Roman"/>
+                <a:cs typeface="Times New Roman"/>
+              </a:rPr>
+              <a:t>)</a:t>
+            </a:r>
+          </a:p>
+        </p:txBody>
+      </p:sp>
+      <p:sp>
+        <p:nvSpPr>
+          <p:cNvPr id="224" name="math_output_rot_0" descr="Editable text; source id math_output_rot_0"/>
+          <p:cNvSpPr txBox="1"/>
+          <p:nvPr/>
+        </p:nvSpPr>
+        <p:spPr>
+          <a:xfrm>
+            <a:off x="11071778" y="1068430"/>
+            <a:ext cx="67136" cy="170335"/>
+          </a:xfrm>
+          <a:prstGeom prst="rect">
+            <a:avLst/>
+          </a:prstGeom>
+          <a:noFill/>
+          <a:effectLst/>
+        </p:spPr>
+        <p:txBody>
+          <a:bodyPr wrap="none" anchor="t" tIns="3836" rIns="0" bIns="0" lIns="3836" anchorCtr="0" vertOverflow="overflow">
+            <a:noAutofit/>
+          </a:bodyPr>
+          <a:lstStyle/>
+          <a:p>
+            <a:pPr algn="l" fontAlgn="base">
+              <a:lnSpc>
+                <a:spcPts val="1250"/>
+              </a:lnSpc>
+              <a:spcBef>
+                <a:spcPts val="0"/>
+              </a:spcBef>
+              <a:spcAft>
+                <a:spcPts val="0"/>
+              </a:spcAft>
+              <a:defRPr sz="1087" b="0" i="0" lang="zh-CN" dirty="0">
+                <a:solidFill>
+                  <a:srgbClr val="000000"/>
+                </a:solidFill>
+                <a:latin typeface="Times New Roman"/>
+                <a:ea typeface="Times New Roman"/>
+                <a:cs typeface="Times New Roman"/>
+              </a:defRPr>
+            </a:pPr>
+            <a:r>
+              <a:rPr sz="1087" b="0" i="0" lang="zh-CN" dirty="0">
+                <a:solidFill>
+                  <a:srgbClr val="000000"/>
+                </a:solidFill>
+                <a:latin typeface="Times New Roman"/>
+                <a:ea typeface="Times New Roman"/>
+                <a:cs typeface="Times New Roman"/>
+              </a:rPr>
+              <a:t>ϵ</a:t>
+            </a:r>
+          </a:p>
+        </p:txBody>
+      </p:sp>
+      <p:sp>
+        <p:nvSpPr>
+          <p:cNvPr id="225" name="math_output_rot_1" descr="Editable text; source id math_output_rot_1"/>
+          <p:cNvSpPr txBox="1"/>
+          <p:nvPr/>
+        </p:nvSpPr>
+        <p:spPr>
+          <a:xfrm>
+            <a:off x="11140832" y="1039657"/>
+            <a:ext cx="145782" cy="138569"/>
+          </a:xfrm>
+          <a:prstGeom prst="rect">
+            <a:avLst/>
+          </a:prstGeom>
+          <a:noFill/>
+          <a:effectLst/>
+        </p:spPr>
+        <p:txBody>
+          <a:bodyPr wrap="none" anchor="t" tIns="3836" rIns="0" bIns="0" lIns="3836" anchorCtr="0" vertOverflow="overflow">
+            <a:noAutofit/>
+          </a:bodyPr>
+          <a:lstStyle/>
+          <a:p>
+            <a:pPr algn="l" fontAlgn="base">
+              <a:lnSpc>
+                <a:spcPts val="1000"/>
+              </a:lnSpc>
+              <a:spcBef>
+                <a:spcPts val="0"/>
+              </a:spcBef>
+              <a:spcAft>
+                <a:spcPts val="0"/>
+              </a:spcAft>
+              <a:defRPr sz="869" b="0" i="1" lang="zh-CN" dirty="0">
+                <a:solidFill>
+                  <a:srgbClr val="000000"/>
+                </a:solidFill>
+                <a:latin typeface="Times New Roman"/>
+                <a:ea typeface="Times New Roman"/>
+                <a:cs typeface="Times New Roman"/>
+              </a:defRPr>
+            </a:pPr>
+            <a:r>
+              <a:rPr sz="869" b="0" i="1" lang="zh-CN" dirty="0">
+                <a:solidFill>
+                  <a:srgbClr val="000000"/>
+                </a:solidFill>
+                <a:latin typeface="Times New Roman"/>
+                <a:ea typeface="Times New Roman"/>
+                <a:cs typeface="Times New Roman"/>
+              </a:rPr>
+              <a:t>rot</a:t>
+            </a:r>
+          </a:p>
+        </p:txBody>
+      </p:sp>
+      <p:sp>
+        <p:nvSpPr>
+          <p:cNvPr id="226" name="math_output_rot_2" descr="Editable text; source id math_output_rot_2"/>
+          <p:cNvSpPr txBox="1"/>
+          <p:nvPr/>
+        </p:nvSpPr>
+        <p:spPr>
+          <a:xfrm>
+            <a:off x="11133160" y="1141321"/>
+            <a:ext cx="65218" cy="126216"/>
+          </a:xfrm>
+          <a:prstGeom prst="rect">
+            <a:avLst/>
+          </a:prstGeom>
+          <a:noFill/>
+          <a:effectLst/>
+        </p:spPr>
+        <p:txBody>
+          <a:bodyPr wrap="none" anchor="t" tIns="3836" rIns="0" bIns="0" lIns="3836" anchorCtr="0" vertOverflow="overflow">
+            <a:noAutofit/>
+          </a:bodyPr>
+          <a:lstStyle/>
+          <a:p>
+            <a:pPr algn="l" fontAlgn="base">
+              <a:lnSpc>
+                <a:spcPts val="903"/>
+              </a:lnSpc>
+              <a:spcBef>
+                <a:spcPts val="0"/>
+              </a:spcBef>
+              <a:spcAft>
+                <a:spcPts val="0"/>
+              </a:spcAft>
+              <a:defRPr sz="785" b="1" i="1" lang="zh-CN" dirty="0">
+                <a:solidFill>
+                  <a:srgbClr val="000000"/>
+                </a:solidFill>
+                <a:latin typeface="Times New Roman"/>
+                <a:ea typeface="Times New Roman"/>
+                <a:cs typeface="Times New Roman"/>
+              </a:defRPr>
+            </a:pPr>
+            <a:r>
+              <a:rPr sz="785" b="1" i="1" lang="zh-CN" dirty="0">
+                <a:solidFill>
+                  <a:srgbClr val="000000"/>
+                </a:solidFill>
+                <a:latin typeface="Times New Roman"/>
+                <a:ea typeface="Times New Roman"/>
+                <a:cs typeface="Times New Roman"/>
+              </a:rPr>
+              <a:t>θ</a:t>
+            </a:r>
+          </a:p>
+        </p:txBody>
+      </p:sp>
+      <p:sp>
+        <p:nvSpPr>
+          <p:cNvPr id="227" name="math_output_rot_3" descr="Editable text; source id math_output_rot_3"/>
+          <p:cNvSpPr txBox="1"/>
+          <p:nvPr/>
+        </p:nvSpPr>
+        <p:spPr>
+          <a:xfrm>
+            <a:off x="11294287" y="1068430"/>
+            <a:ext cx="57545" cy="170335"/>
+          </a:xfrm>
+          <a:prstGeom prst="rect">
+            <a:avLst/>
+          </a:prstGeom>
+          <a:noFill/>
+          <a:effectLst/>
+        </p:spPr>
+        <p:txBody>
+          <a:bodyPr wrap="none" anchor="t" tIns="3836" rIns="0" bIns="0" lIns="3836" anchorCtr="0" vertOverflow="overflow">
+            <a:noAutofit/>
+          </a:bodyPr>
+          <a:lstStyle/>
+          <a:p>
+            <a:pPr algn="l" fontAlgn="base">
+              <a:lnSpc>
+                <a:spcPts val="1250"/>
+              </a:lnSpc>
+              <a:spcBef>
+                <a:spcPts val="0"/>
+              </a:spcBef>
+              <a:spcAft>
+                <a:spcPts val="0"/>
+              </a:spcAft>
+              <a:defRPr sz="1087" b="0" i="0" lang="zh-CN" dirty="0">
+                <a:solidFill>
+                  <a:srgbClr val="000000"/>
+                </a:solidFill>
+                <a:latin typeface="Times New Roman"/>
+                <a:ea typeface="Times New Roman"/>
+                <a:cs typeface="Times New Roman"/>
+              </a:defRPr>
+            </a:pPr>
+            <a:r>
+              <a:rPr sz="1087" b="0" i="0" lang="zh-CN" dirty="0">
+                <a:solidFill>
+                  <a:srgbClr val="000000"/>
+                </a:solidFill>
+                <a:latin typeface="Times New Roman"/>
+                <a:ea typeface="Times New Roman"/>
+                <a:cs typeface="Times New Roman"/>
+              </a:rPr>
+              <a:t>(</a:t>
+            </a:r>
+          </a:p>
+        </p:txBody>
+      </p:sp>
+      <p:sp>
+        <p:nvSpPr>
+          <p:cNvPr id="228" name="math_output_rot_4" descr="Editable text; source id math_output_rot_4"/>
+          <p:cNvSpPr txBox="1"/>
+          <p:nvPr/>
+        </p:nvSpPr>
+        <p:spPr>
+          <a:xfrm>
+            <a:off x="11349915" y="1062675"/>
+            <a:ext cx="84400" cy="179158"/>
+          </a:xfrm>
+          <a:prstGeom prst="rect">
+            <a:avLst/>
+          </a:prstGeom>
+          <a:noFill/>
+          <a:effectLst/>
+        </p:spPr>
+        <p:txBody>
+          <a:bodyPr wrap="none" anchor="t" tIns="3836" rIns="0" bIns="0" lIns="3836" anchorCtr="0" vertOverflow="overflow">
+            <a:noAutofit/>
+          </a:bodyPr>
+          <a:lstStyle/>
+          <a:p>
+            <a:pPr algn="l" fontAlgn="base">
+              <a:lnSpc>
+                <a:spcPts val="1320"/>
+              </a:lnSpc>
+              <a:spcBef>
+                <a:spcPts val="0"/>
+              </a:spcBef>
+              <a:spcAft>
+                <a:spcPts val="0"/>
+              </a:spcAft>
+              <a:defRPr sz="1147" b="1" i="1" lang="zh-CN" dirty="0">
+                <a:solidFill>
+                  <a:srgbClr val="000000"/>
+                </a:solidFill>
+                <a:latin typeface="Times New Roman"/>
+                <a:ea typeface="Times New Roman"/>
+                <a:cs typeface="Times New Roman"/>
+              </a:defRPr>
+            </a:pPr>
+            <a:r>
+              <a:rPr sz="1147" b="1" i="1" lang="zh-CN" dirty="0">
+                <a:solidFill>
+                  <a:srgbClr val="000000"/>
+                </a:solidFill>
+                <a:latin typeface="Times New Roman"/>
+                <a:ea typeface="Times New Roman"/>
+                <a:cs typeface="Times New Roman"/>
+              </a:rPr>
+              <a:t>o</a:t>
+            </a:r>
+          </a:p>
+        </p:txBody>
+      </p:sp>
+      <p:sp>
+        <p:nvSpPr>
+          <p:cNvPr id="229" name="math_output_rot_5" descr="Editable text; source id math_output_rot_5"/>
+          <p:cNvSpPr txBox="1"/>
+          <p:nvPr/>
+        </p:nvSpPr>
+        <p:spPr>
+          <a:xfrm>
+            <a:off x="11424724" y="1068430"/>
+            <a:ext cx="46036" cy="170335"/>
+          </a:xfrm>
+          <a:prstGeom prst="rect">
+            <a:avLst/>
+          </a:prstGeom>
+          <a:noFill/>
+          <a:effectLst/>
+        </p:spPr>
+        <p:txBody>
+          <a:bodyPr wrap="none" anchor="t" tIns="3836" rIns="0" bIns="0" lIns="3836" anchorCtr="0" vertOverflow="overflow">
+            <a:noAutofit/>
+          </a:bodyPr>
+          <a:lstStyle/>
+          <a:p>
+            <a:pPr algn="l" fontAlgn="base">
+              <a:lnSpc>
+                <a:spcPts val="1250"/>
+              </a:lnSpc>
+              <a:spcBef>
+                <a:spcPts val="0"/>
+              </a:spcBef>
+              <a:spcAft>
+                <a:spcPts val="0"/>
+              </a:spcAft>
+              <a:defRPr sz="1087" b="0" i="0" lang="zh-CN" dirty="0">
+                <a:solidFill>
+                  <a:srgbClr val="000000"/>
+                </a:solidFill>
+                <a:latin typeface="Times New Roman"/>
+                <a:ea typeface="Times New Roman"/>
+                <a:cs typeface="Times New Roman"/>
+              </a:defRPr>
+            </a:pPr>
+            <a:r>
+              <a:rPr sz="1087" b="0" i="0" lang="zh-CN" dirty="0">
+                <a:solidFill>
+                  <a:srgbClr val="000000"/>
+                </a:solidFill>
+                <a:latin typeface="Times New Roman"/>
+                <a:ea typeface="Times New Roman"/>
+                <a:cs typeface="Times New Roman"/>
+              </a:rPr>
+              <a:t>,</a:t>
+            </a:r>
+          </a:p>
+        </p:txBody>
+      </p:sp>
+      <p:sp>
+        <p:nvSpPr>
+          <p:cNvPr id="230" name="math_output_rot_6" descr="Editable text; source id math_output_rot_6"/>
+          <p:cNvSpPr txBox="1"/>
+          <p:nvPr/>
+        </p:nvSpPr>
+        <p:spPr>
+          <a:xfrm>
+            <a:off x="11478433" y="1068430"/>
+            <a:ext cx="53709" cy="170335"/>
+          </a:xfrm>
+          <a:prstGeom prst="rect">
+            <a:avLst/>
+          </a:prstGeom>
+          <a:noFill/>
+          <a:effectLst/>
+        </p:spPr>
+        <p:txBody>
+          <a:bodyPr wrap="none" anchor="t" tIns="3836" rIns="0" bIns="0" lIns="3836" anchorCtr="0" vertOverflow="overflow">
+            <a:noAutofit/>
+          </a:bodyPr>
+          <a:lstStyle/>
+          <a:p>
+            <a:pPr algn="l" fontAlgn="base">
+              <a:lnSpc>
+                <a:spcPts val="1250"/>
+              </a:lnSpc>
+              <a:spcBef>
+                <a:spcPts val="0"/>
+              </a:spcBef>
+              <a:spcAft>
+                <a:spcPts val="0"/>
+              </a:spcAft>
+              <a:defRPr sz="1087" b="0" i="1" lang="zh-CN" dirty="0">
+                <a:solidFill>
+                  <a:srgbClr val="000000"/>
+                </a:solidFill>
+                <a:latin typeface="Times New Roman"/>
+                <a:ea typeface="Times New Roman"/>
+                <a:cs typeface="Times New Roman"/>
+              </a:defRPr>
+            </a:pPr>
+            <a:r>
+              <a:rPr sz="1087" b="0" i="1" lang="zh-CN" dirty="0">
+                <a:solidFill>
+                  <a:srgbClr val="000000"/>
+                </a:solidFill>
+                <a:latin typeface="Times New Roman"/>
+                <a:ea typeface="Times New Roman"/>
+                <a:cs typeface="Times New Roman"/>
+              </a:rPr>
+              <a:t>l</a:t>
+            </a:r>
+          </a:p>
+        </p:txBody>
+      </p:sp>
+      <p:sp>
+        <p:nvSpPr>
+          <p:cNvPr id="231" name="math_output_rot_7" descr="Editable text; source id math_output_rot_7"/>
+          <p:cNvSpPr txBox="1"/>
+          <p:nvPr/>
+        </p:nvSpPr>
+        <p:spPr>
+          <a:xfrm>
+            <a:off x="11516797" y="1068430"/>
+            <a:ext cx="46036" cy="170335"/>
+          </a:xfrm>
+          <a:prstGeom prst="rect">
+            <a:avLst/>
+          </a:prstGeom>
+          <a:noFill/>
+          <a:effectLst/>
+        </p:spPr>
+        <p:txBody>
+          <a:bodyPr wrap="none" anchor="t" tIns="3836" rIns="0" bIns="0" lIns="3836" anchorCtr="0" vertOverflow="overflow">
+            <a:noAutofit/>
+          </a:bodyPr>
+          <a:lstStyle/>
+          <a:p>
+            <a:pPr algn="l" fontAlgn="base">
+              <a:lnSpc>
+                <a:spcPts val="1250"/>
+              </a:lnSpc>
+              <a:spcBef>
+                <a:spcPts val="0"/>
+              </a:spcBef>
+              <a:spcAft>
+                <a:spcPts val="0"/>
+              </a:spcAft>
+              <a:defRPr sz="1087" b="0" i="0" lang="zh-CN" dirty="0">
+                <a:solidFill>
+                  <a:srgbClr val="000000"/>
+                </a:solidFill>
+                <a:latin typeface="Times New Roman"/>
+                <a:ea typeface="Times New Roman"/>
+                <a:cs typeface="Times New Roman"/>
+              </a:defRPr>
+            </a:pPr>
+            <a:r>
+              <a:rPr sz="1087" b="0" i="0" lang="zh-CN" dirty="0">
+                <a:solidFill>
+                  <a:srgbClr val="000000"/>
+                </a:solidFill>
+                <a:latin typeface="Times New Roman"/>
+                <a:ea typeface="Times New Roman"/>
+                <a:cs typeface="Times New Roman"/>
+              </a:rPr>
+              <a:t>,</a:t>
+            </a:r>
+          </a:p>
+        </p:txBody>
+      </p:sp>
+      <p:sp>
+        <p:nvSpPr>
+          <p:cNvPr id="232" name="math_output_rot_8" descr="Editable text; source id math_output_rot_8"/>
+          <p:cNvSpPr txBox="1"/>
+          <p:nvPr/>
+        </p:nvSpPr>
+        <p:spPr>
+          <a:xfrm>
+            <a:off x="11570506" y="1068430"/>
+            <a:ext cx="72891" cy="170335"/>
+          </a:xfrm>
+          <a:prstGeom prst="rect">
+            <a:avLst/>
+          </a:prstGeom>
+          <a:noFill/>
+          <a:effectLst/>
+        </p:spPr>
+        <p:txBody>
+          <a:bodyPr wrap="none" anchor="t" tIns="3836" rIns="0" bIns="0" lIns="3836" anchorCtr="0" vertOverflow="overflow">
+            <a:noAutofit/>
+          </a:bodyPr>
+          <a:lstStyle/>
+          <a:p>
+            <a:pPr algn="l" fontAlgn="base">
+              <a:lnSpc>
+                <a:spcPts val="1250"/>
+              </a:lnSpc>
+              <a:spcBef>
+                <a:spcPts val="0"/>
+              </a:spcBef>
+              <a:spcAft>
+                <a:spcPts val="0"/>
+              </a:spcAft>
+              <a:defRPr sz="1087" b="0" i="1" lang="zh-CN" dirty="0">
+                <a:solidFill>
+                  <a:srgbClr val="000000"/>
+                </a:solidFill>
+                <a:latin typeface="Times New Roman"/>
+                <a:ea typeface="Times New Roman"/>
+                <a:cs typeface="Times New Roman"/>
+              </a:defRPr>
+            </a:pPr>
+            <a:r>
+              <a:rPr sz="1087" b="0" i="1" lang="zh-CN" dirty="0">
+                <a:solidFill>
+                  <a:srgbClr val="000000"/>
+                </a:solidFill>
+                <a:latin typeface="Times New Roman"/>
+                <a:ea typeface="Times New Roman"/>
+                <a:cs typeface="Times New Roman"/>
+              </a:rPr>
+              <a:t>c</a:t>
+            </a:r>
+          </a:p>
+        </p:txBody>
+      </p:sp>
+      <p:sp>
+        <p:nvSpPr>
+          <p:cNvPr id="233" name="math_output_rot_9" descr="Editable text; source id math_output_rot_9"/>
+          <p:cNvSpPr txBox="1"/>
+          <p:nvPr/>
+        </p:nvSpPr>
+        <p:spPr>
+          <a:xfrm>
+            <a:off x="11631888" y="1068430"/>
+            <a:ext cx="46036" cy="170335"/>
+          </a:xfrm>
+          <a:prstGeom prst="rect">
+            <a:avLst/>
+          </a:prstGeom>
+          <a:noFill/>
+          <a:effectLst/>
+        </p:spPr>
+        <p:txBody>
+          <a:bodyPr wrap="none" anchor="t" tIns="3836" rIns="0" bIns="0" lIns="3836" anchorCtr="0" vertOverflow="overflow">
+            <a:noAutofit/>
+          </a:bodyPr>
+          <a:lstStyle/>
+          <a:p>
+            <a:pPr algn="l" fontAlgn="base">
+              <a:lnSpc>
+                <a:spcPts val="1250"/>
+              </a:lnSpc>
+              <a:spcBef>
+                <a:spcPts val="0"/>
+              </a:spcBef>
+              <a:spcAft>
+                <a:spcPts val="0"/>
+              </a:spcAft>
+              <a:defRPr sz="1087" b="0" i="0" lang="zh-CN" dirty="0">
+                <a:solidFill>
+                  <a:srgbClr val="000000"/>
+                </a:solidFill>
+                <a:latin typeface="Times New Roman"/>
+                <a:ea typeface="Times New Roman"/>
+                <a:cs typeface="Times New Roman"/>
+              </a:defRPr>
+            </a:pPr>
+            <a:r>
+              <a:rPr sz="1087" b="0" i="0" lang="zh-CN" dirty="0">
+                <a:solidFill>
+                  <a:srgbClr val="000000"/>
+                </a:solidFill>
+                <a:latin typeface="Times New Roman"/>
+                <a:ea typeface="Times New Roman"/>
+                <a:cs typeface="Times New Roman"/>
+              </a:rPr>
+              <a:t>,</a:t>
+            </a:r>
+          </a:p>
+        </p:txBody>
+      </p:sp>
+      <p:sp>
+        <p:nvSpPr>
+          <p:cNvPr id="234" name="math_output_rot_10" descr="Editable text; source id math_output_rot_10"/>
+          <p:cNvSpPr txBox="1"/>
+          <p:nvPr/>
+        </p:nvSpPr>
+        <p:spPr>
+          <a:xfrm>
+            <a:off x="11685598" y="1062675"/>
+            <a:ext cx="80563" cy="179158"/>
+          </a:xfrm>
+          <a:prstGeom prst="rect">
+            <a:avLst/>
+          </a:prstGeom>
+          <a:noFill/>
+          <a:effectLst/>
+        </p:spPr>
+        <p:txBody>
+          <a:bodyPr wrap="none" anchor="t" tIns="3836" rIns="0" bIns="0" lIns="3836" anchorCtr="0" vertOverflow="overflow">
+            <a:noAutofit/>
+          </a:bodyPr>
+          <a:lstStyle/>
+          <a:p>
+            <a:pPr algn="l" fontAlgn="base">
+              <a:lnSpc>
+                <a:spcPts val="1320"/>
+              </a:lnSpc>
+              <a:spcBef>
+                <a:spcPts val="0"/>
+              </a:spcBef>
+              <a:spcAft>
+                <a:spcPts val="0"/>
+              </a:spcAft>
+              <a:defRPr sz="1147" b="1" i="1" lang="zh-CN" dirty="0">
+                <a:solidFill>
+                  <a:srgbClr val="000000"/>
+                </a:solidFill>
+                <a:latin typeface="Times New Roman"/>
+                <a:ea typeface="Times New Roman"/>
+                <a:cs typeface="Times New Roman"/>
+              </a:defRPr>
+            </a:pPr>
+            <a:r>
+              <a:rPr sz="1147" b="1" i="1" lang="zh-CN" dirty="0">
+                <a:solidFill>
+                  <a:srgbClr val="000000"/>
+                </a:solidFill>
+                <a:latin typeface="Times New Roman"/>
+                <a:ea typeface="Times New Roman"/>
+                <a:cs typeface="Times New Roman"/>
+              </a:rPr>
+              <a:t>τ</a:t>
+            </a:r>
+          </a:p>
+        </p:txBody>
+      </p:sp>
+      <p:sp>
+        <p:nvSpPr>
+          <p:cNvPr id="235" name="math_output_rot_11" descr="Editable text; source id math_output_rot_11"/>
+          <p:cNvSpPr txBox="1"/>
+          <p:nvPr/>
+        </p:nvSpPr>
+        <p:spPr>
+          <a:xfrm>
+            <a:off x="11762325" y="1064594"/>
+            <a:ext cx="38363" cy="117393"/>
+          </a:xfrm>
+          <a:prstGeom prst="rect">
+            <a:avLst/>
+          </a:prstGeom>
+          <a:noFill/>
+          <a:effectLst/>
+        </p:spPr>
+        <p:txBody>
+          <a:bodyPr wrap="none" anchor="t" tIns="3836" rIns="0" bIns="0" lIns="3836" anchorCtr="0" vertOverflow="overflow">
+            <a:noAutofit/>
+          </a:bodyPr>
+          <a:lstStyle/>
+          <a:p>
+            <a:pPr algn="l" fontAlgn="base">
+              <a:lnSpc>
+                <a:spcPts val="833"/>
+              </a:lnSpc>
+              <a:spcBef>
+                <a:spcPts val="0"/>
+              </a:spcBef>
+              <a:spcAft>
+                <a:spcPts val="0"/>
+              </a:spcAft>
+              <a:defRPr sz="724" b="0" i="1" lang="zh-CN" dirty="0">
+                <a:solidFill>
+                  <a:srgbClr val="000000"/>
+                </a:solidFill>
+                <a:latin typeface="Times New Roman"/>
+                <a:ea typeface="Times New Roman"/>
+                <a:cs typeface="Times New Roman"/>
+              </a:defRPr>
+            </a:pPr>
+            <a:r>
+              <a:rPr sz="724" b="0" i="1" lang="zh-CN" dirty="0">
+                <a:solidFill>
+                  <a:srgbClr val="000000"/>
+                </a:solidFill>
+                <a:latin typeface="Times New Roman"/>
+                <a:ea typeface="Times New Roman"/>
+                <a:cs typeface="Times New Roman"/>
+              </a:rPr>
+              <a:t>i</a:t>
+            </a:r>
+          </a:p>
+        </p:txBody>
+      </p:sp>
+      <p:sp>
+        <p:nvSpPr>
+          <p:cNvPr id="236" name="math_output_rot_12" descr="Editable text; source id math_output_rot_12"/>
+          <p:cNvSpPr txBox="1"/>
+          <p:nvPr/>
+        </p:nvSpPr>
+        <p:spPr>
+          <a:xfrm>
+            <a:off x="11793016" y="1068430"/>
+            <a:ext cx="46036" cy="170335"/>
+          </a:xfrm>
+          <a:prstGeom prst="rect">
+            <a:avLst/>
+          </a:prstGeom>
+          <a:noFill/>
+          <a:effectLst/>
+        </p:spPr>
+        <p:txBody>
+          <a:bodyPr wrap="none" anchor="t" tIns="3836" rIns="0" bIns="0" lIns="3836" anchorCtr="0" vertOverflow="overflow">
+            <a:noAutofit/>
+          </a:bodyPr>
+          <a:lstStyle/>
+          <a:p>
+            <a:pPr algn="l" fontAlgn="base">
+              <a:lnSpc>
+                <a:spcPts val="1250"/>
+              </a:lnSpc>
+              <a:spcBef>
+                <a:spcPts val="0"/>
+              </a:spcBef>
+              <a:spcAft>
+                <a:spcPts val="0"/>
+              </a:spcAft>
+              <a:defRPr sz="1087" b="0" i="0" lang="zh-CN" dirty="0">
+                <a:solidFill>
+                  <a:srgbClr val="000000"/>
+                </a:solidFill>
+                <a:latin typeface="Times New Roman"/>
+                <a:ea typeface="Times New Roman"/>
+                <a:cs typeface="Times New Roman"/>
+              </a:defRPr>
+            </a:pPr>
+            <a:r>
+              <a:rPr sz="1087" b="0" i="0" lang="zh-CN" dirty="0">
+                <a:solidFill>
+                  <a:srgbClr val="000000"/>
+                </a:solidFill>
+                <a:latin typeface="Times New Roman"/>
+                <a:ea typeface="Times New Roman"/>
+                <a:cs typeface="Times New Roman"/>
+              </a:rPr>
+              <a:t>,</a:t>
+            </a:r>
+          </a:p>
+        </p:txBody>
+      </p:sp>
+      <p:sp>
+        <p:nvSpPr>
+          <p:cNvPr id="237" name="math_output_rot_13" descr="Editable text; source id math_output_rot_13"/>
+          <p:cNvSpPr txBox="1"/>
+          <p:nvPr/>
+        </p:nvSpPr>
+        <p:spPr>
+          <a:xfrm>
+            <a:off x="11854398" y="1068430"/>
+            <a:ext cx="49872" cy="170335"/>
+          </a:xfrm>
+          <a:prstGeom prst="rect">
+            <a:avLst/>
+          </a:prstGeom>
+          <a:noFill/>
+          <a:effectLst/>
+        </p:spPr>
+        <p:txBody>
+          <a:bodyPr wrap="none" anchor="t" tIns="3836" rIns="0" bIns="0" lIns="3836" anchorCtr="0" vertOverflow="overflow">
+            <a:noAutofit/>
+          </a:bodyPr>
+          <a:lstStyle/>
+          <a:p>
+            <a:pPr algn="l" fontAlgn="base">
+              <a:lnSpc>
+                <a:spcPts val="1250"/>
+              </a:lnSpc>
+              <a:spcBef>
+                <a:spcPts val="0"/>
+              </a:spcBef>
+              <a:spcAft>
+                <a:spcPts val="0"/>
+              </a:spcAft>
+              <a:defRPr sz="1087" b="0" i="1" lang="zh-CN" dirty="0">
+                <a:solidFill>
+                  <a:srgbClr val="000000"/>
+                </a:solidFill>
+                <a:latin typeface="Times New Roman"/>
+                <a:ea typeface="Times New Roman"/>
+                <a:cs typeface="Times New Roman"/>
+              </a:defRPr>
+            </a:pPr>
+            <a:r>
+              <a:rPr sz="1087" b="0" i="1" lang="zh-CN" dirty="0">
+                <a:solidFill>
+                  <a:srgbClr val="000000"/>
+                </a:solidFill>
+                <a:latin typeface="Times New Roman"/>
+                <a:ea typeface="Times New Roman"/>
+                <a:cs typeface="Times New Roman"/>
+              </a:rPr>
+              <a:t>i</a:t>
+            </a:r>
+          </a:p>
+        </p:txBody>
+      </p:sp>
+      <p:sp>
+        <p:nvSpPr>
+          <p:cNvPr id="238" name="math_output_rot_14" descr="Editable text; source id math_output_rot_14"/>
+          <p:cNvSpPr txBox="1"/>
+          <p:nvPr/>
+        </p:nvSpPr>
+        <p:spPr>
+          <a:xfrm>
+            <a:off x="11896598" y="1068430"/>
+            <a:ext cx="57545" cy="170335"/>
+          </a:xfrm>
+          <a:prstGeom prst="rect">
+            <a:avLst/>
+          </a:prstGeom>
+          <a:noFill/>
+          <a:effectLst/>
+        </p:spPr>
+        <p:txBody>
+          <a:bodyPr wrap="none" anchor="t" tIns="3836" rIns="0" bIns="0" lIns="3836" anchorCtr="0" vertOverflow="overflow">
+            <a:noAutofit/>
+          </a:bodyPr>
+          <a:lstStyle/>
+          <a:p>
+            <a:pPr algn="l" fontAlgn="base">
+              <a:lnSpc>
+                <a:spcPts val="1250"/>
+              </a:lnSpc>
+              <a:spcBef>
+                <a:spcPts val="0"/>
+              </a:spcBef>
+              <a:spcAft>
+                <a:spcPts val="0"/>
+              </a:spcAft>
+              <a:defRPr sz="1087" b="0" i="0" lang="zh-CN" dirty="0">
+                <a:solidFill>
+                  <a:srgbClr val="000000"/>
+                </a:solidFill>
+                <a:latin typeface="Times New Roman"/>
+                <a:ea typeface="Times New Roman"/>
+                <a:cs typeface="Times New Roman"/>
+              </a:defRPr>
+            </a:pPr>
+            <a:r>
+              <a:rPr sz="1087" b="0" i="0" lang="zh-CN" dirty="0">
+                <a:solidFill>
+                  <a:srgbClr val="000000"/>
+                </a:solidFill>
+                <a:latin typeface="Times New Roman"/>
+                <a:ea typeface="Times New Roman"/>
+                <a:cs typeface="Times New Roman"/>
+              </a:rPr>
+              <a:t>)</a:t>
+            </a:r>
+          </a:p>
+        </p:txBody>
+      </p:sp>
+      <p:sp>
+        <p:nvSpPr>
+          <p:cNvPr id="239" name="depth_label" descr="Editable text; source id depth_label"/>
           <p:cNvSpPr txBox="1"/>
           <p:nvPr/>
         </p:nvSpPr>
@@ -16198,7 +16535,7 @@
       </p:sp>
       <p:sp>
         <p:nvSpPr>
-          <p:cNvPr id="233" name="image_label" descr="Editable text; source id image_label"/>
+          <p:cNvPr id="240" name="image_label" descr="Editable text; source id image_label"/>
           <p:cNvSpPr txBox="1"/>
           <p:nvPr/>
         </p:nvSpPr>
@@ -16254,7 +16591,7 @@
       </p:sp>
       <p:sp>
         <p:nvSpPr>
-          <p:cNvPr id="234" name="proprio_token_label" descr="Editable text; source id proprio_token_label"/>
+          <p:cNvPr id="241" name="proprio_token_label" descr="Editable text; source id proprio_token_label"/>
           <p:cNvSpPr txBox="1"/>
           <p:nvPr/>
         </p:nvSpPr>
@@ -16308,9 +16645,1185 @@
           </a:p>
         </p:txBody>
       </p:sp>
+      <p:sp>
+        <p:nvSpPr>
+          <p:cNvPr id="242" name="math_step_0_0" descr="Editable text; source id math_step_0_0"/>
+          <p:cNvSpPr txBox="1"/>
+          <p:nvPr/>
+        </p:nvSpPr>
+        <p:spPr>
+          <a:xfrm>
+            <a:off x="1922023" y="4897132"/>
+            <a:ext cx="67136" cy="170335"/>
+          </a:xfrm>
+          <a:prstGeom prst="rect">
+            <a:avLst/>
+          </a:prstGeom>
+          <a:noFill/>
+          <a:effectLst/>
+        </p:spPr>
+        <p:txBody>
+          <a:bodyPr wrap="none" anchor="t" tIns="3836" rIns="0" bIns="0" lIns="3836" anchorCtr="0" vertOverflow="overflow">
+            <a:noAutofit/>
+          </a:bodyPr>
+          <a:lstStyle/>
+          <a:p>
+            <a:pPr algn="l" fontAlgn="base">
+              <a:lnSpc>
+                <a:spcPts val="1250"/>
+              </a:lnSpc>
+              <a:spcBef>
+                <a:spcPts val="0"/>
+              </a:spcBef>
+              <a:spcAft>
+                <a:spcPts val="0"/>
+              </a:spcAft>
+              <a:defRPr sz="1087" b="0" i="0" lang="zh-CN" dirty="0">
+                <a:solidFill>
+                  <a:srgbClr val="000000"/>
+                </a:solidFill>
+                <a:latin typeface="Times New Roman"/>
+                <a:ea typeface="Times New Roman"/>
+                <a:cs typeface="Times New Roman"/>
+              </a:defRPr>
+            </a:pPr>
+            <a:r>
+              <a:rPr sz="1087" b="0" i="0" lang="zh-CN" dirty="0">
+                <a:solidFill>
+                  <a:srgbClr val="000000"/>
+                </a:solidFill>
+                <a:latin typeface="Times New Roman"/>
+                <a:ea typeface="Times New Roman"/>
+                <a:cs typeface="Times New Roman"/>
+              </a:rPr>
+              <a:t>ϵ</a:t>
+            </a:r>
+          </a:p>
+        </p:txBody>
+      </p:sp>
+      <p:sp>
+        <p:nvSpPr>
+          <p:cNvPr id="243" name="math_step_0_1" descr="Editable text; source id math_step_0_1"/>
+          <p:cNvSpPr txBox="1"/>
+          <p:nvPr/>
+        </p:nvSpPr>
+        <p:spPr>
+          <a:xfrm>
+            <a:off x="1983405" y="4885623"/>
+            <a:ext cx="132354" cy="125863"/>
+          </a:xfrm>
+          <a:prstGeom prst="rect">
+            <a:avLst/>
+          </a:prstGeom>
+          <a:noFill/>
+          <a:effectLst/>
+        </p:spPr>
+        <p:txBody>
+          <a:bodyPr wrap="none" anchor="t" tIns="3836" rIns="0" bIns="0" lIns="3836" anchorCtr="0" vertOverflow="overflow">
+            <a:noAutofit/>
+          </a:bodyPr>
+          <a:lstStyle/>
+          <a:p>
+            <a:pPr algn="l" fontAlgn="base">
+              <a:lnSpc>
+                <a:spcPts val="900"/>
+              </a:lnSpc>
+              <a:spcBef>
+                <a:spcPts val="0"/>
+              </a:spcBef>
+              <a:spcAft>
+                <a:spcPts val="0"/>
+              </a:spcAft>
+              <a:defRPr sz="782" b="0" i="1" lang="zh-CN" dirty="0">
+                <a:solidFill>
+                  <a:srgbClr val="000000"/>
+                </a:solidFill>
+                <a:latin typeface="Times New Roman"/>
+                <a:ea typeface="Times New Roman"/>
+                <a:cs typeface="Times New Roman"/>
+              </a:defRPr>
+            </a:pPr>
+            <a:r>
+              <a:rPr sz="782" b="0" i="1" lang="zh-CN" dirty="0">
+                <a:solidFill>
+                  <a:srgbClr val="000000"/>
+                </a:solidFill>
+                <a:latin typeface="Times New Roman"/>
+                <a:ea typeface="Times New Roman"/>
+                <a:cs typeface="Times New Roman"/>
+              </a:rPr>
+              <a:t>loc</a:t>
+            </a:r>
+          </a:p>
+        </p:txBody>
+      </p:sp>
+      <p:sp>
+        <p:nvSpPr>
+          <p:cNvPr id="244" name="math_step_0_2" descr="Editable text; source id math_step_0_2"/>
+          <p:cNvSpPr txBox="1"/>
+          <p:nvPr/>
+        </p:nvSpPr>
+        <p:spPr>
+          <a:xfrm>
+            <a:off x="1975733" y="4971941"/>
+            <a:ext cx="59463" cy="114745"/>
+          </a:xfrm>
+          <a:prstGeom prst="rect">
+            <a:avLst/>
+          </a:prstGeom>
+          <a:noFill/>
+          <a:effectLst/>
+        </p:spPr>
+        <p:txBody>
+          <a:bodyPr wrap="none" anchor="t" tIns="3836" rIns="0" bIns="0" lIns="3836" anchorCtr="0" vertOverflow="overflow">
+            <a:noAutofit/>
+          </a:bodyPr>
+          <a:lstStyle/>
+          <a:p>
+            <a:pPr algn="l" fontAlgn="base">
+              <a:lnSpc>
+                <a:spcPts val="812"/>
+              </a:lnSpc>
+              <a:spcBef>
+                <a:spcPts val="0"/>
+              </a:spcBef>
+              <a:spcAft>
+                <a:spcPts val="0"/>
+              </a:spcAft>
+              <a:defRPr sz="706" b="1" i="1" lang="zh-CN" dirty="0">
+                <a:solidFill>
+                  <a:srgbClr val="000000"/>
+                </a:solidFill>
+                <a:latin typeface="Times New Roman"/>
+                <a:ea typeface="Times New Roman"/>
+                <a:cs typeface="Times New Roman"/>
+              </a:defRPr>
+            </a:pPr>
+            <a:r>
+              <a:rPr sz="706" b="1" i="1" lang="zh-CN" dirty="0">
+                <a:solidFill>
+                  <a:srgbClr val="000000"/>
+                </a:solidFill>
+                <a:latin typeface="Times New Roman"/>
+                <a:ea typeface="Times New Roman"/>
+                <a:cs typeface="Times New Roman"/>
+              </a:rPr>
+              <a:t>θ</a:t>
+            </a:r>
+          </a:p>
+        </p:txBody>
+      </p:sp>
+      <p:sp>
+        <p:nvSpPr>
+          <p:cNvPr id="245" name="math_step_0_3" descr="Editable text; source id math_step_0_3"/>
+          <p:cNvSpPr txBox="1"/>
+          <p:nvPr/>
+        </p:nvSpPr>
+        <p:spPr>
+          <a:xfrm>
+            <a:off x="2113842" y="4889459"/>
+            <a:ext cx="46036" cy="170335"/>
+          </a:xfrm>
+          <a:prstGeom prst="rect">
+            <a:avLst/>
+          </a:prstGeom>
+          <a:noFill/>
+          <a:effectLst/>
+        </p:spPr>
+        <p:txBody>
+          <a:bodyPr wrap="none" anchor="t" tIns="3836" rIns="0" bIns="0" lIns="3836" anchorCtr="0" vertOverflow="overflow">
+            <a:noAutofit/>
+          </a:bodyPr>
+          <a:lstStyle/>
+          <a:p>
+            <a:pPr algn="l" fontAlgn="base">
+              <a:lnSpc>
+                <a:spcPts val="1250"/>
+              </a:lnSpc>
+              <a:spcBef>
+                <a:spcPts val="0"/>
+              </a:spcBef>
+              <a:spcAft>
+                <a:spcPts val="0"/>
+              </a:spcAft>
+              <a:defRPr sz="1087" b="0" i="0" lang="zh-CN" dirty="0">
+                <a:solidFill>
+                  <a:srgbClr val="000000"/>
+                </a:solidFill>
+                <a:latin typeface="Times New Roman"/>
+                <a:ea typeface="Times New Roman"/>
+                <a:cs typeface="Times New Roman"/>
+              </a:defRPr>
+            </a:pPr>
+            <a:r>
+              <a:rPr sz="1087" b="0" i="0" lang="zh-CN" dirty="0">
+                <a:solidFill>
+                  <a:srgbClr val="000000"/>
+                </a:solidFill>
+                <a:latin typeface="Times New Roman"/>
+                <a:ea typeface="Times New Roman"/>
+                <a:cs typeface="Times New Roman"/>
+              </a:rPr>
+              <a:t>,</a:t>
+            </a:r>
+          </a:p>
+        </p:txBody>
+      </p:sp>
+      <p:sp>
+        <p:nvSpPr>
+          <p:cNvPr id="246" name="math_step_0_4" descr="Editable text; source id math_step_0_4"/>
+          <p:cNvSpPr txBox="1"/>
+          <p:nvPr/>
+        </p:nvSpPr>
+        <p:spPr>
+          <a:xfrm>
+            <a:off x="2167551" y="4897132"/>
+            <a:ext cx="67136" cy="170335"/>
+          </a:xfrm>
+          <a:prstGeom prst="rect">
+            <a:avLst/>
+          </a:prstGeom>
+          <a:noFill/>
+          <a:effectLst/>
+        </p:spPr>
+        <p:txBody>
+          <a:bodyPr wrap="none" anchor="t" tIns="3836" rIns="0" bIns="0" lIns="3836" anchorCtr="0" vertOverflow="overflow">
+            <a:noAutofit/>
+          </a:bodyPr>
+          <a:lstStyle/>
+          <a:p>
+            <a:pPr algn="l" fontAlgn="base">
+              <a:lnSpc>
+                <a:spcPts val="1250"/>
+              </a:lnSpc>
+              <a:spcBef>
+                <a:spcPts val="0"/>
+              </a:spcBef>
+              <a:spcAft>
+                <a:spcPts val="0"/>
+              </a:spcAft>
+              <a:defRPr sz="1087" b="0" i="0" lang="zh-CN" dirty="0">
+                <a:solidFill>
+                  <a:srgbClr val="000000"/>
+                </a:solidFill>
+                <a:latin typeface="Times New Roman"/>
+                <a:ea typeface="Times New Roman"/>
+                <a:cs typeface="Times New Roman"/>
+              </a:defRPr>
+            </a:pPr>
+            <a:r>
+              <a:rPr sz="1087" b="0" i="0" lang="zh-CN" dirty="0">
+                <a:solidFill>
+                  <a:srgbClr val="000000"/>
+                </a:solidFill>
+                <a:latin typeface="Times New Roman"/>
+                <a:ea typeface="Times New Roman"/>
+                <a:cs typeface="Times New Roman"/>
+              </a:rPr>
+              <a:t>ϵ</a:t>
+            </a:r>
+          </a:p>
+        </p:txBody>
+      </p:sp>
+      <p:sp>
+        <p:nvSpPr>
+          <p:cNvPr id="247" name="math_step_0_5" descr="Editable text; source id math_step_0_5"/>
+          <p:cNvSpPr txBox="1"/>
+          <p:nvPr/>
+        </p:nvSpPr>
+        <p:spPr>
+          <a:xfrm>
+            <a:off x="2236606" y="4885623"/>
+            <a:ext cx="130436" cy="125863"/>
+          </a:xfrm>
+          <a:prstGeom prst="rect">
+            <a:avLst/>
+          </a:prstGeom>
+          <a:noFill/>
+          <a:effectLst/>
+        </p:spPr>
+        <p:txBody>
+          <a:bodyPr wrap="none" anchor="t" tIns="3836" rIns="0" bIns="0" lIns="3836" anchorCtr="0" vertOverflow="overflow">
+            <a:noAutofit/>
+          </a:bodyPr>
+          <a:lstStyle/>
+          <a:p>
+            <a:pPr algn="l" fontAlgn="base">
+              <a:lnSpc>
+                <a:spcPts val="900"/>
+              </a:lnSpc>
+              <a:spcBef>
+                <a:spcPts val="0"/>
+              </a:spcBef>
+              <a:spcAft>
+                <a:spcPts val="0"/>
+              </a:spcAft>
+              <a:defRPr sz="782" b="0" i="1" lang="zh-CN" dirty="0">
+                <a:solidFill>
+                  <a:srgbClr val="000000"/>
+                </a:solidFill>
+                <a:latin typeface="Times New Roman"/>
+                <a:ea typeface="Times New Roman"/>
+                <a:cs typeface="Times New Roman"/>
+              </a:defRPr>
+            </a:pPr>
+            <a:r>
+              <a:rPr sz="782" b="0" i="1" lang="zh-CN" dirty="0">
+                <a:solidFill>
+                  <a:srgbClr val="000000"/>
+                </a:solidFill>
+                <a:latin typeface="Times New Roman"/>
+                <a:ea typeface="Times New Roman"/>
+                <a:cs typeface="Times New Roman"/>
+              </a:rPr>
+              <a:t>rot</a:t>
+            </a:r>
+          </a:p>
+        </p:txBody>
+      </p:sp>
+      <p:sp>
+        <p:nvSpPr>
+          <p:cNvPr id="248" name="math_step_0_6" descr="Editable text; source id math_step_0_6"/>
+          <p:cNvSpPr txBox="1"/>
+          <p:nvPr/>
+        </p:nvSpPr>
+        <p:spPr>
+          <a:xfrm>
+            <a:off x="2221261" y="4971941"/>
+            <a:ext cx="59463" cy="114745"/>
+          </a:xfrm>
+          <a:prstGeom prst="rect">
+            <a:avLst/>
+          </a:prstGeom>
+          <a:noFill/>
+          <a:effectLst/>
+        </p:spPr>
+        <p:txBody>
+          <a:bodyPr wrap="none" anchor="t" tIns="3836" rIns="0" bIns="0" lIns="3836" anchorCtr="0" vertOverflow="overflow">
+            <a:noAutofit/>
+          </a:bodyPr>
+          <a:lstStyle/>
+          <a:p>
+            <a:pPr algn="l" fontAlgn="base">
+              <a:lnSpc>
+                <a:spcPts val="812"/>
+              </a:lnSpc>
+              <a:spcBef>
+                <a:spcPts val="0"/>
+              </a:spcBef>
+              <a:spcAft>
+                <a:spcPts val="0"/>
+              </a:spcAft>
+              <a:defRPr sz="706" b="1" i="1" lang="zh-CN" dirty="0">
+                <a:solidFill>
+                  <a:srgbClr val="000000"/>
+                </a:solidFill>
+                <a:latin typeface="Times New Roman"/>
+                <a:ea typeface="Times New Roman"/>
+                <a:cs typeface="Times New Roman"/>
+              </a:defRPr>
+            </a:pPr>
+            <a:r>
+              <a:rPr sz="706" b="1" i="1" lang="zh-CN" dirty="0">
+                <a:solidFill>
+                  <a:srgbClr val="000000"/>
+                </a:solidFill>
+                <a:latin typeface="Times New Roman"/>
+                <a:ea typeface="Times New Roman"/>
+                <a:cs typeface="Times New Roman"/>
+              </a:rPr>
+              <a:t>θ</a:t>
+            </a:r>
+          </a:p>
+        </p:txBody>
+      </p:sp>
+      <p:sp>
+        <p:nvSpPr>
+          <p:cNvPr id="249" name="math_step_1_0" descr="Editable text; source id math_step_1_0"/>
+          <p:cNvSpPr txBox="1"/>
+          <p:nvPr/>
+        </p:nvSpPr>
+        <p:spPr>
+          <a:xfrm>
+            <a:off x="7162512" y="4897132"/>
+            <a:ext cx="67136" cy="170335"/>
+          </a:xfrm>
+          <a:prstGeom prst="rect">
+            <a:avLst/>
+          </a:prstGeom>
+          <a:noFill/>
+          <a:effectLst/>
+        </p:spPr>
+        <p:txBody>
+          <a:bodyPr wrap="none" anchor="t" tIns="3836" rIns="0" bIns="0" lIns="3836" anchorCtr="0" vertOverflow="overflow">
+            <a:noAutofit/>
+          </a:bodyPr>
+          <a:lstStyle/>
+          <a:p>
+            <a:pPr algn="l" fontAlgn="base">
+              <a:lnSpc>
+                <a:spcPts val="1250"/>
+              </a:lnSpc>
+              <a:spcBef>
+                <a:spcPts val="0"/>
+              </a:spcBef>
+              <a:spcAft>
+                <a:spcPts val="0"/>
+              </a:spcAft>
+              <a:defRPr sz="1087" b="0" i="0" lang="zh-CN" dirty="0">
+                <a:solidFill>
+                  <a:srgbClr val="000000"/>
+                </a:solidFill>
+                <a:latin typeface="Times New Roman"/>
+                <a:ea typeface="Times New Roman"/>
+                <a:cs typeface="Times New Roman"/>
+              </a:defRPr>
+            </a:pPr>
+            <a:r>
+              <a:rPr sz="1087" b="0" i="0" lang="zh-CN" dirty="0">
+                <a:solidFill>
+                  <a:srgbClr val="000000"/>
+                </a:solidFill>
+                <a:latin typeface="Times New Roman"/>
+                <a:ea typeface="Times New Roman"/>
+                <a:cs typeface="Times New Roman"/>
+              </a:rPr>
+              <a:t>ϵ</a:t>
+            </a:r>
+          </a:p>
+        </p:txBody>
+      </p:sp>
+      <p:sp>
+        <p:nvSpPr>
+          <p:cNvPr id="250" name="math_step_1_1" descr="Editable text; source id math_step_1_1"/>
+          <p:cNvSpPr txBox="1"/>
+          <p:nvPr/>
+        </p:nvSpPr>
+        <p:spPr>
+          <a:xfrm>
+            <a:off x="7223894" y="4885623"/>
+            <a:ext cx="132354" cy="125863"/>
+          </a:xfrm>
+          <a:prstGeom prst="rect">
+            <a:avLst/>
+          </a:prstGeom>
+          <a:noFill/>
+          <a:effectLst/>
+        </p:spPr>
+        <p:txBody>
+          <a:bodyPr wrap="none" anchor="t" tIns="3836" rIns="0" bIns="0" lIns="3836" anchorCtr="0" vertOverflow="overflow">
+            <a:noAutofit/>
+          </a:bodyPr>
+          <a:lstStyle/>
+          <a:p>
+            <a:pPr algn="l" fontAlgn="base">
+              <a:lnSpc>
+                <a:spcPts val="900"/>
+              </a:lnSpc>
+              <a:spcBef>
+                <a:spcPts val="0"/>
+              </a:spcBef>
+              <a:spcAft>
+                <a:spcPts val="0"/>
+              </a:spcAft>
+              <a:defRPr sz="782" b="0" i="1" lang="zh-CN" dirty="0">
+                <a:solidFill>
+                  <a:srgbClr val="000000"/>
+                </a:solidFill>
+                <a:latin typeface="Times New Roman"/>
+                <a:ea typeface="Times New Roman"/>
+                <a:cs typeface="Times New Roman"/>
+              </a:defRPr>
+            </a:pPr>
+            <a:r>
+              <a:rPr sz="782" b="0" i="1" lang="zh-CN" dirty="0">
+                <a:solidFill>
+                  <a:srgbClr val="000000"/>
+                </a:solidFill>
+                <a:latin typeface="Times New Roman"/>
+                <a:ea typeface="Times New Roman"/>
+                <a:cs typeface="Times New Roman"/>
+              </a:rPr>
+              <a:t>loc</a:t>
+            </a:r>
+          </a:p>
+        </p:txBody>
+      </p:sp>
+      <p:sp>
+        <p:nvSpPr>
+          <p:cNvPr id="251" name="math_step_1_2" descr="Editable text; source id math_step_1_2"/>
+          <p:cNvSpPr txBox="1"/>
+          <p:nvPr/>
+        </p:nvSpPr>
+        <p:spPr>
+          <a:xfrm>
+            <a:off x="7216221" y="4971941"/>
+            <a:ext cx="59463" cy="114745"/>
+          </a:xfrm>
+          <a:prstGeom prst="rect">
+            <a:avLst/>
+          </a:prstGeom>
+          <a:noFill/>
+          <a:effectLst/>
+        </p:spPr>
+        <p:txBody>
+          <a:bodyPr wrap="none" anchor="t" tIns="3836" rIns="0" bIns="0" lIns="3836" anchorCtr="0" vertOverflow="overflow">
+            <a:noAutofit/>
+          </a:bodyPr>
+          <a:lstStyle/>
+          <a:p>
+            <a:pPr algn="l" fontAlgn="base">
+              <a:lnSpc>
+                <a:spcPts val="812"/>
+              </a:lnSpc>
+              <a:spcBef>
+                <a:spcPts val="0"/>
+              </a:spcBef>
+              <a:spcAft>
+                <a:spcPts val="0"/>
+              </a:spcAft>
+              <a:defRPr sz="706" b="1" i="1" lang="zh-CN" dirty="0">
+                <a:solidFill>
+                  <a:srgbClr val="000000"/>
+                </a:solidFill>
+                <a:latin typeface="Times New Roman"/>
+                <a:ea typeface="Times New Roman"/>
+                <a:cs typeface="Times New Roman"/>
+              </a:defRPr>
+            </a:pPr>
+            <a:r>
+              <a:rPr sz="706" b="1" i="1" lang="zh-CN" dirty="0">
+                <a:solidFill>
+                  <a:srgbClr val="000000"/>
+                </a:solidFill>
+                <a:latin typeface="Times New Roman"/>
+                <a:ea typeface="Times New Roman"/>
+                <a:cs typeface="Times New Roman"/>
+              </a:rPr>
+              <a:t>θ</a:t>
+            </a:r>
+          </a:p>
+        </p:txBody>
+      </p:sp>
+      <p:sp>
+        <p:nvSpPr>
+          <p:cNvPr id="252" name="math_step_1_3" descr="Editable text; source id math_step_1_3"/>
+          <p:cNvSpPr txBox="1"/>
+          <p:nvPr/>
+        </p:nvSpPr>
+        <p:spPr>
+          <a:xfrm>
+            <a:off x="7354330" y="4889459"/>
+            <a:ext cx="46036" cy="170335"/>
+          </a:xfrm>
+          <a:prstGeom prst="rect">
+            <a:avLst/>
+          </a:prstGeom>
+          <a:noFill/>
+          <a:effectLst/>
+        </p:spPr>
+        <p:txBody>
+          <a:bodyPr wrap="none" anchor="t" tIns="3836" rIns="0" bIns="0" lIns="3836" anchorCtr="0" vertOverflow="overflow">
+            <a:noAutofit/>
+          </a:bodyPr>
+          <a:lstStyle/>
+          <a:p>
+            <a:pPr algn="l" fontAlgn="base">
+              <a:lnSpc>
+                <a:spcPts val="1250"/>
+              </a:lnSpc>
+              <a:spcBef>
+                <a:spcPts val="0"/>
+              </a:spcBef>
+              <a:spcAft>
+                <a:spcPts val="0"/>
+              </a:spcAft>
+              <a:defRPr sz="1087" b="0" i="0" lang="zh-CN" dirty="0">
+                <a:solidFill>
+                  <a:srgbClr val="000000"/>
+                </a:solidFill>
+                <a:latin typeface="Times New Roman"/>
+                <a:ea typeface="Times New Roman"/>
+                <a:cs typeface="Times New Roman"/>
+              </a:defRPr>
+            </a:pPr>
+            <a:r>
+              <a:rPr sz="1087" b="0" i="0" lang="zh-CN" dirty="0">
+                <a:solidFill>
+                  <a:srgbClr val="000000"/>
+                </a:solidFill>
+                <a:latin typeface="Times New Roman"/>
+                <a:ea typeface="Times New Roman"/>
+                <a:cs typeface="Times New Roman"/>
+              </a:rPr>
+              <a:t>,</a:t>
+            </a:r>
+          </a:p>
+        </p:txBody>
+      </p:sp>
+      <p:sp>
+        <p:nvSpPr>
+          <p:cNvPr id="253" name="math_step_1_4" descr="Editable text; source id math_step_1_4"/>
+          <p:cNvSpPr txBox="1"/>
+          <p:nvPr/>
+        </p:nvSpPr>
+        <p:spPr>
+          <a:xfrm>
+            <a:off x="7408040" y="4897132"/>
+            <a:ext cx="67136" cy="170335"/>
+          </a:xfrm>
+          <a:prstGeom prst="rect">
+            <a:avLst/>
+          </a:prstGeom>
+          <a:noFill/>
+          <a:effectLst/>
+        </p:spPr>
+        <p:txBody>
+          <a:bodyPr wrap="none" anchor="t" tIns="3836" rIns="0" bIns="0" lIns="3836" anchorCtr="0" vertOverflow="overflow">
+            <a:noAutofit/>
+          </a:bodyPr>
+          <a:lstStyle/>
+          <a:p>
+            <a:pPr algn="l" fontAlgn="base">
+              <a:lnSpc>
+                <a:spcPts val="1250"/>
+              </a:lnSpc>
+              <a:spcBef>
+                <a:spcPts val="0"/>
+              </a:spcBef>
+              <a:spcAft>
+                <a:spcPts val="0"/>
+              </a:spcAft>
+              <a:defRPr sz="1087" b="0" i="0" lang="zh-CN" dirty="0">
+                <a:solidFill>
+                  <a:srgbClr val="000000"/>
+                </a:solidFill>
+                <a:latin typeface="Times New Roman"/>
+                <a:ea typeface="Times New Roman"/>
+                <a:cs typeface="Times New Roman"/>
+              </a:defRPr>
+            </a:pPr>
+            <a:r>
+              <a:rPr sz="1087" b="0" i="0" lang="zh-CN" dirty="0">
+                <a:solidFill>
+                  <a:srgbClr val="000000"/>
+                </a:solidFill>
+                <a:latin typeface="Times New Roman"/>
+                <a:ea typeface="Times New Roman"/>
+                <a:cs typeface="Times New Roman"/>
+              </a:rPr>
+              <a:t>ϵ</a:t>
+            </a:r>
+          </a:p>
+        </p:txBody>
+      </p:sp>
+      <p:sp>
+        <p:nvSpPr>
+          <p:cNvPr id="254" name="math_step_1_5" descr="Editable text; source id math_step_1_5"/>
+          <p:cNvSpPr txBox="1"/>
+          <p:nvPr/>
+        </p:nvSpPr>
+        <p:spPr>
+          <a:xfrm>
+            <a:off x="7477094" y="4885623"/>
+            <a:ext cx="130436" cy="125863"/>
+          </a:xfrm>
+          <a:prstGeom prst="rect">
+            <a:avLst/>
+          </a:prstGeom>
+          <a:noFill/>
+          <a:effectLst/>
+        </p:spPr>
+        <p:txBody>
+          <a:bodyPr wrap="none" anchor="t" tIns="3836" rIns="0" bIns="0" lIns="3836" anchorCtr="0" vertOverflow="overflow">
+            <a:noAutofit/>
+          </a:bodyPr>
+          <a:lstStyle/>
+          <a:p>
+            <a:pPr algn="l" fontAlgn="base">
+              <a:lnSpc>
+                <a:spcPts val="900"/>
+              </a:lnSpc>
+              <a:spcBef>
+                <a:spcPts val="0"/>
+              </a:spcBef>
+              <a:spcAft>
+                <a:spcPts val="0"/>
+              </a:spcAft>
+              <a:defRPr sz="782" b="0" i="1" lang="zh-CN" dirty="0">
+                <a:solidFill>
+                  <a:srgbClr val="000000"/>
+                </a:solidFill>
+                <a:latin typeface="Times New Roman"/>
+                <a:ea typeface="Times New Roman"/>
+                <a:cs typeface="Times New Roman"/>
+              </a:defRPr>
+            </a:pPr>
+            <a:r>
+              <a:rPr sz="782" b="0" i="1" lang="zh-CN" dirty="0">
+                <a:solidFill>
+                  <a:srgbClr val="000000"/>
+                </a:solidFill>
+                <a:latin typeface="Times New Roman"/>
+                <a:ea typeface="Times New Roman"/>
+                <a:cs typeface="Times New Roman"/>
+              </a:rPr>
+              <a:t>rot</a:t>
+            </a:r>
+          </a:p>
+        </p:txBody>
+      </p:sp>
+      <p:sp>
+        <p:nvSpPr>
+          <p:cNvPr id="255" name="math_step_1_6" descr="Editable text; source id math_step_1_6"/>
+          <p:cNvSpPr txBox="1"/>
+          <p:nvPr/>
+        </p:nvSpPr>
+        <p:spPr>
+          <a:xfrm>
+            <a:off x="7461749" y="4971941"/>
+            <a:ext cx="59463" cy="114745"/>
+          </a:xfrm>
+          <a:prstGeom prst="rect">
+            <a:avLst/>
+          </a:prstGeom>
+          <a:noFill/>
+          <a:effectLst/>
+        </p:spPr>
+        <p:txBody>
+          <a:bodyPr wrap="none" anchor="t" tIns="3836" rIns="0" bIns="0" lIns="3836" anchorCtr="0" vertOverflow="overflow">
+            <a:noAutofit/>
+          </a:bodyPr>
+          <a:lstStyle/>
+          <a:p>
+            <a:pPr algn="l" fontAlgn="base">
+              <a:lnSpc>
+                <a:spcPts val="812"/>
+              </a:lnSpc>
+              <a:spcBef>
+                <a:spcPts val="0"/>
+              </a:spcBef>
+              <a:spcAft>
+                <a:spcPts val="0"/>
+              </a:spcAft>
+              <a:defRPr sz="706" b="1" i="1" lang="zh-CN" dirty="0">
+                <a:solidFill>
+                  <a:srgbClr val="000000"/>
+                </a:solidFill>
+                <a:latin typeface="Times New Roman"/>
+                <a:ea typeface="Times New Roman"/>
+                <a:cs typeface="Times New Roman"/>
+              </a:defRPr>
+            </a:pPr>
+            <a:r>
+              <a:rPr sz="706" b="1" i="1" lang="zh-CN" dirty="0">
+                <a:solidFill>
+                  <a:srgbClr val="000000"/>
+                </a:solidFill>
+                <a:latin typeface="Times New Roman"/>
+                <a:ea typeface="Times New Roman"/>
+                <a:cs typeface="Times New Roman"/>
+              </a:rPr>
+              <a:t>θ</a:t>
+            </a:r>
+          </a:p>
+        </p:txBody>
+      </p:sp>
+      <p:sp>
+        <p:nvSpPr>
+          <p:cNvPr id="256" name="math_step_2_0" descr="Editable text; source id math_step_2_0"/>
+          <p:cNvSpPr txBox="1"/>
+          <p:nvPr/>
+        </p:nvSpPr>
+        <p:spPr>
+          <a:xfrm>
+            <a:off x="9502700" y="4897132"/>
+            <a:ext cx="67136" cy="170335"/>
+          </a:xfrm>
+          <a:prstGeom prst="rect">
+            <a:avLst/>
+          </a:prstGeom>
+          <a:noFill/>
+          <a:effectLst/>
+        </p:spPr>
+        <p:txBody>
+          <a:bodyPr wrap="none" anchor="t" tIns="3836" rIns="0" bIns="0" lIns="3836" anchorCtr="0" vertOverflow="overflow">
+            <a:noAutofit/>
+          </a:bodyPr>
+          <a:lstStyle/>
+          <a:p>
+            <a:pPr algn="l" fontAlgn="base">
+              <a:lnSpc>
+                <a:spcPts val="1250"/>
+              </a:lnSpc>
+              <a:spcBef>
+                <a:spcPts val="0"/>
+              </a:spcBef>
+              <a:spcAft>
+                <a:spcPts val="0"/>
+              </a:spcAft>
+              <a:defRPr sz="1087" b="0" i="0" lang="zh-CN" dirty="0">
+                <a:solidFill>
+                  <a:srgbClr val="000000"/>
+                </a:solidFill>
+                <a:latin typeface="Times New Roman"/>
+                <a:ea typeface="Times New Roman"/>
+                <a:cs typeface="Times New Roman"/>
+              </a:defRPr>
+            </a:pPr>
+            <a:r>
+              <a:rPr sz="1087" b="0" i="0" lang="zh-CN" dirty="0">
+                <a:solidFill>
+                  <a:srgbClr val="000000"/>
+                </a:solidFill>
+                <a:latin typeface="Times New Roman"/>
+                <a:ea typeface="Times New Roman"/>
+                <a:cs typeface="Times New Roman"/>
+              </a:rPr>
+              <a:t>ϵ</a:t>
+            </a:r>
+          </a:p>
+        </p:txBody>
+      </p:sp>
+      <p:sp>
+        <p:nvSpPr>
+          <p:cNvPr id="257" name="math_step_2_1" descr="Editable text; source id math_step_2_1"/>
+          <p:cNvSpPr txBox="1"/>
+          <p:nvPr/>
+        </p:nvSpPr>
+        <p:spPr>
+          <a:xfrm>
+            <a:off x="9564082" y="4885623"/>
+            <a:ext cx="132354" cy="125863"/>
+          </a:xfrm>
+          <a:prstGeom prst="rect">
+            <a:avLst/>
+          </a:prstGeom>
+          <a:noFill/>
+          <a:effectLst/>
+        </p:spPr>
+        <p:txBody>
+          <a:bodyPr wrap="none" anchor="t" tIns="3836" rIns="0" bIns="0" lIns="3836" anchorCtr="0" vertOverflow="overflow">
+            <a:noAutofit/>
+          </a:bodyPr>
+          <a:lstStyle/>
+          <a:p>
+            <a:pPr algn="l" fontAlgn="base">
+              <a:lnSpc>
+                <a:spcPts val="900"/>
+              </a:lnSpc>
+              <a:spcBef>
+                <a:spcPts val="0"/>
+              </a:spcBef>
+              <a:spcAft>
+                <a:spcPts val="0"/>
+              </a:spcAft>
+              <a:defRPr sz="782" b="0" i="1" lang="zh-CN" dirty="0">
+                <a:solidFill>
+                  <a:srgbClr val="000000"/>
+                </a:solidFill>
+                <a:latin typeface="Times New Roman"/>
+                <a:ea typeface="Times New Roman"/>
+                <a:cs typeface="Times New Roman"/>
+              </a:defRPr>
+            </a:pPr>
+            <a:r>
+              <a:rPr sz="782" b="0" i="1" lang="zh-CN" dirty="0">
+                <a:solidFill>
+                  <a:srgbClr val="000000"/>
+                </a:solidFill>
+                <a:latin typeface="Times New Roman"/>
+                <a:ea typeface="Times New Roman"/>
+                <a:cs typeface="Times New Roman"/>
+              </a:rPr>
+              <a:t>loc</a:t>
+            </a:r>
+          </a:p>
+        </p:txBody>
+      </p:sp>
+      <p:sp>
+        <p:nvSpPr>
+          <p:cNvPr id="258" name="math_step_2_2" descr="Editable text; source id math_step_2_2"/>
+          <p:cNvSpPr txBox="1"/>
+          <p:nvPr/>
+        </p:nvSpPr>
+        <p:spPr>
+          <a:xfrm>
+            <a:off x="9556410" y="4971941"/>
+            <a:ext cx="59463" cy="114745"/>
+          </a:xfrm>
+          <a:prstGeom prst="rect">
+            <a:avLst/>
+          </a:prstGeom>
+          <a:noFill/>
+          <a:effectLst/>
+        </p:spPr>
+        <p:txBody>
+          <a:bodyPr wrap="none" anchor="t" tIns="3836" rIns="0" bIns="0" lIns="3836" anchorCtr="0" vertOverflow="overflow">
+            <a:noAutofit/>
+          </a:bodyPr>
+          <a:lstStyle/>
+          <a:p>
+            <a:pPr algn="l" fontAlgn="base">
+              <a:lnSpc>
+                <a:spcPts val="812"/>
+              </a:lnSpc>
+              <a:spcBef>
+                <a:spcPts val="0"/>
+              </a:spcBef>
+              <a:spcAft>
+                <a:spcPts val="0"/>
+              </a:spcAft>
+              <a:defRPr sz="706" b="1" i="1" lang="zh-CN" dirty="0">
+                <a:solidFill>
+                  <a:srgbClr val="000000"/>
+                </a:solidFill>
+                <a:latin typeface="Times New Roman"/>
+                <a:ea typeface="Times New Roman"/>
+                <a:cs typeface="Times New Roman"/>
+              </a:defRPr>
+            </a:pPr>
+            <a:r>
+              <a:rPr sz="706" b="1" i="1" lang="zh-CN" dirty="0">
+                <a:solidFill>
+                  <a:srgbClr val="000000"/>
+                </a:solidFill>
+                <a:latin typeface="Times New Roman"/>
+                <a:ea typeface="Times New Roman"/>
+                <a:cs typeface="Times New Roman"/>
+              </a:rPr>
+              <a:t>θ</a:t>
+            </a:r>
+          </a:p>
+        </p:txBody>
+      </p:sp>
+      <p:sp>
+        <p:nvSpPr>
+          <p:cNvPr id="259" name="math_step_2_3" descr="Editable text; source id math_step_2_3"/>
+          <p:cNvSpPr txBox="1"/>
+          <p:nvPr/>
+        </p:nvSpPr>
+        <p:spPr>
+          <a:xfrm>
+            <a:off x="9694519" y="4889459"/>
+            <a:ext cx="46036" cy="170335"/>
+          </a:xfrm>
+          <a:prstGeom prst="rect">
+            <a:avLst/>
+          </a:prstGeom>
+          <a:noFill/>
+          <a:effectLst/>
+        </p:spPr>
+        <p:txBody>
+          <a:bodyPr wrap="none" anchor="t" tIns="3836" rIns="0" bIns="0" lIns="3836" anchorCtr="0" vertOverflow="overflow">
+            <a:noAutofit/>
+          </a:bodyPr>
+          <a:lstStyle/>
+          <a:p>
+            <a:pPr algn="l" fontAlgn="base">
+              <a:lnSpc>
+                <a:spcPts val="1250"/>
+              </a:lnSpc>
+              <a:spcBef>
+                <a:spcPts val="0"/>
+              </a:spcBef>
+              <a:spcAft>
+                <a:spcPts val="0"/>
+              </a:spcAft>
+              <a:defRPr sz="1087" b="0" i="0" lang="zh-CN" dirty="0">
+                <a:solidFill>
+                  <a:srgbClr val="000000"/>
+                </a:solidFill>
+                <a:latin typeface="Times New Roman"/>
+                <a:ea typeface="Times New Roman"/>
+                <a:cs typeface="Times New Roman"/>
+              </a:defRPr>
+            </a:pPr>
+            <a:r>
+              <a:rPr sz="1087" b="0" i="0" lang="zh-CN" dirty="0">
+                <a:solidFill>
+                  <a:srgbClr val="000000"/>
+                </a:solidFill>
+                <a:latin typeface="Times New Roman"/>
+                <a:ea typeface="Times New Roman"/>
+                <a:cs typeface="Times New Roman"/>
+              </a:rPr>
+              <a:t>,</a:t>
+            </a:r>
+          </a:p>
+        </p:txBody>
+      </p:sp>
+      <p:sp>
+        <p:nvSpPr>
+          <p:cNvPr id="260" name="math_step_2_4" descr="Editable text; source id math_step_2_4"/>
+          <p:cNvSpPr txBox="1"/>
+          <p:nvPr/>
+        </p:nvSpPr>
+        <p:spPr>
+          <a:xfrm>
+            <a:off x="9748228" y="4897132"/>
+            <a:ext cx="67136" cy="170335"/>
+          </a:xfrm>
+          <a:prstGeom prst="rect">
+            <a:avLst/>
+          </a:prstGeom>
+          <a:noFill/>
+          <a:effectLst/>
+        </p:spPr>
+        <p:txBody>
+          <a:bodyPr wrap="none" anchor="t" tIns="3836" rIns="0" bIns="0" lIns="3836" anchorCtr="0" vertOverflow="overflow">
+            <a:noAutofit/>
+          </a:bodyPr>
+          <a:lstStyle/>
+          <a:p>
+            <a:pPr algn="l" fontAlgn="base">
+              <a:lnSpc>
+                <a:spcPts val="1250"/>
+              </a:lnSpc>
+              <a:spcBef>
+                <a:spcPts val="0"/>
+              </a:spcBef>
+              <a:spcAft>
+                <a:spcPts val="0"/>
+              </a:spcAft>
+              <a:defRPr sz="1087" b="0" i="0" lang="zh-CN" dirty="0">
+                <a:solidFill>
+                  <a:srgbClr val="000000"/>
+                </a:solidFill>
+                <a:latin typeface="Times New Roman"/>
+                <a:ea typeface="Times New Roman"/>
+                <a:cs typeface="Times New Roman"/>
+              </a:defRPr>
+            </a:pPr>
+            <a:r>
+              <a:rPr sz="1087" b="0" i="0" lang="zh-CN" dirty="0">
+                <a:solidFill>
+                  <a:srgbClr val="000000"/>
+                </a:solidFill>
+                <a:latin typeface="Times New Roman"/>
+                <a:ea typeface="Times New Roman"/>
+                <a:cs typeface="Times New Roman"/>
+              </a:rPr>
+              <a:t>ϵ</a:t>
+            </a:r>
+          </a:p>
+        </p:txBody>
+      </p:sp>
+      <p:sp>
+        <p:nvSpPr>
+          <p:cNvPr id="261" name="math_step_2_5" descr="Editable text; source id math_step_2_5"/>
+          <p:cNvSpPr txBox="1"/>
+          <p:nvPr/>
+        </p:nvSpPr>
+        <p:spPr>
+          <a:xfrm>
+            <a:off x="9817283" y="4885623"/>
+            <a:ext cx="130436" cy="125863"/>
+          </a:xfrm>
+          <a:prstGeom prst="rect">
+            <a:avLst/>
+          </a:prstGeom>
+          <a:noFill/>
+          <a:effectLst/>
+        </p:spPr>
+        <p:txBody>
+          <a:bodyPr wrap="none" anchor="t" tIns="3836" rIns="0" bIns="0" lIns="3836" anchorCtr="0" vertOverflow="overflow">
+            <a:noAutofit/>
+          </a:bodyPr>
+          <a:lstStyle/>
+          <a:p>
+            <a:pPr algn="l" fontAlgn="base">
+              <a:lnSpc>
+                <a:spcPts val="900"/>
+              </a:lnSpc>
+              <a:spcBef>
+                <a:spcPts val="0"/>
+              </a:spcBef>
+              <a:spcAft>
+                <a:spcPts val="0"/>
+              </a:spcAft>
+              <a:defRPr sz="782" b="0" i="1" lang="zh-CN" dirty="0">
+                <a:solidFill>
+                  <a:srgbClr val="000000"/>
+                </a:solidFill>
+                <a:latin typeface="Times New Roman"/>
+                <a:ea typeface="Times New Roman"/>
+                <a:cs typeface="Times New Roman"/>
+              </a:defRPr>
+            </a:pPr>
+            <a:r>
+              <a:rPr sz="782" b="0" i="1" lang="zh-CN" dirty="0">
+                <a:solidFill>
+                  <a:srgbClr val="000000"/>
+                </a:solidFill>
+                <a:latin typeface="Times New Roman"/>
+                <a:ea typeface="Times New Roman"/>
+                <a:cs typeface="Times New Roman"/>
+              </a:rPr>
+              <a:t>rot</a:t>
+            </a:r>
+          </a:p>
+        </p:txBody>
+      </p:sp>
+      <p:sp>
+        <p:nvSpPr>
+          <p:cNvPr id="262" name="math_step_2_6" descr="Editable text; source id math_step_2_6"/>
+          <p:cNvSpPr txBox="1"/>
+          <p:nvPr/>
+        </p:nvSpPr>
+        <p:spPr>
+          <a:xfrm>
+            <a:off x="9801938" y="4971941"/>
+            <a:ext cx="59463" cy="114745"/>
+          </a:xfrm>
+          <a:prstGeom prst="rect">
+            <a:avLst/>
+          </a:prstGeom>
+          <a:noFill/>
+          <a:effectLst/>
+        </p:spPr>
+        <p:txBody>
+          <a:bodyPr wrap="none" anchor="t" tIns="3836" rIns="0" bIns="0" lIns="3836" anchorCtr="0" vertOverflow="overflow">
+            <a:noAutofit/>
+          </a:bodyPr>
+          <a:lstStyle/>
+          <a:p>
+            <a:pPr algn="l" fontAlgn="base">
+              <a:lnSpc>
+                <a:spcPts val="812"/>
+              </a:lnSpc>
+              <a:spcBef>
+                <a:spcPts val="0"/>
+              </a:spcBef>
+              <a:spcAft>
+                <a:spcPts val="0"/>
+              </a:spcAft>
+              <a:defRPr sz="706" b="1" i="1" lang="zh-CN" dirty="0">
+                <a:solidFill>
+                  <a:srgbClr val="000000"/>
+                </a:solidFill>
+                <a:latin typeface="Times New Roman"/>
+                <a:ea typeface="Times New Roman"/>
+                <a:cs typeface="Times New Roman"/>
+              </a:defRPr>
+            </a:pPr>
+            <a:r>
+              <a:rPr sz="706" b="1" i="1" lang="zh-CN" dirty="0">
+                <a:solidFill>
+                  <a:srgbClr val="000000"/>
+                </a:solidFill>
+                <a:latin typeface="Times New Roman"/>
+                <a:ea typeface="Times New Roman"/>
+                <a:cs typeface="Times New Roman"/>
+              </a:rPr>
+              <a:t>θ</a:t>
+            </a:r>
+          </a:p>
+        </p:txBody>
+      </p:sp>
       <p:cxnSp>
         <p:nvCxnSpPr>
-          <p:cNvPr id="235" name="ice_image_0" descr="Editable line; source id ice_image_0"/>
+          <p:cNvPr id="263" name="ice_image_0" descr="Editable line; source id ice_image_0"/>
           <p:cNvCxnSpPr/>
           <p:nvPr/>
         </p:nvCxnSpPr>
@@ -16346,7 +17859,7 @@
       </p:cxnSp>
       <p:cxnSp>
         <p:nvCxnSpPr>
-          <p:cNvPr id="236" name="ice_image_0_0_-1" descr="Editable line; source id ice_image_0_0_-1"/>
+          <p:cNvPr id="264" name="ice_image_0_0_-1" descr="Editable line; source id ice_image_0_0_-1"/>
           <p:cNvCxnSpPr/>
           <p:nvPr/>
         </p:nvCxnSpPr>
@@ -16382,7 +17895,7 @@
       </p:cxnSp>
       <p:cxnSp>
         <p:nvCxnSpPr>
-          <p:cNvPr id="237" name="ice_image_0_0_1" descr="Editable line; source id ice_image_0_0_1"/>
+          <p:cNvPr id="265" name="ice_image_0_0_1" descr="Editable line; source id ice_image_0_0_1"/>
           <p:cNvCxnSpPr/>
           <p:nvPr/>
         </p:nvCxnSpPr>
@@ -16418,7 +17931,7 @@
       </p:cxnSp>
       <p:cxnSp>
         <p:nvCxnSpPr>
-          <p:cNvPr id="238" name="ice_image_0_1_-1" descr="Editable line; source id ice_image_0_1_-1"/>
+          <p:cNvPr id="266" name="ice_image_0_1_-1" descr="Editable line; source id ice_image_0_1_-1"/>
           <p:cNvCxnSpPr/>
           <p:nvPr/>
         </p:nvCxnSpPr>
@@ -16454,7 +17967,7 @@
       </p:cxnSp>
       <p:cxnSp>
         <p:nvCxnSpPr>
-          <p:cNvPr id="239" name="ice_image_0_1_1" descr="Editable line; source id ice_image_0_1_1"/>
+          <p:cNvPr id="267" name="ice_image_0_1_1" descr="Editable line; source id ice_image_0_1_1"/>
           <p:cNvCxnSpPr/>
           <p:nvPr/>
         </p:nvCxnSpPr>
@@ -16490,7 +18003,7 @@
       </p:cxnSp>
       <p:cxnSp>
         <p:nvCxnSpPr>
-          <p:cNvPr id="240" name="ice_image_1" descr="Editable line; source id ice_image_1"/>
+          <p:cNvPr id="268" name="ice_image_1" descr="Editable line; source id ice_image_1"/>
           <p:cNvCxnSpPr/>
           <p:nvPr/>
         </p:nvCxnSpPr>
@@ -16526,7 +18039,7 @@
       </p:cxnSp>
       <p:cxnSp>
         <p:nvCxnSpPr>
-          <p:cNvPr id="241" name="ice_image_1_0_-1" descr="Editable line; source id ice_image_1_0_-1"/>
+          <p:cNvPr id="269" name="ice_image_1_0_-1" descr="Editable line; source id ice_image_1_0_-1"/>
           <p:cNvCxnSpPr/>
           <p:nvPr/>
         </p:nvCxnSpPr>
@@ -16562,7 +18075,7 @@
       </p:cxnSp>
       <p:cxnSp>
         <p:nvCxnSpPr>
-          <p:cNvPr id="242" name="ice_image_1_0_1" descr="Editable line; source id ice_image_1_0_1"/>
+          <p:cNvPr id="270" name="ice_image_1_0_1" descr="Editable line; source id ice_image_1_0_1"/>
           <p:cNvCxnSpPr/>
           <p:nvPr/>
         </p:nvCxnSpPr>
@@ -16598,7 +18111,7 @@
       </p:cxnSp>
       <p:cxnSp>
         <p:nvCxnSpPr>
-          <p:cNvPr id="243" name="ice_image_1_1_-1" descr="Editable line; source id ice_image_1_1_-1"/>
+          <p:cNvPr id="271" name="ice_image_1_1_-1" descr="Editable line; source id ice_image_1_1_-1"/>
           <p:cNvCxnSpPr/>
           <p:nvPr/>
         </p:nvCxnSpPr>
@@ -16634,7 +18147,7 @@
       </p:cxnSp>
       <p:cxnSp>
         <p:nvCxnSpPr>
-          <p:cNvPr id="244" name="ice_image_1_1_1" descr="Editable line; source id ice_image_1_1_1"/>
+          <p:cNvPr id="272" name="ice_image_1_1_1" descr="Editable line; source id ice_image_1_1_1"/>
           <p:cNvCxnSpPr/>
           <p:nvPr/>
         </p:nvCxnSpPr>
@@ -16670,7 +18183,7 @@
       </p:cxnSp>
       <p:cxnSp>
         <p:nvCxnSpPr>
-          <p:cNvPr id="245" name="ice_image_2" descr="Editable line; source id ice_image_2"/>
+          <p:cNvPr id="273" name="ice_image_2" descr="Editable line; source id ice_image_2"/>
           <p:cNvCxnSpPr/>
           <p:nvPr/>
         </p:nvCxnSpPr>
@@ -16706,7 +18219,7 @@
       </p:cxnSp>
       <p:cxnSp>
         <p:nvCxnSpPr>
-          <p:cNvPr id="246" name="ice_image_2_0_-1" descr="Editable line; source id ice_image_2_0_-1"/>
+          <p:cNvPr id="274" name="ice_image_2_0_-1" descr="Editable line; source id ice_image_2_0_-1"/>
           <p:cNvCxnSpPr/>
           <p:nvPr/>
         </p:nvCxnSpPr>
@@ -16742,7 +18255,7 @@
       </p:cxnSp>
       <p:cxnSp>
         <p:nvCxnSpPr>
-          <p:cNvPr id="247" name="ice_image_2_0_1" descr="Editable line; source id ice_image_2_0_1"/>
+          <p:cNvPr id="275" name="ice_image_2_0_1" descr="Editable line; source id ice_image_2_0_1"/>
           <p:cNvCxnSpPr/>
           <p:nvPr/>
         </p:nvCxnSpPr>
@@ -16778,7 +18291,7 @@
       </p:cxnSp>
       <p:cxnSp>
         <p:nvCxnSpPr>
-          <p:cNvPr id="248" name="ice_image_2_1_-1" descr="Editable line; source id ice_image_2_1_-1"/>
+          <p:cNvPr id="276" name="ice_image_2_1_-1" descr="Editable line; source id ice_image_2_1_-1"/>
           <p:cNvCxnSpPr/>
           <p:nvPr/>
         </p:nvCxnSpPr>
@@ -16814,7 +18327,7 @@
       </p:cxnSp>
       <p:cxnSp>
         <p:nvCxnSpPr>
-          <p:cNvPr id="249" name="ice_image_2_1_1" descr="Editable line; source id ice_image_2_1_1"/>
+          <p:cNvPr id="277" name="ice_image_2_1_1" descr="Editable line; source id ice_image_2_1_1"/>
           <p:cNvCxnSpPr/>
           <p:nvPr/>
         </p:nvCxnSpPr>
@@ -16850,7 +18363,7 @@
       </p:cxnSp>
       <p:cxnSp>
         <p:nvCxnSpPr>
-          <p:cNvPr id="250" name="ice_image_3" descr="Editable line; source id ice_image_3"/>
+          <p:cNvPr id="278" name="ice_image_3" descr="Editable line; source id ice_image_3"/>
           <p:cNvCxnSpPr/>
           <p:nvPr/>
         </p:nvCxnSpPr>
@@ -16886,7 +18399,7 @@
       </p:cxnSp>
       <p:cxnSp>
         <p:nvCxnSpPr>
-          <p:cNvPr id="251" name="ice_image_3_0_-1" descr="Editable line; source id ice_image_3_0_-1"/>
+          <p:cNvPr id="279" name="ice_image_3_0_-1" descr="Editable line; source id ice_image_3_0_-1"/>
           <p:cNvCxnSpPr/>
           <p:nvPr/>
         </p:nvCxnSpPr>
@@ -16922,7 +18435,7 @@
       </p:cxnSp>
       <p:cxnSp>
         <p:nvCxnSpPr>
-          <p:cNvPr id="252" name="ice_image_3_0_1" descr="Editable line; source id ice_image_3_0_1"/>
+          <p:cNvPr id="280" name="ice_image_3_0_1" descr="Editable line; source id ice_image_3_0_1"/>
           <p:cNvCxnSpPr/>
           <p:nvPr/>
         </p:nvCxnSpPr>
@@ -16958,7 +18471,7 @@
       </p:cxnSp>
       <p:cxnSp>
         <p:nvCxnSpPr>
-          <p:cNvPr id="253" name="ice_image_3_1_-1" descr="Editable line; source id ice_image_3_1_-1"/>
+          <p:cNvPr id="281" name="ice_image_3_1_-1" descr="Editable line; source id ice_image_3_1_-1"/>
           <p:cNvCxnSpPr/>
           <p:nvPr/>
         </p:nvCxnSpPr>
@@ -16994,7 +18507,7 @@
       </p:cxnSp>
       <p:cxnSp>
         <p:nvCxnSpPr>
-          <p:cNvPr id="254" name="ice_image_3_1_1" descr="Editable line; source id ice_image_3_1_1"/>
+          <p:cNvPr id="282" name="ice_image_3_1_1" descr="Editable line; source id ice_image_3_1_1"/>
           <p:cNvCxnSpPr/>
           <p:nvPr/>
         </p:nvCxnSpPr>
@@ -17030,7 +18543,7 @@
       </p:cxnSp>
       <p:cxnSp>
         <p:nvCxnSpPr>
-          <p:cNvPr id="255" name="ice_image_4" descr="Editable line; source id ice_image_4"/>
+          <p:cNvPr id="283" name="ice_image_4" descr="Editable line; source id ice_image_4"/>
           <p:cNvCxnSpPr/>
           <p:nvPr/>
         </p:nvCxnSpPr>
@@ -17066,7 +18579,7 @@
       </p:cxnSp>
       <p:cxnSp>
         <p:nvCxnSpPr>
-          <p:cNvPr id="256" name="ice_image_4_0_-1" descr="Editable line; source id ice_image_4_0_-1"/>
+          <p:cNvPr id="284" name="ice_image_4_0_-1" descr="Editable line; source id ice_image_4_0_-1"/>
           <p:cNvCxnSpPr/>
           <p:nvPr/>
         </p:nvCxnSpPr>
@@ -17102,7 +18615,7 @@
       </p:cxnSp>
       <p:cxnSp>
         <p:nvCxnSpPr>
-          <p:cNvPr id="257" name="ice_image_4_0_1" descr="Editable line; source id ice_image_4_0_1"/>
+          <p:cNvPr id="285" name="ice_image_4_0_1" descr="Editable line; source id ice_image_4_0_1"/>
           <p:cNvCxnSpPr/>
           <p:nvPr/>
         </p:nvCxnSpPr>
@@ -17138,7 +18651,7 @@
       </p:cxnSp>
       <p:cxnSp>
         <p:nvCxnSpPr>
-          <p:cNvPr id="258" name="ice_image_4_1_-1" descr="Editable line; source id ice_image_4_1_-1"/>
+          <p:cNvPr id="286" name="ice_image_4_1_-1" descr="Editable line; source id ice_image_4_1_-1"/>
           <p:cNvCxnSpPr/>
           <p:nvPr/>
         </p:nvCxnSpPr>
@@ -17174,7 +18687,7 @@
       </p:cxnSp>
       <p:cxnSp>
         <p:nvCxnSpPr>
-          <p:cNvPr id="259" name="ice_image_4_1_1" descr="Editable line; source id ice_image_4_1_1"/>
+          <p:cNvPr id="287" name="ice_image_4_1_1" descr="Editable line; source id ice_image_4_1_1"/>
           <p:cNvCxnSpPr/>
           <p:nvPr/>
         </p:nvCxnSpPr>
@@ -17210,7 +18723,7 @@
       </p:cxnSp>
       <p:cxnSp>
         <p:nvCxnSpPr>
-          <p:cNvPr id="260" name="ice_image_5" descr="Editable line; source id ice_image_5"/>
+          <p:cNvPr id="288" name="ice_image_5" descr="Editable line; source id ice_image_5"/>
           <p:cNvCxnSpPr/>
           <p:nvPr/>
         </p:nvCxnSpPr>
@@ -17246,7 +18759,7 @@
       </p:cxnSp>
       <p:cxnSp>
         <p:nvCxnSpPr>
-          <p:cNvPr id="261" name="ice_image_5_0_-1" descr="Editable line; source id ice_image_5_0_-1"/>
+          <p:cNvPr id="289" name="ice_image_5_0_-1" descr="Editable line; source id ice_image_5_0_-1"/>
           <p:cNvCxnSpPr/>
           <p:nvPr/>
         </p:nvCxnSpPr>
@@ -17282,7 +18795,7 @@
       </p:cxnSp>
       <p:cxnSp>
         <p:nvCxnSpPr>
-          <p:cNvPr id="262" name="ice_image_5_0_1" descr="Editable line; source id ice_image_5_0_1"/>
+          <p:cNvPr id="290" name="ice_image_5_0_1" descr="Editable line; source id ice_image_5_0_1"/>
           <p:cNvCxnSpPr/>
           <p:nvPr/>
         </p:nvCxnSpPr>
@@ -17318,7 +18831,7 @@
       </p:cxnSp>
       <p:cxnSp>
         <p:nvCxnSpPr>
-          <p:cNvPr id="263" name="ice_image_5_1_-1" descr="Editable line; source id ice_image_5_1_-1"/>
+          <p:cNvPr id="291" name="ice_image_5_1_-1" descr="Editable line; source id ice_image_5_1_-1"/>
           <p:cNvCxnSpPr/>
           <p:nvPr/>
         </p:nvCxnSpPr>
@@ -17354,7 +18867,7 @@
       </p:cxnSp>
       <p:cxnSp>
         <p:nvCxnSpPr>
-          <p:cNvPr id="264" name="ice_image_5_1_1" descr="Editable line; source id ice_image_5_1_1"/>
+          <p:cNvPr id="292" name="ice_image_5_1_1" descr="Editable line; source id ice_image_5_1_1"/>
           <p:cNvCxnSpPr/>
           <p:nvPr/>
         </p:nvCxnSpPr>
@@ -17390,7 +18903,7 @@
       </p:cxnSp>
       <p:cxnSp>
         <p:nvCxnSpPr>
-          <p:cNvPr id="265" name="ice_language_0" descr="Editable line; source id ice_language_0"/>
+          <p:cNvPr id="293" name="ice_language_0" descr="Editable line; source id ice_language_0"/>
           <p:cNvCxnSpPr/>
           <p:nvPr/>
         </p:nvCxnSpPr>
@@ -17426,7 +18939,7 @@
       </p:cxnSp>
       <p:cxnSp>
         <p:nvCxnSpPr>
-          <p:cNvPr id="266" name="ice_language_0_0_-1" descr="Editable line; source id ice_language_0_0_-1"/>
+          <p:cNvPr id="294" name="ice_language_0_0_-1" descr="Editable line; source id ice_language_0_0_-1"/>
           <p:cNvCxnSpPr/>
           <p:nvPr/>
         </p:nvCxnSpPr>
@@ -17462,7 +18975,7 @@
       </p:cxnSp>
       <p:cxnSp>
         <p:nvCxnSpPr>
-          <p:cNvPr id="267" name="ice_language_0_0_1" descr="Editable line; source id ice_language_0_0_1"/>
+          <p:cNvPr id="295" name="ice_language_0_0_1" descr="Editable line; source id ice_language_0_0_1"/>
           <p:cNvCxnSpPr/>
           <p:nvPr/>
         </p:nvCxnSpPr>
@@ -17498,7 +19011,7 @@
       </p:cxnSp>
       <p:cxnSp>
         <p:nvCxnSpPr>
-          <p:cNvPr id="268" name="ice_language_0_1_-1" descr="Editable line; source id ice_language_0_1_-1"/>
+          <p:cNvPr id="296" name="ice_language_0_1_-1" descr="Editable line; source id ice_language_0_1_-1"/>
           <p:cNvCxnSpPr/>
           <p:nvPr/>
         </p:nvCxnSpPr>
@@ -17534,7 +19047,7 @@
       </p:cxnSp>
       <p:cxnSp>
         <p:nvCxnSpPr>
-          <p:cNvPr id="269" name="ice_language_0_1_1" descr="Editable line; source id ice_language_0_1_1"/>
+          <p:cNvPr id="297" name="ice_language_0_1_1" descr="Editable line; source id ice_language_0_1_1"/>
           <p:cNvCxnSpPr/>
           <p:nvPr/>
         </p:nvCxnSpPr>
@@ -17570,7 +19083,7 @@
       </p:cxnSp>
       <p:cxnSp>
         <p:nvCxnSpPr>
-          <p:cNvPr id="270" name="ice_language_1" descr="Editable line; source id ice_language_1"/>
+          <p:cNvPr id="298" name="ice_language_1" descr="Editable line; source id ice_language_1"/>
           <p:cNvCxnSpPr/>
           <p:nvPr/>
         </p:nvCxnSpPr>
@@ -17606,7 +19119,7 @@
       </p:cxnSp>
       <p:cxnSp>
         <p:nvCxnSpPr>
-          <p:cNvPr id="271" name="ice_language_1_0_-1" descr="Editable line; source id ice_language_1_0_-1"/>
+          <p:cNvPr id="299" name="ice_language_1_0_-1" descr="Editable line; source id ice_language_1_0_-1"/>
           <p:cNvCxnSpPr/>
           <p:nvPr/>
         </p:nvCxnSpPr>
@@ -17642,7 +19155,7 @@
       </p:cxnSp>
       <p:cxnSp>
         <p:nvCxnSpPr>
-          <p:cNvPr id="272" name="ice_language_1_0_1" descr="Editable line; source id ice_language_1_0_1"/>
+          <p:cNvPr id="300" name="ice_language_1_0_1" descr="Editable line; source id ice_language_1_0_1"/>
           <p:cNvCxnSpPr/>
           <p:nvPr/>
         </p:nvCxnSpPr>
@@ -17678,7 +19191,7 @@
       </p:cxnSp>
       <p:cxnSp>
         <p:nvCxnSpPr>
-          <p:cNvPr id="273" name="ice_language_1_1_-1" descr="Editable line; source id ice_language_1_1_-1"/>
+          <p:cNvPr id="301" name="ice_language_1_1_-1" descr="Editable line; source id ice_language_1_1_-1"/>
           <p:cNvCxnSpPr/>
           <p:nvPr/>
         </p:nvCxnSpPr>
@@ -17714,7 +19227,7 @@
       </p:cxnSp>
       <p:cxnSp>
         <p:nvCxnSpPr>
-          <p:cNvPr id="274" name="ice_language_1_1_1" descr="Editable line; source id ice_language_1_1_1"/>
+          <p:cNvPr id="302" name="ice_language_1_1_1" descr="Editable line; source id ice_language_1_1_1"/>
           <p:cNvCxnSpPr/>
           <p:nvPr/>
         </p:nvCxnSpPr>
@@ -17750,7 +19263,7 @@
       </p:cxnSp>
       <p:cxnSp>
         <p:nvCxnSpPr>
-          <p:cNvPr id="275" name="ice_language_2" descr="Editable line; source id ice_language_2"/>
+          <p:cNvPr id="303" name="ice_language_2" descr="Editable line; source id ice_language_2"/>
           <p:cNvCxnSpPr/>
           <p:nvPr/>
         </p:nvCxnSpPr>
@@ -17786,7 +19299,7 @@
       </p:cxnSp>
       <p:cxnSp>
         <p:nvCxnSpPr>
-          <p:cNvPr id="276" name="ice_language_2_0_-1" descr="Editable line; source id ice_language_2_0_-1"/>
+          <p:cNvPr id="304" name="ice_language_2_0_-1" descr="Editable line; source id ice_language_2_0_-1"/>
           <p:cNvCxnSpPr/>
           <p:nvPr/>
         </p:nvCxnSpPr>
@@ -17822,7 +19335,7 @@
       </p:cxnSp>
       <p:cxnSp>
         <p:nvCxnSpPr>
-          <p:cNvPr id="277" name="ice_language_2_0_1" descr="Editable line; source id ice_language_2_0_1"/>
+          <p:cNvPr id="305" name="ice_language_2_0_1" descr="Editable line; source id ice_language_2_0_1"/>
           <p:cNvCxnSpPr/>
           <p:nvPr/>
         </p:nvCxnSpPr>
@@ -17858,7 +19371,7 @@
       </p:cxnSp>
       <p:cxnSp>
         <p:nvCxnSpPr>
-          <p:cNvPr id="278" name="ice_language_2_1_-1" descr="Editable line; source id ice_language_2_1_-1"/>
+          <p:cNvPr id="306" name="ice_language_2_1_-1" descr="Editable line; source id ice_language_2_1_-1"/>
           <p:cNvCxnSpPr/>
           <p:nvPr/>
         </p:nvCxnSpPr>
@@ -17894,7 +19407,7 @@
       </p:cxnSp>
       <p:cxnSp>
         <p:nvCxnSpPr>
-          <p:cNvPr id="279" name="ice_language_2_1_1" descr="Editable line; source id ice_language_2_1_1"/>
+          <p:cNvPr id="307" name="ice_language_2_1_1" descr="Editable line; source id ice_language_2_1_1"/>
           <p:cNvCxnSpPr/>
           <p:nvPr/>
         </p:nvCxnSpPr>
@@ -17930,7 +19443,7 @@
       </p:cxnSp>
       <p:cxnSp>
         <p:nvCxnSpPr>
-          <p:cNvPr id="280" name="ice_language_3" descr="Editable line; source id ice_language_3"/>
+          <p:cNvPr id="308" name="ice_language_3" descr="Editable line; source id ice_language_3"/>
           <p:cNvCxnSpPr/>
           <p:nvPr/>
         </p:nvCxnSpPr>
@@ -17966,7 +19479,7 @@
       </p:cxnSp>
       <p:cxnSp>
         <p:nvCxnSpPr>
-          <p:cNvPr id="281" name="ice_language_3_0_-1" descr="Editable line; source id ice_language_3_0_-1"/>
+          <p:cNvPr id="309" name="ice_language_3_0_-1" descr="Editable line; source id ice_language_3_0_-1"/>
           <p:cNvCxnSpPr/>
           <p:nvPr/>
         </p:nvCxnSpPr>
@@ -18002,7 +19515,7 @@
       </p:cxnSp>
       <p:cxnSp>
         <p:nvCxnSpPr>
-          <p:cNvPr id="282" name="ice_language_3_0_1" descr="Editable line; source id ice_language_3_0_1"/>
+          <p:cNvPr id="310" name="ice_language_3_0_1" descr="Editable line; source id ice_language_3_0_1"/>
           <p:cNvCxnSpPr/>
           <p:nvPr/>
         </p:nvCxnSpPr>
@@ -18038,7 +19551,7 @@
       </p:cxnSp>
       <p:cxnSp>
         <p:nvCxnSpPr>
-          <p:cNvPr id="283" name="ice_language_3_1_-1" descr="Editable line; source id ice_language_3_1_-1"/>
+          <p:cNvPr id="311" name="ice_language_3_1_-1" descr="Editable line; source id ice_language_3_1_-1"/>
           <p:cNvCxnSpPr/>
           <p:nvPr/>
         </p:nvCxnSpPr>
@@ -18074,7 +19587,7 @@
       </p:cxnSp>
       <p:cxnSp>
         <p:nvCxnSpPr>
-          <p:cNvPr id="284" name="ice_language_3_1_1" descr="Editable line; source id ice_language_3_1_1"/>
+          <p:cNvPr id="312" name="ice_language_3_1_1" descr="Editable line; source id ice_language_3_1_1"/>
           <p:cNvCxnSpPr/>
           <p:nvPr/>
         </p:nvCxnSpPr>
@@ -18110,7 +19623,7 @@
       </p:cxnSp>
       <p:cxnSp>
         <p:nvCxnSpPr>
-          <p:cNvPr id="285" name="ice_language_4" descr="Editable line; source id ice_language_4"/>
+          <p:cNvPr id="313" name="ice_language_4" descr="Editable line; source id ice_language_4"/>
           <p:cNvCxnSpPr/>
           <p:nvPr/>
         </p:nvCxnSpPr>
@@ -18146,7 +19659,7 @@
       </p:cxnSp>
       <p:cxnSp>
         <p:nvCxnSpPr>
-          <p:cNvPr id="286" name="ice_language_4_0_-1" descr="Editable line; source id ice_language_4_0_-1"/>
+          <p:cNvPr id="314" name="ice_language_4_0_-1" descr="Editable line; source id ice_language_4_0_-1"/>
           <p:cNvCxnSpPr/>
           <p:nvPr/>
         </p:nvCxnSpPr>
@@ -18182,7 +19695,7 @@
       </p:cxnSp>
       <p:cxnSp>
         <p:nvCxnSpPr>
-          <p:cNvPr id="287" name="ice_language_4_0_1" descr="Editable line; source id ice_language_4_0_1"/>
+          <p:cNvPr id="315" name="ice_language_4_0_1" descr="Editable line; source id ice_language_4_0_1"/>
           <p:cNvCxnSpPr/>
           <p:nvPr/>
         </p:nvCxnSpPr>
@@ -18218,7 +19731,7 @@
       </p:cxnSp>
       <p:cxnSp>
         <p:nvCxnSpPr>
-          <p:cNvPr id="288" name="ice_language_4_1_-1" descr="Editable line; source id ice_language_4_1_-1"/>
+          <p:cNvPr id="316" name="ice_language_4_1_-1" descr="Editable line; source id ice_language_4_1_-1"/>
           <p:cNvCxnSpPr/>
           <p:nvPr/>
         </p:nvCxnSpPr>
@@ -18254,7 +19767,7 @@
       </p:cxnSp>
       <p:cxnSp>
         <p:nvCxnSpPr>
-          <p:cNvPr id="289" name="ice_language_4_1_1" descr="Editable line; source id ice_language_4_1_1"/>
+          <p:cNvPr id="317" name="ice_language_4_1_1" descr="Editable line; source id ice_language_4_1_1"/>
           <p:cNvCxnSpPr/>
           <p:nvPr/>
         </p:nvCxnSpPr>
@@ -18290,7 +19803,7 @@
       </p:cxnSp>
       <p:cxnSp>
         <p:nvCxnSpPr>
-          <p:cNvPr id="290" name="ice_language_5" descr="Editable line; source id ice_language_5"/>
+          <p:cNvPr id="318" name="ice_language_5" descr="Editable line; source id ice_language_5"/>
           <p:cNvCxnSpPr/>
           <p:nvPr/>
         </p:nvCxnSpPr>
@@ -18326,7 +19839,7 @@
       </p:cxnSp>
       <p:cxnSp>
         <p:nvCxnSpPr>
-          <p:cNvPr id="291" name="ice_language_5_0_-1" descr="Editable line; source id ice_language_5_0_-1"/>
+          <p:cNvPr id="319" name="ice_language_5_0_-1" descr="Editable line; source id ice_language_5_0_-1"/>
           <p:cNvCxnSpPr/>
           <p:nvPr/>
         </p:nvCxnSpPr>
@@ -18362,7 +19875,7 @@
       </p:cxnSp>
       <p:cxnSp>
         <p:nvCxnSpPr>
-          <p:cNvPr id="292" name="ice_language_5_0_1" descr="Editable line; source id ice_language_5_0_1"/>
+          <p:cNvPr id="320" name="ice_language_5_0_1" descr="Editable line; source id ice_language_5_0_1"/>
           <p:cNvCxnSpPr/>
           <p:nvPr/>
         </p:nvCxnSpPr>
@@ -18398,7 +19911,7 @@
       </p:cxnSp>
       <p:cxnSp>
         <p:nvCxnSpPr>
-          <p:cNvPr id="293" name="ice_language_5_1_-1" descr="Editable line; source id ice_language_5_1_-1"/>
+          <p:cNvPr id="321" name="ice_language_5_1_-1" descr="Editable line; source id ice_language_5_1_-1"/>
           <p:cNvCxnSpPr/>
           <p:nvPr/>
         </p:nvCxnSpPr>
@@ -18434,7 +19947,7 @@
       </p:cxnSp>
       <p:cxnSp>
         <p:nvCxnSpPr>
-          <p:cNvPr id="294" name="ice_language_5_1_1" descr="Editable line; source id ice_language_5_1_1"/>
+          <p:cNvPr id="322" name="ice_language_5_1_1" descr="Editable line; source id ice_language_5_1_1"/>
           <p:cNvCxnSpPr/>
           <p:nvPr/>
         </p:nvCxnSpPr>
